--- a/presentation/Securing-the-Path-to-the-Cloud.pptx
+++ b/presentation/Securing-the-Path-to-the-Cloud.pptx
@@ -215,7 +215,7 @@
             </a:lvl1pPr>
           </a:lstStyle>
           <a:p>
-            <a:fld id="{80AA4F9E-53F8-4CA4-B282-596ABDBECD13}" type="datetimeFigureOut">
+            <a:fld id="{B92E60B7-F76F-44AD-9953-9D2687CECE40}" type="datetimeFigureOut">
               <a:rPr lang="en-IN" smtClean="0"/>
               <a:t>21-10-2026</a:t>
             </a:fld>
@@ -374,7 +374,7 @@
             </a:lvl1pPr>
           </a:lstStyle>
           <a:p>
-            <a:fld id="{8A282806-5773-4A7E-8EDB-054B704E44DA}" type="slidenum">
+            <a:fld id="{6EC631D3-D24E-4CA0-9C02-E8073C67C1FB}" type="slidenum">
               <a:rPr lang="en-IN" smtClean="0"/>
               <a:t>‹#›</a:t>
             </a:fld>
@@ -385,7 +385,7 @@
     </p:spTree>
     <p:extLst>
       <p:ext uri="{BB962C8B-B14F-4D97-AF65-F5344CB8AC3E}">
-        <p14:creationId xmlns:p14="http://schemas.microsoft.com/office/powerpoint/2010/main" val="2290558053"/>
+        <p14:creationId xmlns:p14="http://schemas.microsoft.com/office/powerpoint/2010/main" val="464369494"/>
       </p:ext>
     </p:extLst>
   </p:cSld>
@@ -552,7 +552,7 @@
           <a:bodyPr/>
           <a:lstStyle/>
           <a:p>
-            <a:fld id="{8A282806-5773-4A7E-8EDB-054B704E44DA}" type="slidenum">
+            <a:fld id="{6EC631D3-D24E-4CA0-9C02-E8073C67C1FB}" type="slidenum">
               <a:rPr lang="en-IN" smtClean="0"/>
               <a:t>1</a:t>
             </a:fld>
@@ -563,7 +563,7 @@
     </p:spTree>
     <p:extLst>
       <p:ext uri="{BB962C8B-B14F-4D97-AF65-F5344CB8AC3E}">
-        <p14:creationId xmlns:p14="http://schemas.microsoft.com/office/powerpoint/2010/main" val="4006443989"/>
+        <p14:creationId xmlns:p14="http://schemas.microsoft.com/office/powerpoint/2010/main" val="630989437"/>
       </p:ext>
     </p:extLst>
   </p:cSld>
@@ -640,7 +640,7 @@
           <a:bodyPr/>
           <a:lstStyle/>
           <a:p>
-            <a:fld id="{8A282806-5773-4A7E-8EDB-054B704E44DA}" type="slidenum">
+            <a:fld id="{6EC631D3-D24E-4CA0-9C02-E8073C67C1FB}" type="slidenum">
               <a:rPr lang="en-IN" smtClean="0"/>
               <a:t>10</a:t>
             </a:fld>
@@ -651,7 +651,7 @@
     </p:spTree>
     <p:extLst>
       <p:ext uri="{BB962C8B-B14F-4D97-AF65-F5344CB8AC3E}">
-        <p14:creationId xmlns:p14="http://schemas.microsoft.com/office/powerpoint/2010/main" val="992115441"/>
+        <p14:creationId xmlns:p14="http://schemas.microsoft.com/office/powerpoint/2010/main" val="1784885191"/>
       </p:ext>
     </p:extLst>
   </p:cSld>
@@ -728,7 +728,7 @@
           <a:bodyPr/>
           <a:lstStyle/>
           <a:p>
-            <a:fld id="{8A282806-5773-4A7E-8EDB-054B704E44DA}" type="slidenum">
+            <a:fld id="{6EC631D3-D24E-4CA0-9C02-E8073C67C1FB}" type="slidenum">
               <a:rPr lang="en-IN" smtClean="0"/>
               <a:t>11</a:t>
             </a:fld>
@@ -739,7 +739,7 @@
     </p:spTree>
     <p:extLst>
       <p:ext uri="{BB962C8B-B14F-4D97-AF65-F5344CB8AC3E}">
-        <p14:creationId xmlns:p14="http://schemas.microsoft.com/office/powerpoint/2010/main" val="3408187682"/>
+        <p14:creationId xmlns:p14="http://schemas.microsoft.com/office/powerpoint/2010/main" val="2189988930"/>
       </p:ext>
     </p:extLst>
   </p:cSld>
@@ -816,7 +816,7 @@
           <a:bodyPr/>
           <a:lstStyle/>
           <a:p>
-            <a:fld id="{8A282806-5773-4A7E-8EDB-054B704E44DA}" type="slidenum">
+            <a:fld id="{6EC631D3-D24E-4CA0-9C02-E8073C67C1FB}" type="slidenum">
               <a:rPr lang="en-IN" smtClean="0"/>
               <a:t>12</a:t>
             </a:fld>
@@ -827,7 +827,7 @@
     </p:spTree>
     <p:extLst>
       <p:ext uri="{BB962C8B-B14F-4D97-AF65-F5344CB8AC3E}">
-        <p14:creationId xmlns:p14="http://schemas.microsoft.com/office/powerpoint/2010/main" val="2578472460"/>
+        <p14:creationId xmlns:p14="http://schemas.microsoft.com/office/powerpoint/2010/main" val="74136575"/>
       </p:ext>
     </p:extLst>
   </p:cSld>
@@ -904,7 +904,7 @@
           <a:bodyPr/>
           <a:lstStyle/>
           <a:p>
-            <a:fld id="{8A282806-5773-4A7E-8EDB-054B704E44DA}" type="slidenum">
+            <a:fld id="{6EC631D3-D24E-4CA0-9C02-E8073C67C1FB}" type="slidenum">
               <a:rPr lang="en-IN" smtClean="0"/>
               <a:t>13</a:t>
             </a:fld>
@@ -915,7 +915,7 @@
     </p:spTree>
     <p:extLst>
       <p:ext uri="{BB962C8B-B14F-4D97-AF65-F5344CB8AC3E}">
-        <p14:creationId xmlns:p14="http://schemas.microsoft.com/office/powerpoint/2010/main" val="3711145071"/>
+        <p14:creationId xmlns:p14="http://schemas.microsoft.com/office/powerpoint/2010/main" val="528414308"/>
       </p:ext>
     </p:extLst>
   </p:cSld>
@@ -992,7 +992,7 @@
           <a:bodyPr/>
           <a:lstStyle/>
           <a:p>
-            <a:fld id="{8A282806-5773-4A7E-8EDB-054B704E44DA}" type="slidenum">
+            <a:fld id="{6EC631D3-D24E-4CA0-9C02-E8073C67C1FB}" type="slidenum">
               <a:rPr lang="en-IN" smtClean="0"/>
               <a:t>14</a:t>
             </a:fld>
@@ -1003,7 +1003,7 @@
     </p:spTree>
     <p:extLst>
       <p:ext uri="{BB962C8B-B14F-4D97-AF65-F5344CB8AC3E}">
-        <p14:creationId xmlns:p14="http://schemas.microsoft.com/office/powerpoint/2010/main" val="427025363"/>
+        <p14:creationId xmlns:p14="http://schemas.microsoft.com/office/powerpoint/2010/main" val="2593610691"/>
       </p:ext>
     </p:extLst>
   </p:cSld>
@@ -1080,7 +1080,7 @@
           <a:bodyPr/>
           <a:lstStyle/>
           <a:p>
-            <a:fld id="{8A282806-5773-4A7E-8EDB-054B704E44DA}" type="slidenum">
+            <a:fld id="{6EC631D3-D24E-4CA0-9C02-E8073C67C1FB}" type="slidenum">
               <a:rPr lang="en-IN" smtClean="0"/>
               <a:t>15</a:t>
             </a:fld>
@@ -1091,7 +1091,7 @@
     </p:spTree>
     <p:extLst>
       <p:ext uri="{BB962C8B-B14F-4D97-AF65-F5344CB8AC3E}">
-        <p14:creationId xmlns:p14="http://schemas.microsoft.com/office/powerpoint/2010/main" val="343758844"/>
+        <p14:creationId xmlns:p14="http://schemas.microsoft.com/office/powerpoint/2010/main" val="2553393239"/>
       </p:ext>
     </p:extLst>
   </p:cSld>
@@ -1168,7 +1168,7 @@
           <a:bodyPr/>
           <a:lstStyle/>
           <a:p>
-            <a:fld id="{8A282806-5773-4A7E-8EDB-054B704E44DA}" type="slidenum">
+            <a:fld id="{6EC631D3-D24E-4CA0-9C02-E8073C67C1FB}" type="slidenum">
               <a:rPr lang="en-IN" smtClean="0"/>
               <a:t>16</a:t>
             </a:fld>
@@ -1179,7 +1179,7 @@
     </p:spTree>
     <p:extLst>
       <p:ext uri="{BB962C8B-B14F-4D97-AF65-F5344CB8AC3E}">
-        <p14:creationId xmlns:p14="http://schemas.microsoft.com/office/powerpoint/2010/main" val="1653982768"/>
+        <p14:creationId xmlns:p14="http://schemas.microsoft.com/office/powerpoint/2010/main" val="2218874264"/>
       </p:ext>
     </p:extLst>
   </p:cSld>
@@ -1256,7 +1256,7 @@
           <a:bodyPr/>
           <a:lstStyle/>
           <a:p>
-            <a:fld id="{8A282806-5773-4A7E-8EDB-054B704E44DA}" type="slidenum">
+            <a:fld id="{6EC631D3-D24E-4CA0-9C02-E8073C67C1FB}" type="slidenum">
               <a:rPr lang="en-IN" smtClean="0"/>
               <a:t>17</a:t>
             </a:fld>
@@ -1267,7 +1267,7 @@
     </p:spTree>
     <p:extLst>
       <p:ext uri="{BB962C8B-B14F-4D97-AF65-F5344CB8AC3E}">
-        <p14:creationId xmlns:p14="http://schemas.microsoft.com/office/powerpoint/2010/main" val="4242929024"/>
+        <p14:creationId xmlns:p14="http://schemas.microsoft.com/office/powerpoint/2010/main" val="885706284"/>
       </p:ext>
     </p:extLst>
   </p:cSld>
@@ -1344,7 +1344,7 @@
           <a:bodyPr/>
           <a:lstStyle/>
           <a:p>
-            <a:fld id="{8A282806-5773-4A7E-8EDB-054B704E44DA}" type="slidenum">
+            <a:fld id="{6EC631D3-D24E-4CA0-9C02-E8073C67C1FB}" type="slidenum">
               <a:rPr lang="en-IN" smtClean="0"/>
               <a:t>18</a:t>
             </a:fld>
@@ -1355,7 +1355,7 @@
     </p:spTree>
     <p:extLst>
       <p:ext uri="{BB962C8B-B14F-4D97-AF65-F5344CB8AC3E}">
-        <p14:creationId xmlns:p14="http://schemas.microsoft.com/office/powerpoint/2010/main" val="781613998"/>
+        <p14:creationId xmlns:p14="http://schemas.microsoft.com/office/powerpoint/2010/main" val="891131557"/>
       </p:ext>
     </p:extLst>
   </p:cSld>
@@ -1432,7 +1432,7 @@
           <a:bodyPr/>
           <a:lstStyle/>
           <a:p>
-            <a:fld id="{8A282806-5773-4A7E-8EDB-054B704E44DA}" type="slidenum">
+            <a:fld id="{6EC631D3-D24E-4CA0-9C02-E8073C67C1FB}" type="slidenum">
               <a:rPr lang="en-IN" smtClean="0"/>
               <a:t>19</a:t>
             </a:fld>
@@ -1443,7 +1443,7 @@
     </p:spTree>
     <p:extLst>
       <p:ext uri="{BB962C8B-B14F-4D97-AF65-F5344CB8AC3E}">
-        <p14:creationId xmlns:p14="http://schemas.microsoft.com/office/powerpoint/2010/main" val="3983035825"/>
+        <p14:creationId xmlns:p14="http://schemas.microsoft.com/office/powerpoint/2010/main" val="233574192"/>
       </p:ext>
     </p:extLst>
   </p:cSld>
@@ -1520,7 +1520,7 @@
           <a:bodyPr/>
           <a:lstStyle/>
           <a:p>
-            <a:fld id="{8A282806-5773-4A7E-8EDB-054B704E44DA}" type="slidenum">
+            <a:fld id="{6EC631D3-D24E-4CA0-9C02-E8073C67C1FB}" type="slidenum">
               <a:rPr lang="en-IN" smtClean="0"/>
               <a:t>2</a:t>
             </a:fld>
@@ -1531,7 +1531,7 @@
     </p:spTree>
     <p:extLst>
       <p:ext uri="{BB962C8B-B14F-4D97-AF65-F5344CB8AC3E}">
-        <p14:creationId xmlns:p14="http://schemas.microsoft.com/office/powerpoint/2010/main" val="253945287"/>
+        <p14:creationId xmlns:p14="http://schemas.microsoft.com/office/powerpoint/2010/main" val="4122826447"/>
       </p:ext>
     </p:extLst>
   </p:cSld>
@@ -1608,7 +1608,7 @@
           <a:bodyPr/>
           <a:lstStyle/>
           <a:p>
-            <a:fld id="{8A282806-5773-4A7E-8EDB-054B704E44DA}" type="slidenum">
+            <a:fld id="{6EC631D3-D24E-4CA0-9C02-E8073C67C1FB}" type="slidenum">
               <a:rPr lang="en-IN" smtClean="0"/>
               <a:t>20</a:t>
             </a:fld>
@@ -1619,7 +1619,7 @@
     </p:spTree>
     <p:extLst>
       <p:ext uri="{BB962C8B-B14F-4D97-AF65-F5344CB8AC3E}">
-        <p14:creationId xmlns:p14="http://schemas.microsoft.com/office/powerpoint/2010/main" val="936346445"/>
+        <p14:creationId xmlns:p14="http://schemas.microsoft.com/office/powerpoint/2010/main" val="2886848067"/>
       </p:ext>
     </p:extLst>
   </p:cSld>
@@ -1696,7 +1696,7 @@
           <a:bodyPr/>
           <a:lstStyle/>
           <a:p>
-            <a:fld id="{8A282806-5773-4A7E-8EDB-054B704E44DA}" type="slidenum">
+            <a:fld id="{6EC631D3-D24E-4CA0-9C02-E8073C67C1FB}" type="slidenum">
               <a:rPr lang="en-IN" smtClean="0"/>
               <a:t>21</a:t>
             </a:fld>
@@ -1707,7 +1707,7 @@
     </p:spTree>
     <p:extLst>
       <p:ext uri="{BB962C8B-B14F-4D97-AF65-F5344CB8AC3E}">
-        <p14:creationId xmlns:p14="http://schemas.microsoft.com/office/powerpoint/2010/main" val="4225855027"/>
+        <p14:creationId xmlns:p14="http://schemas.microsoft.com/office/powerpoint/2010/main" val="4156646616"/>
       </p:ext>
     </p:extLst>
   </p:cSld>
@@ -1784,7 +1784,7 @@
           <a:bodyPr/>
           <a:lstStyle/>
           <a:p>
-            <a:fld id="{8A282806-5773-4A7E-8EDB-054B704E44DA}" type="slidenum">
+            <a:fld id="{6EC631D3-D24E-4CA0-9C02-E8073C67C1FB}" type="slidenum">
               <a:rPr lang="en-IN" smtClean="0"/>
               <a:t>22</a:t>
             </a:fld>
@@ -1795,7 +1795,7 @@
     </p:spTree>
     <p:extLst>
       <p:ext uri="{BB962C8B-B14F-4D97-AF65-F5344CB8AC3E}">
-        <p14:creationId xmlns:p14="http://schemas.microsoft.com/office/powerpoint/2010/main" val="1605497462"/>
+        <p14:creationId xmlns:p14="http://schemas.microsoft.com/office/powerpoint/2010/main" val="4224725532"/>
       </p:ext>
     </p:extLst>
   </p:cSld>
@@ -1872,7 +1872,7 @@
           <a:bodyPr/>
           <a:lstStyle/>
           <a:p>
-            <a:fld id="{8A282806-5773-4A7E-8EDB-054B704E44DA}" type="slidenum">
+            <a:fld id="{6EC631D3-D24E-4CA0-9C02-E8073C67C1FB}" type="slidenum">
               <a:rPr lang="en-IN" smtClean="0"/>
               <a:t>23</a:t>
             </a:fld>
@@ -1883,7 +1883,7 @@
     </p:spTree>
     <p:extLst>
       <p:ext uri="{BB962C8B-B14F-4D97-AF65-F5344CB8AC3E}">
-        <p14:creationId xmlns:p14="http://schemas.microsoft.com/office/powerpoint/2010/main" val="2120531626"/>
+        <p14:creationId xmlns:p14="http://schemas.microsoft.com/office/powerpoint/2010/main" val="3495881633"/>
       </p:ext>
     </p:extLst>
   </p:cSld>
@@ -1960,7 +1960,7 @@
           <a:bodyPr/>
           <a:lstStyle/>
           <a:p>
-            <a:fld id="{8A282806-5773-4A7E-8EDB-054B704E44DA}" type="slidenum">
+            <a:fld id="{6EC631D3-D24E-4CA0-9C02-E8073C67C1FB}" type="slidenum">
               <a:rPr lang="en-IN" smtClean="0"/>
               <a:t>24</a:t>
             </a:fld>
@@ -1971,7 +1971,7 @@
     </p:spTree>
     <p:extLst>
       <p:ext uri="{BB962C8B-B14F-4D97-AF65-F5344CB8AC3E}">
-        <p14:creationId xmlns:p14="http://schemas.microsoft.com/office/powerpoint/2010/main" val="1370353691"/>
+        <p14:creationId xmlns:p14="http://schemas.microsoft.com/office/powerpoint/2010/main" val="1913508742"/>
       </p:ext>
     </p:extLst>
   </p:cSld>
@@ -2048,7 +2048,7 @@
           <a:bodyPr/>
           <a:lstStyle/>
           <a:p>
-            <a:fld id="{8A282806-5773-4A7E-8EDB-054B704E44DA}" type="slidenum">
+            <a:fld id="{6EC631D3-D24E-4CA0-9C02-E8073C67C1FB}" type="slidenum">
               <a:rPr lang="en-IN" smtClean="0"/>
               <a:t>25</a:t>
             </a:fld>
@@ -2059,7 +2059,7 @@
     </p:spTree>
     <p:extLst>
       <p:ext uri="{BB962C8B-B14F-4D97-AF65-F5344CB8AC3E}">
-        <p14:creationId xmlns:p14="http://schemas.microsoft.com/office/powerpoint/2010/main" val="3110011863"/>
+        <p14:creationId xmlns:p14="http://schemas.microsoft.com/office/powerpoint/2010/main" val="307389859"/>
       </p:ext>
     </p:extLst>
   </p:cSld>
@@ -2136,7 +2136,7 @@
           <a:bodyPr/>
           <a:lstStyle/>
           <a:p>
-            <a:fld id="{8A282806-5773-4A7E-8EDB-054B704E44DA}" type="slidenum">
+            <a:fld id="{6EC631D3-D24E-4CA0-9C02-E8073C67C1FB}" type="slidenum">
               <a:rPr lang="en-IN" smtClean="0"/>
               <a:t>26</a:t>
             </a:fld>
@@ -2147,7 +2147,7 @@
     </p:spTree>
     <p:extLst>
       <p:ext uri="{BB962C8B-B14F-4D97-AF65-F5344CB8AC3E}">
-        <p14:creationId xmlns:p14="http://schemas.microsoft.com/office/powerpoint/2010/main" val="2717589749"/>
+        <p14:creationId xmlns:p14="http://schemas.microsoft.com/office/powerpoint/2010/main" val="1781901262"/>
       </p:ext>
     </p:extLst>
   </p:cSld>
@@ -2224,7 +2224,7 @@
           <a:bodyPr/>
           <a:lstStyle/>
           <a:p>
-            <a:fld id="{8A282806-5773-4A7E-8EDB-054B704E44DA}" type="slidenum">
+            <a:fld id="{6EC631D3-D24E-4CA0-9C02-E8073C67C1FB}" type="slidenum">
               <a:rPr lang="en-IN" smtClean="0"/>
               <a:t>3</a:t>
             </a:fld>
@@ -2235,7 +2235,7 @@
     </p:spTree>
     <p:extLst>
       <p:ext uri="{BB962C8B-B14F-4D97-AF65-F5344CB8AC3E}">
-        <p14:creationId xmlns:p14="http://schemas.microsoft.com/office/powerpoint/2010/main" val="1537288930"/>
+        <p14:creationId xmlns:p14="http://schemas.microsoft.com/office/powerpoint/2010/main" val="1140463710"/>
       </p:ext>
     </p:extLst>
   </p:cSld>
@@ -2312,7 +2312,7 @@
           <a:bodyPr/>
           <a:lstStyle/>
           <a:p>
-            <a:fld id="{8A282806-5773-4A7E-8EDB-054B704E44DA}" type="slidenum">
+            <a:fld id="{6EC631D3-D24E-4CA0-9C02-E8073C67C1FB}" type="slidenum">
               <a:rPr lang="en-IN" smtClean="0"/>
               <a:t>4</a:t>
             </a:fld>
@@ -2323,7 +2323,7 @@
     </p:spTree>
     <p:extLst>
       <p:ext uri="{BB962C8B-B14F-4D97-AF65-F5344CB8AC3E}">
-        <p14:creationId xmlns:p14="http://schemas.microsoft.com/office/powerpoint/2010/main" val="4254475518"/>
+        <p14:creationId xmlns:p14="http://schemas.microsoft.com/office/powerpoint/2010/main" val="1880517383"/>
       </p:ext>
     </p:extLst>
   </p:cSld>
@@ -2400,7 +2400,7 @@
           <a:bodyPr/>
           <a:lstStyle/>
           <a:p>
-            <a:fld id="{8A282806-5773-4A7E-8EDB-054B704E44DA}" type="slidenum">
+            <a:fld id="{6EC631D3-D24E-4CA0-9C02-E8073C67C1FB}" type="slidenum">
               <a:rPr lang="en-IN" smtClean="0"/>
               <a:t>5</a:t>
             </a:fld>
@@ -2411,7 +2411,7 @@
     </p:spTree>
     <p:extLst>
       <p:ext uri="{BB962C8B-B14F-4D97-AF65-F5344CB8AC3E}">
-        <p14:creationId xmlns:p14="http://schemas.microsoft.com/office/powerpoint/2010/main" val="1843041461"/>
+        <p14:creationId xmlns:p14="http://schemas.microsoft.com/office/powerpoint/2010/main" val="2814551909"/>
       </p:ext>
     </p:extLst>
   </p:cSld>
@@ -2488,7 +2488,7 @@
           <a:bodyPr/>
           <a:lstStyle/>
           <a:p>
-            <a:fld id="{8A282806-5773-4A7E-8EDB-054B704E44DA}" type="slidenum">
+            <a:fld id="{6EC631D3-D24E-4CA0-9C02-E8073C67C1FB}" type="slidenum">
               <a:rPr lang="en-IN" smtClean="0"/>
               <a:t>6</a:t>
             </a:fld>
@@ -2499,7 +2499,7 @@
     </p:spTree>
     <p:extLst>
       <p:ext uri="{BB962C8B-B14F-4D97-AF65-F5344CB8AC3E}">
-        <p14:creationId xmlns:p14="http://schemas.microsoft.com/office/powerpoint/2010/main" val="1796415928"/>
+        <p14:creationId xmlns:p14="http://schemas.microsoft.com/office/powerpoint/2010/main" val="4247355555"/>
       </p:ext>
     </p:extLst>
   </p:cSld>
@@ -2576,7 +2576,7 @@
           <a:bodyPr/>
           <a:lstStyle/>
           <a:p>
-            <a:fld id="{8A282806-5773-4A7E-8EDB-054B704E44DA}" type="slidenum">
+            <a:fld id="{6EC631D3-D24E-4CA0-9C02-E8073C67C1FB}" type="slidenum">
               <a:rPr lang="en-IN" smtClean="0"/>
               <a:t>7</a:t>
             </a:fld>
@@ -2587,7 +2587,7 @@
     </p:spTree>
     <p:extLst>
       <p:ext uri="{BB962C8B-B14F-4D97-AF65-F5344CB8AC3E}">
-        <p14:creationId xmlns:p14="http://schemas.microsoft.com/office/powerpoint/2010/main" val="1430230208"/>
+        <p14:creationId xmlns:p14="http://schemas.microsoft.com/office/powerpoint/2010/main" val="1462434432"/>
       </p:ext>
     </p:extLst>
   </p:cSld>
@@ -2664,7 +2664,7 @@
           <a:bodyPr/>
           <a:lstStyle/>
           <a:p>
-            <a:fld id="{8A282806-5773-4A7E-8EDB-054B704E44DA}" type="slidenum">
+            <a:fld id="{6EC631D3-D24E-4CA0-9C02-E8073C67C1FB}" type="slidenum">
               <a:rPr lang="en-IN" smtClean="0"/>
               <a:t>8</a:t>
             </a:fld>
@@ -2675,7 +2675,7 @@
     </p:spTree>
     <p:extLst>
       <p:ext uri="{BB962C8B-B14F-4D97-AF65-F5344CB8AC3E}">
-        <p14:creationId xmlns:p14="http://schemas.microsoft.com/office/powerpoint/2010/main" val="2951877984"/>
+        <p14:creationId xmlns:p14="http://schemas.microsoft.com/office/powerpoint/2010/main" val="1737385362"/>
       </p:ext>
     </p:extLst>
   </p:cSld>
@@ -2752,7 +2752,7 @@
           <a:bodyPr/>
           <a:lstStyle/>
           <a:p>
-            <a:fld id="{8A282806-5773-4A7E-8EDB-054B704E44DA}" type="slidenum">
+            <a:fld id="{6EC631D3-D24E-4CA0-9C02-E8073C67C1FB}" type="slidenum">
               <a:rPr lang="en-IN" smtClean="0"/>
               <a:t>9</a:t>
             </a:fld>
@@ -2763,7 +2763,7 @@
     </p:spTree>
     <p:extLst>
       <p:ext uri="{BB962C8B-B14F-4D97-AF65-F5344CB8AC3E}">
-        <p14:creationId xmlns:p14="http://schemas.microsoft.com/office/powerpoint/2010/main" val="1812048498"/>
+        <p14:creationId xmlns:p14="http://schemas.microsoft.com/office/powerpoint/2010/main" val="1130296584"/>
       </p:ext>
     </p:extLst>
   </p:cSld>
@@ -2795,7 +2795,7 @@
           <p:cNvPr id="2" name="Title 1">
             <a:extLst>
               <a:ext uri="{FF2B5EF4-FFF2-40B4-BE49-F238E27FC236}">
-                <a16:creationId xmlns:a16="http://schemas.microsoft.com/office/drawing/2014/main" id="{63497DF8-5B8C-5ED0-2ABF-1ED820300538}"/>
+                <a16:creationId xmlns:a16="http://schemas.microsoft.com/office/drawing/2014/main" id="{355B6A7C-8ADE-ECC2-8704-E46CCD455D9C}"/>
               </a:ext>
             </a:extLst>
           </p:cNvPr>
@@ -2833,7 +2833,7 @@
           <p:cNvPr id="3" name="Subtitle 2">
             <a:extLst>
               <a:ext uri="{FF2B5EF4-FFF2-40B4-BE49-F238E27FC236}">
-                <a16:creationId xmlns:a16="http://schemas.microsoft.com/office/drawing/2014/main" id="{A80D331A-3E3D-38AA-EC55-9317F6E702E8}"/>
+                <a16:creationId xmlns:a16="http://schemas.microsoft.com/office/drawing/2014/main" id="{0825BDB4-74E0-4240-D98C-43B28B391C73}"/>
               </a:ext>
             </a:extLst>
           </p:cNvPr>
@@ -2904,7 +2904,7 @@
           <p:cNvPr id="4" name="Date Placeholder 3">
             <a:extLst>
               <a:ext uri="{FF2B5EF4-FFF2-40B4-BE49-F238E27FC236}">
-                <a16:creationId xmlns:a16="http://schemas.microsoft.com/office/drawing/2014/main" id="{DE452044-DCEA-180F-1DA4-E2AD14B2A719}"/>
+                <a16:creationId xmlns:a16="http://schemas.microsoft.com/office/drawing/2014/main" id="{6570873F-9AFD-735A-31DD-05C13859B4F3}"/>
               </a:ext>
             </a:extLst>
           </p:cNvPr>
@@ -2920,7 +2920,7 @@
           <a:bodyPr/>
           <a:lstStyle/>
           <a:p>
-            <a:fld id="{A54649B8-E294-4136-9C79-6865ED46EA31}" type="datetimeFigureOut">
+            <a:fld id="{EB9717B0-EE80-44E4-9C01-29DF6EECFE8D}" type="datetimeFigureOut">
               <a:rPr lang="en-IN" smtClean="0"/>
               <a:t>21-10-2026</a:t>
             </a:fld>
@@ -2933,7 +2933,7 @@
           <p:cNvPr id="5" name="Footer Placeholder 4">
             <a:extLst>
               <a:ext uri="{FF2B5EF4-FFF2-40B4-BE49-F238E27FC236}">
-                <a16:creationId xmlns:a16="http://schemas.microsoft.com/office/drawing/2014/main" id="{BC837916-FEEA-55D5-2547-171FA7106F41}"/>
+                <a16:creationId xmlns:a16="http://schemas.microsoft.com/office/drawing/2014/main" id="{78907251-5874-2BF4-5104-4A27260AAC68}"/>
               </a:ext>
             </a:extLst>
           </p:cNvPr>
@@ -2958,7 +2958,7 @@
           <p:cNvPr id="6" name="Slide Number Placeholder 5">
             <a:extLst>
               <a:ext uri="{FF2B5EF4-FFF2-40B4-BE49-F238E27FC236}">
-                <a16:creationId xmlns:a16="http://schemas.microsoft.com/office/drawing/2014/main" id="{34F5F0FF-A6CD-772B-5284-7F408B9BD470}"/>
+                <a16:creationId xmlns:a16="http://schemas.microsoft.com/office/drawing/2014/main" id="{FD4F6D9D-0DE5-47CA-5549-E7AC19216DC4}"/>
               </a:ext>
             </a:extLst>
           </p:cNvPr>
@@ -2974,7 +2974,7 @@
           <a:bodyPr/>
           <a:lstStyle/>
           <a:p>
-            <a:fld id="{E53BDD79-8E1D-4C89-A95B-8D68501DF1E5}" type="slidenum">
+            <a:fld id="{FDF9CEBF-D338-4DD8-99E2-EFE709396948}" type="slidenum">
               <a:rPr lang="en-IN" smtClean="0"/>
               <a:t>‹#›</a:t>
             </a:fld>
@@ -2985,7 +2985,7 @@
     </p:spTree>
     <p:extLst>
       <p:ext uri="{BB962C8B-B14F-4D97-AF65-F5344CB8AC3E}">
-        <p14:creationId xmlns:p14="http://schemas.microsoft.com/office/powerpoint/2010/main" val="1498509995"/>
+        <p14:creationId xmlns:p14="http://schemas.microsoft.com/office/powerpoint/2010/main" val="3062383878"/>
       </p:ext>
     </p:extLst>
   </p:cSld>
@@ -3017,7 +3017,7 @@
           <p:cNvPr id="2" name="Title 1">
             <a:extLst>
               <a:ext uri="{FF2B5EF4-FFF2-40B4-BE49-F238E27FC236}">
-                <a16:creationId xmlns:a16="http://schemas.microsoft.com/office/drawing/2014/main" id="{AC7EB42E-5FCD-4596-EFFF-4E739FAA03A0}"/>
+                <a16:creationId xmlns:a16="http://schemas.microsoft.com/office/drawing/2014/main" id="{85B4389E-5A5E-E326-487C-ADC75093688F}"/>
               </a:ext>
             </a:extLst>
           </p:cNvPr>
@@ -3046,7 +3046,7 @@
           <p:cNvPr id="3" name="Vertical Text Placeholder 2">
             <a:extLst>
               <a:ext uri="{FF2B5EF4-FFF2-40B4-BE49-F238E27FC236}">
-                <a16:creationId xmlns:a16="http://schemas.microsoft.com/office/drawing/2014/main" id="{89DF09B9-D56E-F010-049E-26CE865AC1F0}"/>
+                <a16:creationId xmlns:a16="http://schemas.microsoft.com/office/drawing/2014/main" id="{9B4D63C8-A251-3548-0927-E9AA90A6A975}"/>
               </a:ext>
             </a:extLst>
           </p:cNvPr>
@@ -3104,7 +3104,7 @@
           <p:cNvPr id="4" name="Date Placeholder 3">
             <a:extLst>
               <a:ext uri="{FF2B5EF4-FFF2-40B4-BE49-F238E27FC236}">
-                <a16:creationId xmlns:a16="http://schemas.microsoft.com/office/drawing/2014/main" id="{1C79B2A8-F3DF-7E1B-05D2-37C26055BE72}"/>
+                <a16:creationId xmlns:a16="http://schemas.microsoft.com/office/drawing/2014/main" id="{0F7621F2-8117-DE19-2F3D-1E24F580D95E}"/>
               </a:ext>
             </a:extLst>
           </p:cNvPr>
@@ -3120,7 +3120,7 @@
           <a:bodyPr/>
           <a:lstStyle/>
           <a:p>
-            <a:fld id="{A54649B8-E294-4136-9C79-6865ED46EA31}" type="datetimeFigureOut">
+            <a:fld id="{EB9717B0-EE80-44E4-9C01-29DF6EECFE8D}" type="datetimeFigureOut">
               <a:rPr lang="en-IN" smtClean="0"/>
               <a:t>21-10-2026</a:t>
             </a:fld>
@@ -3133,7 +3133,7 @@
           <p:cNvPr id="5" name="Footer Placeholder 4">
             <a:extLst>
               <a:ext uri="{FF2B5EF4-FFF2-40B4-BE49-F238E27FC236}">
-                <a16:creationId xmlns:a16="http://schemas.microsoft.com/office/drawing/2014/main" id="{816CEEA3-F86F-5859-8AB4-1FE562856D26}"/>
+                <a16:creationId xmlns:a16="http://schemas.microsoft.com/office/drawing/2014/main" id="{80D428E7-C077-7E14-E79E-4DF81C11DF29}"/>
               </a:ext>
             </a:extLst>
           </p:cNvPr>
@@ -3158,7 +3158,7 @@
           <p:cNvPr id="6" name="Slide Number Placeholder 5">
             <a:extLst>
               <a:ext uri="{FF2B5EF4-FFF2-40B4-BE49-F238E27FC236}">
-                <a16:creationId xmlns:a16="http://schemas.microsoft.com/office/drawing/2014/main" id="{2D0E1055-2B84-8D8A-A179-1DDC6683583A}"/>
+                <a16:creationId xmlns:a16="http://schemas.microsoft.com/office/drawing/2014/main" id="{8289996E-9284-396F-555A-9B0C2054141C}"/>
               </a:ext>
             </a:extLst>
           </p:cNvPr>
@@ -3174,7 +3174,7 @@
           <a:bodyPr/>
           <a:lstStyle/>
           <a:p>
-            <a:fld id="{E53BDD79-8E1D-4C89-A95B-8D68501DF1E5}" type="slidenum">
+            <a:fld id="{FDF9CEBF-D338-4DD8-99E2-EFE709396948}" type="slidenum">
               <a:rPr lang="en-IN" smtClean="0"/>
               <a:t>‹#›</a:t>
             </a:fld>
@@ -3185,7 +3185,7 @@
     </p:spTree>
     <p:extLst>
       <p:ext uri="{BB962C8B-B14F-4D97-AF65-F5344CB8AC3E}">
-        <p14:creationId xmlns:p14="http://schemas.microsoft.com/office/powerpoint/2010/main" val="2340809183"/>
+        <p14:creationId xmlns:p14="http://schemas.microsoft.com/office/powerpoint/2010/main" val="1307305327"/>
       </p:ext>
     </p:extLst>
   </p:cSld>
@@ -3217,7 +3217,7 @@
           <p:cNvPr id="2" name="Vertical Title 1">
             <a:extLst>
               <a:ext uri="{FF2B5EF4-FFF2-40B4-BE49-F238E27FC236}">
-                <a16:creationId xmlns:a16="http://schemas.microsoft.com/office/drawing/2014/main" id="{A2674717-ECC8-3027-15A3-222A59CE7F80}"/>
+                <a16:creationId xmlns:a16="http://schemas.microsoft.com/office/drawing/2014/main" id="{7CC426FE-0DF6-32D9-8B38-9A54DCD49E75}"/>
               </a:ext>
             </a:extLst>
           </p:cNvPr>
@@ -3251,7 +3251,7 @@
           <p:cNvPr id="3" name="Vertical Text Placeholder 2">
             <a:extLst>
               <a:ext uri="{FF2B5EF4-FFF2-40B4-BE49-F238E27FC236}">
-                <a16:creationId xmlns:a16="http://schemas.microsoft.com/office/drawing/2014/main" id="{4FD842A5-9AC7-3BC5-A657-23721FE893B8}"/>
+                <a16:creationId xmlns:a16="http://schemas.microsoft.com/office/drawing/2014/main" id="{A02BE040-B85F-81A8-E99F-94ED60CFCE27}"/>
               </a:ext>
             </a:extLst>
           </p:cNvPr>
@@ -3314,7 +3314,7 @@
           <p:cNvPr id="4" name="Date Placeholder 3">
             <a:extLst>
               <a:ext uri="{FF2B5EF4-FFF2-40B4-BE49-F238E27FC236}">
-                <a16:creationId xmlns:a16="http://schemas.microsoft.com/office/drawing/2014/main" id="{D6EA2D81-C394-57DB-800E-37052A7A0E5E}"/>
+                <a16:creationId xmlns:a16="http://schemas.microsoft.com/office/drawing/2014/main" id="{5CD91164-A0A0-72E9-1947-FB4A41C83E07}"/>
               </a:ext>
             </a:extLst>
           </p:cNvPr>
@@ -3330,7 +3330,7 @@
           <a:bodyPr/>
           <a:lstStyle/>
           <a:p>
-            <a:fld id="{A54649B8-E294-4136-9C79-6865ED46EA31}" type="datetimeFigureOut">
+            <a:fld id="{EB9717B0-EE80-44E4-9C01-29DF6EECFE8D}" type="datetimeFigureOut">
               <a:rPr lang="en-IN" smtClean="0"/>
               <a:t>21-10-2026</a:t>
             </a:fld>
@@ -3343,7 +3343,7 @@
           <p:cNvPr id="5" name="Footer Placeholder 4">
             <a:extLst>
               <a:ext uri="{FF2B5EF4-FFF2-40B4-BE49-F238E27FC236}">
-                <a16:creationId xmlns:a16="http://schemas.microsoft.com/office/drawing/2014/main" id="{86E93E43-A399-72EC-9054-B835EB17B4E3}"/>
+                <a16:creationId xmlns:a16="http://schemas.microsoft.com/office/drawing/2014/main" id="{14C6F4EB-C08D-011E-7B58-8A1B1CB04C14}"/>
               </a:ext>
             </a:extLst>
           </p:cNvPr>
@@ -3368,7 +3368,7 @@
           <p:cNvPr id="6" name="Slide Number Placeholder 5">
             <a:extLst>
               <a:ext uri="{FF2B5EF4-FFF2-40B4-BE49-F238E27FC236}">
-                <a16:creationId xmlns:a16="http://schemas.microsoft.com/office/drawing/2014/main" id="{A1A1E06A-8367-74AB-729C-11412FC747AD}"/>
+                <a16:creationId xmlns:a16="http://schemas.microsoft.com/office/drawing/2014/main" id="{4CF9645D-494E-A026-1029-00441FA89E96}"/>
               </a:ext>
             </a:extLst>
           </p:cNvPr>
@@ -3384,7 +3384,7 @@
           <a:bodyPr/>
           <a:lstStyle/>
           <a:p>
-            <a:fld id="{E53BDD79-8E1D-4C89-A95B-8D68501DF1E5}" type="slidenum">
+            <a:fld id="{FDF9CEBF-D338-4DD8-99E2-EFE709396948}" type="slidenum">
               <a:rPr lang="en-IN" smtClean="0"/>
               <a:t>‹#›</a:t>
             </a:fld>
@@ -3395,7 +3395,7 @@
     </p:spTree>
     <p:extLst>
       <p:ext uri="{BB962C8B-B14F-4D97-AF65-F5344CB8AC3E}">
-        <p14:creationId xmlns:p14="http://schemas.microsoft.com/office/powerpoint/2010/main" val="1909541167"/>
+        <p14:creationId xmlns:p14="http://schemas.microsoft.com/office/powerpoint/2010/main" val="1349340796"/>
       </p:ext>
     </p:extLst>
   </p:cSld>
@@ -3427,7 +3427,7 @@
           <p:cNvPr id="2" name="Title 1">
             <a:extLst>
               <a:ext uri="{FF2B5EF4-FFF2-40B4-BE49-F238E27FC236}">
-                <a16:creationId xmlns:a16="http://schemas.microsoft.com/office/drawing/2014/main" id="{E18BFD33-6886-A8F3-AB48-A89A947D918F}"/>
+                <a16:creationId xmlns:a16="http://schemas.microsoft.com/office/drawing/2014/main" id="{F065AEA0-799B-0705-C767-A341EC9486A8}"/>
               </a:ext>
             </a:extLst>
           </p:cNvPr>
@@ -3456,7 +3456,7 @@
           <p:cNvPr id="3" name="Content Placeholder 2">
             <a:extLst>
               <a:ext uri="{FF2B5EF4-FFF2-40B4-BE49-F238E27FC236}">
-                <a16:creationId xmlns:a16="http://schemas.microsoft.com/office/drawing/2014/main" id="{28442F3A-E90A-1ECD-2AFE-9C192C5F84C8}"/>
+                <a16:creationId xmlns:a16="http://schemas.microsoft.com/office/drawing/2014/main" id="{B48ECBA8-FE5C-83C3-4B7B-26EC9CB2F4E0}"/>
               </a:ext>
             </a:extLst>
           </p:cNvPr>
@@ -3514,7 +3514,7 @@
           <p:cNvPr id="4" name="Date Placeholder 3">
             <a:extLst>
               <a:ext uri="{FF2B5EF4-FFF2-40B4-BE49-F238E27FC236}">
-                <a16:creationId xmlns:a16="http://schemas.microsoft.com/office/drawing/2014/main" id="{19FE2B13-D6B4-CAE0-258A-774B18D87ECF}"/>
+                <a16:creationId xmlns:a16="http://schemas.microsoft.com/office/drawing/2014/main" id="{3F511AFB-0E0F-288B-63C7-658A105BD571}"/>
               </a:ext>
             </a:extLst>
           </p:cNvPr>
@@ -3530,7 +3530,7 @@
           <a:bodyPr/>
           <a:lstStyle/>
           <a:p>
-            <a:fld id="{A54649B8-E294-4136-9C79-6865ED46EA31}" type="datetimeFigureOut">
+            <a:fld id="{EB9717B0-EE80-44E4-9C01-29DF6EECFE8D}" type="datetimeFigureOut">
               <a:rPr lang="en-IN" smtClean="0"/>
               <a:t>21-10-2026</a:t>
             </a:fld>
@@ -3543,7 +3543,7 @@
           <p:cNvPr id="5" name="Footer Placeholder 4">
             <a:extLst>
               <a:ext uri="{FF2B5EF4-FFF2-40B4-BE49-F238E27FC236}">
-                <a16:creationId xmlns:a16="http://schemas.microsoft.com/office/drawing/2014/main" id="{5ECEA982-1876-E0AE-30F5-4C2EF7AE441A}"/>
+                <a16:creationId xmlns:a16="http://schemas.microsoft.com/office/drawing/2014/main" id="{03606FB5-3EE1-4386-0E12-996C6F1DCC6E}"/>
               </a:ext>
             </a:extLst>
           </p:cNvPr>
@@ -3568,7 +3568,7 @@
           <p:cNvPr id="6" name="Slide Number Placeholder 5">
             <a:extLst>
               <a:ext uri="{FF2B5EF4-FFF2-40B4-BE49-F238E27FC236}">
-                <a16:creationId xmlns:a16="http://schemas.microsoft.com/office/drawing/2014/main" id="{1223D54A-9315-C9B3-31AE-D68052A9B294}"/>
+                <a16:creationId xmlns:a16="http://schemas.microsoft.com/office/drawing/2014/main" id="{50AC2175-CF51-35A9-7ACF-E4A4C45A85C7}"/>
               </a:ext>
             </a:extLst>
           </p:cNvPr>
@@ -3584,7 +3584,7 @@
           <a:bodyPr/>
           <a:lstStyle/>
           <a:p>
-            <a:fld id="{E53BDD79-8E1D-4C89-A95B-8D68501DF1E5}" type="slidenum">
+            <a:fld id="{FDF9CEBF-D338-4DD8-99E2-EFE709396948}" type="slidenum">
               <a:rPr lang="en-IN" smtClean="0"/>
               <a:t>‹#›</a:t>
             </a:fld>
@@ -3595,7 +3595,7 @@
     </p:spTree>
     <p:extLst>
       <p:ext uri="{BB962C8B-B14F-4D97-AF65-F5344CB8AC3E}">
-        <p14:creationId xmlns:p14="http://schemas.microsoft.com/office/powerpoint/2010/main" val="1972824797"/>
+        <p14:creationId xmlns:p14="http://schemas.microsoft.com/office/powerpoint/2010/main" val="1159579692"/>
       </p:ext>
     </p:extLst>
   </p:cSld>
@@ -3627,7 +3627,7 @@
           <p:cNvPr id="2" name="Title 1">
             <a:extLst>
               <a:ext uri="{FF2B5EF4-FFF2-40B4-BE49-F238E27FC236}">
-                <a16:creationId xmlns:a16="http://schemas.microsoft.com/office/drawing/2014/main" id="{82FAC39C-C361-6127-9321-756D5B5DAA14}"/>
+                <a16:creationId xmlns:a16="http://schemas.microsoft.com/office/drawing/2014/main" id="{3090E832-32D9-2F52-F729-E3AA79C6347A}"/>
               </a:ext>
             </a:extLst>
           </p:cNvPr>
@@ -3665,7 +3665,7 @@
           <p:cNvPr id="3" name="Text Placeholder 2">
             <a:extLst>
               <a:ext uri="{FF2B5EF4-FFF2-40B4-BE49-F238E27FC236}">
-                <a16:creationId xmlns:a16="http://schemas.microsoft.com/office/drawing/2014/main" id="{F9C154E7-13F7-22EC-A97D-42C0D8065B5C}"/>
+                <a16:creationId xmlns:a16="http://schemas.microsoft.com/office/drawing/2014/main" id="{6719F779-C549-8602-7216-9B6F66C571B7}"/>
               </a:ext>
             </a:extLst>
           </p:cNvPr>
@@ -3790,7 +3790,7 @@
           <p:cNvPr id="4" name="Date Placeholder 3">
             <a:extLst>
               <a:ext uri="{FF2B5EF4-FFF2-40B4-BE49-F238E27FC236}">
-                <a16:creationId xmlns:a16="http://schemas.microsoft.com/office/drawing/2014/main" id="{0181948E-33D8-8A2C-0D58-89987DE866F8}"/>
+                <a16:creationId xmlns:a16="http://schemas.microsoft.com/office/drawing/2014/main" id="{1649DD7D-A659-5B73-F4D1-AD33B8558FFC}"/>
               </a:ext>
             </a:extLst>
           </p:cNvPr>
@@ -3806,7 +3806,7 @@
           <a:bodyPr/>
           <a:lstStyle/>
           <a:p>
-            <a:fld id="{A54649B8-E294-4136-9C79-6865ED46EA31}" type="datetimeFigureOut">
+            <a:fld id="{EB9717B0-EE80-44E4-9C01-29DF6EECFE8D}" type="datetimeFigureOut">
               <a:rPr lang="en-IN" smtClean="0"/>
               <a:t>21-10-2026</a:t>
             </a:fld>
@@ -3819,7 +3819,7 @@
           <p:cNvPr id="5" name="Footer Placeholder 4">
             <a:extLst>
               <a:ext uri="{FF2B5EF4-FFF2-40B4-BE49-F238E27FC236}">
-                <a16:creationId xmlns:a16="http://schemas.microsoft.com/office/drawing/2014/main" id="{15F74659-FC25-96D7-17A4-07BA56F0EE62}"/>
+                <a16:creationId xmlns:a16="http://schemas.microsoft.com/office/drawing/2014/main" id="{33614D9B-85D2-E6F9-B794-DE2E581BA1CF}"/>
               </a:ext>
             </a:extLst>
           </p:cNvPr>
@@ -3844,7 +3844,7 @@
           <p:cNvPr id="6" name="Slide Number Placeholder 5">
             <a:extLst>
               <a:ext uri="{FF2B5EF4-FFF2-40B4-BE49-F238E27FC236}">
-                <a16:creationId xmlns:a16="http://schemas.microsoft.com/office/drawing/2014/main" id="{3BD5BA59-C7F7-29DF-2D2D-B368C5C4E238}"/>
+                <a16:creationId xmlns:a16="http://schemas.microsoft.com/office/drawing/2014/main" id="{A582CE30-0686-6970-5534-A8901581C6AA}"/>
               </a:ext>
             </a:extLst>
           </p:cNvPr>
@@ -3860,7 +3860,7 @@
           <a:bodyPr/>
           <a:lstStyle/>
           <a:p>
-            <a:fld id="{E53BDD79-8E1D-4C89-A95B-8D68501DF1E5}" type="slidenum">
+            <a:fld id="{FDF9CEBF-D338-4DD8-99E2-EFE709396948}" type="slidenum">
               <a:rPr lang="en-IN" smtClean="0"/>
               <a:t>‹#›</a:t>
             </a:fld>
@@ -3871,7 +3871,7 @@
     </p:spTree>
     <p:extLst>
       <p:ext uri="{BB962C8B-B14F-4D97-AF65-F5344CB8AC3E}">
-        <p14:creationId xmlns:p14="http://schemas.microsoft.com/office/powerpoint/2010/main" val="2592604120"/>
+        <p14:creationId xmlns:p14="http://schemas.microsoft.com/office/powerpoint/2010/main" val="42474339"/>
       </p:ext>
     </p:extLst>
   </p:cSld>
@@ -3903,7 +3903,7 @@
           <p:cNvPr id="2" name="Title 1">
             <a:extLst>
               <a:ext uri="{FF2B5EF4-FFF2-40B4-BE49-F238E27FC236}">
-                <a16:creationId xmlns:a16="http://schemas.microsoft.com/office/drawing/2014/main" id="{1E80396E-8C55-0D3F-CD85-3BEEC8EE86DF}"/>
+                <a16:creationId xmlns:a16="http://schemas.microsoft.com/office/drawing/2014/main" id="{31C9802A-3382-F148-B6C7-8D08D335082F}"/>
               </a:ext>
             </a:extLst>
           </p:cNvPr>
@@ -3932,7 +3932,7 @@
           <p:cNvPr id="3" name="Content Placeholder 2">
             <a:extLst>
               <a:ext uri="{FF2B5EF4-FFF2-40B4-BE49-F238E27FC236}">
-                <a16:creationId xmlns:a16="http://schemas.microsoft.com/office/drawing/2014/main" id="{2C5D03CA-0DA6-A8CB-8288-9634F0626027}"/>
+                <a16:creationId xmlns:a16="http://schemas.microsoft.com/office/drawing/2014/main" id="{F35E4127-0362-9C8D-439D-49884262B5B9}"/>
               </a:ext>
             </a:extLst>
           </p:cNvPr>
@@ -3995,7 +3995,7 @@
           <p:cNvPr id="4" name="Content Placeholder 3">
             <a:extLst>
               <a:ext uri="{FF2B5EF4-FFF2-40B4-BE49-F238E27FC236}">
-                <a16:creationId xmlns:a16="http://schemas.microsoft.com/office/drawing/2014/main" id="{C7F9E379-9B49-EB88-BFD0-1079D068A548}"/>
+                <a16:creationId xmlns:a16="http://schemas.microsoft.com/office/drawing/2014/main" id="{6E7C50A2-4050-A74D-5C1B-83A7A95C30B9}"/>
               </a:ext>
             </a:extLst>
           </p:cNvPr>
@@ -4058,7 +4058,7 @@
           <p:cNvPr id="5" name="Date Placeholder 4">
             <a:extLst>
               <a:ext uri="{FF2B5EF4-FFF2-40B4-BE49-F238E27FC236}">
-                <a16:creationId xmlns:a16="http://schemas.microsoft.com/office/drawing/2014/main" id="{9D219F1E-6031-299B-B5A0-C0F768DF26ED}"/>
+                <a16:creationId xmlns:a16="http://schemas.microsoft.com/office/drawing/2014/main" id="{1565A20B-A16F-420F-7648-080BCFF2A90B}"/>
               </a:ext>
             </a:extLst>
           </p:cNvPr>
@@ -4074,7 +4074,7 @@
           <a:bodyPr/>
           <a:lstStyle/>
           <a:p>
-            <a:fld id="{A54649B8-E294-4136-9C79-6865ED46EA31}" type="datetimeFigureOut">
+            <a:fld id="{EB9717B0-EE80-44E4-9C01-29DF6EECFE8D}" type="datetimeFigureOut">
               <a:rPr lang="en-IN" smtClean="0"/>
               <a:t>21-10-2026</a:t>
             </a:fld>
@@ -4087,7 +4087,7 @@
           <p:cNvPr id="6" name="Footer Placeholder 5">
             <a:extLst>
               <a:ext uri="{FF2B5EF4-FFF2-40B4-BE49-F238E27FC236}">
-                <a16:creationId xmlns:a16="http://schemas.microsoft.com/office/drawing/2014/main" id="{7563224C-21F3-F65B-7012-3EBA7BE3995F}"/>
+                <a16:creationId xmlns:a16="http://schemas.microsoft.com/office/drawing/2014/main" id="{4FA76381-EB24-F766-D187-F6846C0AEFA4}"/>
               </a:ext>
             </a:extLst>
           </p:cNvPr>
@@ -4112,7 +4112,7 @@
           <p:cNvPr id="7" name="Slide Number Placeholder 6">
             <a:extLst>
               <a:ext uri="{FF2B5EF4-FFF2-40B4-BE49-F238E27FC236}">
-                <a16:creationId xmlns:a16="http://schemas.microsoft.com/office/drawing/2014/main" id="{EDAF0B3D-107A-EA89-B9FF-415803E311D1}"/>
+                <a16:creationId xmlns:a16="http://schemas.microsoft.com/office/drawing/2014/main" id="{50FD7D4E-8B29-6AA1-E610-5E29AAFC67A6}"/>
               </a:ext>
             </a:extLst>
           </p:cNvPr>
@@ -4128,7 +4128,7 @@
           <a:bodyPr/>
           <a:lstStyle/>
           <a:p>
-            <a:fld id="{E53BDD79-8E1D-4C89-A95B-8D68501DF1E5}" type="slidenum">
+            <a:fld id="{FDF9CEBF-D338-4DD8-99E2-EFE709396948}" type="slidenum">
               <a:rPr lang="en-IN" smtClean="0"/>
               <a:t>‹#›</a:t>
             </a:fld>
@@ -4139,7 +4139,7 @@
     </p:spTree>
     <p:extLst>
       <p:ext uri="{BB962C8B-B14F-4D97-AF65-F5344CB8AC3E}">
-        <p14:creationId xmlns:p14="http://schemas.microsoft.com/office/powerpoint/2010/main" val="3263564968"/>
+        <p14:creationId xmlns:p14="http://schemas.microsoft.com/office/powerpoint/2010/main" val="2711878264"/>
       </p:ext>
     </p:extLst>
   </p:cSld>
@@ -4171,7 +4171,7 @@
           <p:cNvPr id="2" name="Title 1">
             <a:extLst>
               <a:ext uri="{FF2B5EF4-FFF2-40B4-BE49-F238E27FC236}">
-                <a16:creationId xmlns:a16="http://schemas.microsoft.com/office/drawing/2014/main" id="{57DDB869-F17C-0A3E-EFE4-22DA8D758099}"/>
+                <a16:creationId xmlns:a16="http://schemas.microsoft.com/office/drawing/2014/main" id="{2F8F6835-DA1E-7ED2-48C5-F83D18ACCE9E}"/>
               </a:ext>
             </a:extLst>
           </p:cNvPr>
@@ -4205,7 +4205,7 @@
           <p:cNvPr id="3" name="Text Placeholder 2">
             <a:extLst>
               <a:ext uri="{FF2B5EF4-FFF2-40B4-BE49-F238E27FC236}">
-                <a16:creationId xmlns:a16="http://schemas.microsoft.com/office/drawing/2014/main" id="{C8DFF7CE-1A00-9623-399E-E387174E7691}"/>
+                <a16:creationId xmlns:a16="http://schemas.microsoft.com/office/drawing/2014/main" id="{4FF9EC81-4CF1-1ADD-F23A-15982C040501}"/>
               </a:ext>
             </a:extLst>
           </p:cNvPr>
@@ -4276,7 +4276,7 @@
           <p:cNvPr id="4" name="Content Placeholder 3">
             <a:extLst>
               <a:ext uri="{FF2B5EF4-FFF2-40B4-BE49-F238E27FC236}">
-                <a16:creationId xmlns:a16="http://schemas.microsoft.com/office/drawing/2014/main" id="{4EF718B2-0931-5D27-FFDB-8682DE3B0DDE}"/>
+                <a16:creationId xmlns:a16="http://schemas.microsoft.com/office/drawing/2014/main" id="{E8D16480-B9F8-5136-97E7-E89F593E0E12}"/>
               </a:ext>
             </a:extLst>
           </p:cNvPr>
@@ -4339,7 +4339,7 @@
           <p:cNvPr id="5" name="Text Placeholder 4">
             <a:extLst>
               <a:ext uri="{FF2B5EF4-FFF2-40B4-BE49-F238E27FC236}">
-                <a16:creationId xmlns:a16="http://schemas.microsoft.com/office/drawing/2014/main" id="{0D13A445-44E9-1AA1-B4C6-BBB626F65A8C}"/>
+                <a16:creationId xmlns:a16="http://schemas.microsoft.com/office/drawing/2014/main" id="{F46589A1-341B-B07F-0AD5-A714EF90EF98}"/>
               </a:ext>
             </a:extLst>
           </p:cNvPr>
@@ -4410,7 +4410,7 @@
           <p:cNvPr id="6" name="Content Placeholder 5">
             <a:extLst>
               <a:ext uri="{FF2B5EF4-FFF2-40B4-BE49-F238E27FC236}">
-                <a16:creationId xmlns:a16="http://schemas.microsoft.com/office/drawing/2014/main" id="{DA357FDF-1361-2D95-C9FE-3401C7350B35}"/>
+                <a16:creationId xmlns:a16="http://schemas.microsoft.com/office/drawing/2014/main" id="{00B9BCAC-221C-624F-E014-8C6402F2DE6D}"/>
               </a:ext>
             </a:extLst>
           </p:cNvPr>
@@ -4473,7 +4473,7 @@
           <p:cNvPr id="7" name="Date Placeholder 6">
             <a:extLst>
               <a:ext uri="{FF2B5EF4-FFF2-40B4-BE49-F238E27FC236}">
-                <a16:creationId xmlns:a16="http://schemas.microsoft.com/office/drawing/2014/main" id="{5FE0CEA5-492E-0A3B-66DD-EC3F99C05578}"/>
+                <a16:creationId xmlns:a16="http://schemas.microsoft.com/office/drawing/2014/main" id="{0BCB5542-4524-1255-24E5-17C73572956E}"/>
               </a:ext>
             </a:extLst>
           </p:cNvPr>
@@ -4489,7 +4489,7 @@
           <a:bodyPr/>
           <a:lstStyle/>
           <a:p>
-            <a:fld id="{A54649B8-E294-4136-9C79-6865ED46EA31}" type="datetimeFigureOut">
+            <a:fld id="{EB9717B0-EE80-44E4-9C01-29DF6EECFE8D}" type="datetimeFigureOut">
               <a:rPr lang="en-IN" smtClean="0"/>
               <a:t>21-10-2026</a:t>
             </a:fld>
@@ -4502,7 +4502,7 @@
           <p:cNvPr id="8" name="Footer Placeholder 7">
             <a:extLst>
               <a:ext uri="{FF2B5EF4-FFF2-40B4-BE49-F238E27FC236}">
-                <a16:creationId xmlns:a16="http://schemas.microsoft.com/office/drawing/2014/main" id="{D549E4B4-51BE-DA0C-32C5-7C58321C8E77}"/>
+                <a16:creationId xmlns:a16="http://schemas.microsoft.com/office/drawing/2014/main" id="{9D01676F-9CAF-311B-D117-BCE07657C387}"/>
               </a:ext>
             </a:extLst>
           </p:cNvPr>
@@ -4527,7 +4527,7 @@
           <p:cNvPr id="9" name="Slide Number Placeholder 8">
             <a:extLst>
               <a:ext uri="{FF2B5EF4-FFF2-40B4-BE49-F238E27FC236}">
-                <a16:creationId xmlns:a16="http://schemas.microsoft.com/office/drawing/2014/main" id="{72620059-8579-4D98-7764-AFE0A3133DB0}"/>
+                <a16:creationId xmlns:a16="http://schemas.microsoft.com/office/drawing/2014/main" id="{8E65D3CE-8657-BEE1-388F-0759CFEA8DF3}"/>
               </a:ext>
             </a:extLst>
           </p:cNvPr>
@@ -4543,7 +4543,7 @@
           <a:bodyPr/>
           <a:lstStyle/>
           <a:p>
-            <a:fld id="{E53BDD79-8E1D-4C89-A95B-8D68501DF1E5}" type="slidenum">
+            <a:fld id="{FDF9CEBF-D338-4DD8-99E2-EFE709396948}" type="slidenum">
               <a:rPr lang="en-IN" smtClean="0"/>
               <a:t>‹#›</a:t>
             </a:fld>
@@ -4554,7 +4554,7 @@
     </p:spTree>
     <p:extLst>
       <p:ext uri="{BB962C8B-B14F-4D97-AF65-F5344CB8AC3E}">
-        <p14:creationId xmlns:p14="http://schemas.microsoft.com/office/powerpoint/2010/main" val="3031993699"/>
+        <p14:creationId xmlns:p14="http://schemas.microsoft.com/office/powerpoint/2010/main" val="1559927912"/>
       </p:ext>
     </p:extLst>
   </p:cSld>
@@ -4586,7 +4586,7 @@
           <p:cNvPr id="2" name="Title 1">
             <a:extLst>
               <a:ext uri="{FF2B5EF4-FFF2-40B4-BE49-F238E27FC236}">
-                <a16:creationId xmlns:a16="http://schemas.microsoft.com/office/drawing/2014/main" id="{FA4921FC-706D-5589-F335-3046299EF1B3}"/>
+                <a16:creationId xmlns:a16="http://schemas.microsoft.com/office/drawing/2014/main" id="{EAE43767-0AB5-698A-6409-B992F1B6E832}"/>
               </a:ext>
             </a:extLst>
           </p:cNvPr>
@@ -4615,7 +4615,7 @@
           <p:cNvPr id="3" name="Date Placeholder 2">
             <a:extLst>
               <a:ext uri="{FF2B5EF4-FFF2-40B4-BE49-F238E27FC236}">
-                <a16:creationId xmlns:a16="http://schemas.microsoft.com/office/drawing/2014/main" id="{27B3BA89-5863-5659-B07F-0EC160656C0C}"/>
+                <a16:creationId xmlns:a16="http://schemas.microsoft.com/office/drawing/2014/main" id="{68314E85-14B5-2DE5-338B-F4DA506A2DBA}"/>
               </a:ext>
             </a:extLst>
           </p:cNvPr>
@@ -4631,7 +4631,7 @@
           <a:bodyPr/>
           <a:lstStyle/>
           <a:p>
-            <a:fld id="{A54649B8-E294-4136-9C79-6865ED46EA31}" type="datetimeFigureOut">
+            <a:fld id="{EB9717B0-EE80-44E4-9C01-29DF6EECFE8D}" type="datetimeFigureOut">
               <a:rPr lang="en-IN" smtClean="0"/>
               <a:t>21-10-2026</a:t>
             </a:fld>
@@ -4644,7 +4644,7 @@
           <p:cNvPr id="4" name="Footer Placeholder 3">
             <a:extLst>
               <a:ext uri="{FF2B5EF4-FFF2-40B4-BE49-F238E27FC236}">
-                <a16:creationId xmlns:a16="http://schemas.microsoft.com/office/drawing/2014/main" id="{DC111956-2670-E648-CC4F-1D18B5DC95D5}"/>
+                <a16:creationId xmlns:a16="http://schemas.microsoft.com/office/drawing/2014/main" id="{74C652CF-430F-3D80-5CCC-836B32F2006E}"/>
               </a:ext>
             </a:extLst>
           </p:cNvPr>
@@ -4669,7 +4669,7 @@
           <p:cNvPr id="5" name="Slide Number Placeholder 4">
             <a:extLst>
               <a:ext uri="{FF2B5EF4-FFF2-40B4-BE49-F238E27FC236}">
-                <a16:creationId xmlns:a16="http://schemas.microsoft.com/office/drawing/2014/main" id="{1D1BB039-AA97-BB39-01F8-55A3BE33B3DA}"/>
+                <a16:creationId xmlns:a16="http://schemas.microsoft.com/office/drawing/2014/main" id="{1D8BBAC4-AE3B-0558-AC44-6875D322CAFE}"/>
               </a:ext>
             </a:extLst>
           </p:cNvPr>
@@ -4685,7 +4685,7 @@
           <a:bodyPr/>
           <a:lstStyle/>
           <a:p>
-            <a:fld id="{E53BDD79-8E1D-4C89-A95B-8D68501DF1E5}" type="slidenum">
+            <a:fld id="{FDF9CEBF-D338-4DD8-99E2-EFE709396948}" type="slidenum">
               <a:rPr lang="en-IN" smtClean="0"/>
               <a:t>‹#›</a:t>
             </a:fld>
@@ -4696,7 +4696,7 @@
     </p:spTree>
     <p:extLst>
       <p:ext uri="{BB962C8B-B14F-4D97-AF65-F5344CB8AC3E}">
-        <p14:creationId xmlns:p14="http://schemas.microsoft.com/office/powerpoint/2010/main" val="3452299098"/>
+        <p14:creationId xmlns:p14="http://schemas.microsoft.com/office/powerpoint/2010/main" val="1805250307"/>
       </p:ext>
     </p:extLst>
   </p:cSld>
@@ -4728,7 +4728,7 @@
           <p:cNvPr id="2" name="Date Placeholder 1">
             <a:extLst>
               <a:ext uri="{FF2B5EF4-FFF2-40B4-BE49-F238E27FC236}">
-                <a16:creationId xmlns:a16="http://schemas.microsoft.com/office/drawing/2014/main" id="{42D16630-4B75-8F7F-4136-703EE767EE5D}"/>
+                <a16:creationId xmlns:a16="http://schemas.microsoft.com/office/drawing/2014/main" id="{DA8FCE52-72FF-AA8F-70D6-5C803793BAF1}"/>
               </a:ext>
             </a:extLst>
           </p:cNvPr>
@@ -4744,7 +4744,7 @@
           <a:bodyPr/>
           <a:lstStyle/>
           <a:p>
-            <a:fld id="{A54649B8-E294-4136-9C79-6865ED46EA31}" type="datetimeFigureOut">
+            <a:fld id="{EB9717B0-EE80-44E4-9C01-29DF6EECFE8D}" type="datetimeFigureOut">
               <a:rPr lang="en-IN" smtClean="0"/>
               <a:t>21-10-2026</a:t>
             </a:fld>
@@ -4757,7 +4757,7 @@
           <p:cNvPr id="3" name="Footer Placeholder 2">
             <a:extLst>
               <a:ext uri="{FF2B5EF4-FFF2-40B4-BE49-F238E27FC236}">
-                <a16:creationId xmlns:a16="http://schemas.microsoft.com/office/drawing/2014/main" id="{8146F7ED-AB9B-628E-D51B-D2DB3E19229F}"/>
+                <a16:creationId xmlns:a16="http://schemas.microsoft.com/office/drawing/2014/main" id="{06DFBC88-EE72-9298-52D1-75157E8187BA}"/>
               </a:ext>
             </a:extLst>
           </p:cNvPr>
@@ -4782,7 +4782,7 @@
           <p:cNvPr id="4" name="Slide Number Placeholder 3">
             <a:extLst>
               <a:ext uri="{FF2B5EF4-FFF2-40B4-BE49-F238E27FC236}">
-                <a16:creationId xmlns:a16="http://schemas.microsoft.com/office/drawing/2014/main" id="{5987B9F3-3B41-307B-C221-524EED3B818B}"/>
+                <a16:creationId xmlns:a16="http://schemas.microsoft.com/office/drawing/2014/main" id="{F30268CF-77F8-19F0-41AA-FD35A6914A1F}"/>
               </a:ext>
             </a:extLst>
           </p:cNvPr>
@@ -4798,7 +4798,7 @@
           <a:bodyPr/>
           <a:lstStyle/>
           <a:p>
-            <a:fld id="{E53BDD79-8E1D-4C89-A95B-8D68501DF1E5}" type="slidenum">
+            <a:fld id="{FDF9CEBF-D338-4DD8-99E2-EFE709396948}" type="slidenum">
               <a:rPr lang="en-IN" smtClean="0"/>
               <a:t>‹#›</a:t>
             </a:fld>
@@ -4809,7 +4809,7 @@
     </p:spTree>
     <p:extLst>
       <p:ext uri="{BB962C8B-B14F-4D97-AF65-F5344CB8AC3E}">
-        <p14:creationId xmlns:p14="http://schemas.microsoft.com/office/powerpoint/2010/main" val="4029237677"/>
+        <p14:creationId xmlns:p14="http://schemas.microsoft.com/office/powerpoint/2010/main" val="2161674457"/>
       </p:ext>
     </p:extLst>
   </p:cSld>
@@ -4841,7 +4841,7 @@
           <p:cNvPr id="2" name="Title 1">
             <a:extLst>
               <a:ext uri="{FF2B5EF4-FFF2-40B4-BE49-F238E27FC236}">
-                <a16:creationId xmlns:a16="http://schemas.microsoft.com/office/drawing/2014/main" id="{6F52B09F-A79E-99F0-1F10-5CAFAE1AE538}"/>
+                <a16:creationId xmlns:a16="http://schemas.microsoft.com/office/drawing/2014/main" id="{63805EBF-47FD-04FE-001E-81635C5CE1F7}"/>
               </a:ext>
             </a:extLst>
           </p:cNvPr>
@@ -4879,7 +4879,7 @@
           <p:cNvPr id="3" name="Content Placeholder 2">
             <a:extLst>
               <a:ext uri="{FF2B5EF4-FFF2-40B4-BE49-F238E27FC236}">
-                <a16:creationId xmlns:a16="http://schemas.microsoft.com/office/drawing/2014/main" id="{DD3DF40D-D7B4-A978-2A21-CFC14B6E13A6}"/>
+                <a16:creationId xmlns:a16="http://schemas.microsoft.com/office/drawing/2014/main" id="{6485A31E-7EB1-BE50-0263-102263742337}"/>
               </a:ext>
             </a:extLst>
           </p:cNvPr>
@@ -4970,7 +4970,7 @@
           <p:cNvPr id="4" name="Text Placeholder 3">
             <a:extLst>
               <a:ext uri="{FF2B5EF4-FFF2-40B4-BE49-F238E27FC236}">
-                <a16:creationId xmlns:a16="http://schemas.microsoft.com/office/drawing/2014/main" id="{8DA8F99B-9E42-395A-09DC-9D582076E99B}"/>
+                <a16:creationId xmlns:a16="http://schemas.microsoft.com/office/drawing/2014/main" id="{C42A53D7-3FDA-2544-F2D9-6FFC1195A387}"/>
               </a:ext>
             </a:extLst>
           </p:cNvPr>
@@ -5041,7 +5041,7 @@
           <p:cNvPr id="5" name="Date Placeholder 4">
             <a:extLst>
               <a:ext uri="{FF2B5EF4-FFF2-40B4-BE49-F238E27FC236}">
-                <a16:creationId xmlns:a16="http://schemas.microsoft.com/office/drawing/2014/main" id="{1E8045B4-5607-84D6-2DBE-FCA5688AC570}"/>
+                <a16:creationId xmlns:a16="http://schemas.microsoft.com/office/drawing/2014/main" id="{3928DD00-0EC0-23DB-DF8E-C68A60CF44BC}"/>
               </a:ext>
             </a:extLst>
           </p:cNvPr>
@@ -5057,7 +5057,7 @@
           <a:bodyPr/>
           <a:lstStyle/>
           <a:p>
-            <a:fld id="{A54649B8-E294-4136-9C79-6865ED46EA31}" type="datetimeFigureOut">
+            <a:fld id="{EB9717B0-EE80-44E4-9C01-29DF6EECFE8D}" type="datetimeFigureOut">
               <a:rPr lang="en-IN" smtClean="0"/>
               <a:t>21-10-2026</a:t>
             </a:fld>
@@ -5070,7 +5070,7 @@
           <p:cNvPr id="6" name="Footer Placeholder 5">
             <a:extLst>
               <a:ext uri="{FF2B5EF4-FFF2-40B4-BE49-F238E27FC236}">
-                <a16:creationId xmlns:a16="http://schemas.microsoft.com/office/drawing/2014/main" id="{EC0EE429-0039-6295-86B2-52B54D6A5028}"/>
+                <a16:creationId xmlns:a16="http://schemas.microsoft.com/office/drawing/2014/main" id="{51D6E071-E1A1-ECF0-EFB1-598C14D4F7FB}"/>
               </a:ext>
             </a:extLst>
           </p:cNvPr>
@@ -5095,7 +5095,7 @@
           <p:cNvPr id="7" name="Slide Number Placeholder 6">
             <a:extLst>
               <a:ext uri="{FF2B5EF4-FFF2-40B4-BE49-F238E27FC236}">
-                <a16:creationId xmlns:a16="http://schemas.microsoft.com/office/drawing/2014/main" id="{2CBD0EA2-4373-324A-68C3-041F039EE607}"/>
+                <a16:creationId xmlns:a16="http://schemas.microsoft.com/office/drawing/2014/main" id="{495206C3-06ED-3745-14CF-6E24A423B0C1}"/>
               </a:ext>
             </a:extLst>
           </p:cNvPr>
@@ -5111,7 +5111,7 @@
           <a:bodyPr/>
           <a:lstStyle/>
           <a:p>
-            <a:fld id="{E53BDD79-8E1D-4C89-A95B-8D68501DF1E5}" type="slidenum">
+            <a:fld id="{FDF9CEBF-D338-4DD8-99E2-EFE709396948}" type="slidenum">
               <a:rPr lang="en-IN" smtClean="0"/>
               <a:t>‹#›</a:t>
             </a:fld>
@@ -5122,7 +5122,7 @@
     </p:spTree>
     <p:extLst>
       <p:ext uri="{BB962C8B-B14F-4D97-AF65-F5344CB8AC3E}">
-        <p14:creationId xmlns:p14="http://schemas.microsoft.com/office/powerpoint/2010/main" val="4000272436"/>
+        <p14:creationId xmlns:p14="http://schemas.microsoft.com/office/powerpoint/2010/main" val="1005730906"/>
       </p:ext>
     </p:extLst>
   </p:cSld>
@@ -5154,7 +5154,7 @@
           <p:cNvPr id="2" name="Title 1">
             <a:extLst>
               <a:ext uri="{FF2B5EF4-FFF2-40B4-BE49-F238E27FC236}">
-                <a16:creationId xmlns:a16="http://schemas.microsoft.com/office/drawing/2014/main" id="{472A6897-EFD6-7EE0-23EC-7A9AEAD2B0CB}"/>
+                <a16:creationId xmlns:a16="http://schemas.microsoft.com/office/drawing/2014/main" id="{C7765D7F-0DC9-39D3-3939-64B0F7C36F23}"/>
               </a:ext>
             </a:extLst>
           </p:cNvPr>
@@ -5192,7 +5192,7 @@
           <p:cNvPr id="3" name="Picture Placeholder 2">
             <a:extLst>
               <a:ext uri="{FF2B5EF4-FFF2-40B4-BE49-F238E27FC236}">
-                <a16:creationId xmlns:a16="http://schemas.microsoft.com/office/drawing/2014/main" id="{7DB9836D-9F7D-07BE-DAF9-3DD5C889BCB1}"/>
+                <a16:creationId xmlns:a16="http://schemas.microsoft.com/office/drawing/2014/main" id="{038BBF78-742B-234B-D33B-78471D7DFD77}"/>
               </a:ext>
             </a:extLst>
           </p:cNvPr>
@@ -5259,7 +5259,7 @@
           <p:cNvPr id="4" name="Text Placeholder 3">
             <a:extLst>
               <a:ext uri="{FF2B5EF4-FFF2-40B4-BE49-F238E27FC236}">
-                <a16:creationId xmlns:a16="http://schemas.microsoft.com/office/drawing/2014/main" id="{ADBF2203-4FB0-6173-5B6D-30E77FFAB0D5}"/>
+                <a16:creationId xmlns:a16="http://schemas.microsoft.com/office/drawing/2014/main" id="{9A2E612A-8957-2744-7901-90498D91FAC4}"/>
               </a:ext>
             </a:extLst>
           </p:cNvPr>
@@ -5330,7 +5330,7 @@
           <p:cNvPr id="5" name="Date Placeholder 4">
             <a:extLst>
               <a:ext uri="{FF2B5EF4-FFF2-40B4-BE49-F238E27FC236}">
-                <a16:creationId xmlns:a16="http://schemas.microsoft.com/office/drawing/2014/main" id="{FC1EE050-7D9D-2157-48DC-7AF42B5C7F89}"/>
+                <a16:creationId xmlns:a16="http://schemas.microsoft.com/office/drawing/2014/main" id="{8826F8DA-F80F-05AA-713B-BD8017A9D77E}"/>
               </a:ext>
             </a:extLst>
           </p:cNvPr>
@@ -5346,7 +5346,7 @@
           <a:bodyPr/>
           <a:lstStyle/>
           <a:p>
-            <a:fld id="{A54649B8-E294-4136-9C79-6865ED46EA31}" type="datetimeFigureOut">
+            <a:fld id="{EB9717B0-EE80-44E4-9C01-29DF6EECFE8D}" type="datetimeFigureOut">
               <a:rPr lang="en-IN" smtClean="0"/>
               <a:t>21-10-2026</a:t>
             </a:fld>
@@ -5359,7 +5359,7 @@
           <p:cNvPr id="6" name="Footer Placeholder 5">
             <a:extLst>
               <a:ext uri="{FF2B5EF4-FFF2-40B4-BE49-F238E27FC236}">
-                <a16:creationId xmlns:a16="http://schemas.microsoft.com/office/drawing/2014/main" id="{59023E41-0179-A920-B232-9C4B89C93131}"/>
+                <a16:creationId xmlns:a16="http://schemas.microsoft.com/office/drawing/2014/main" id="{AB6A7DAA-CBE9-3FAD-C7DE-9B22E755E542}"/>
               </a:ext>
             </a:extLst>
           </p:cNvPr>
@@ -5384,7 +5384,7 @@
           <p:cNvPr id="7" name="Slide Number Placeholder 6">
             <a:extLst>
               <a:ext uri="{FF2B5EF4-FFF2-40B4-BE49-F238E27FC236}">
-                <a16:creationId xmlns:a16="http://schemas.microsoft.com/office/drawing/2014/main" id="{6293D1F5-35C8-AF50-4483-CFEB38C8C5B7}"/>
+                <a16:creationId xmlns:a16="http://schemas.microsoft.com/office/drawing/2014/main" id="{EB290428-94DE-5EE4-F2CC-498EF9597676}"/>
               </a:ext>
             </a:extLst>
           </p:cNvPr>
@@ -5400,7 +5400,7 @@
           <a:bodyPr/>
           <a:lstStyle/>
           <a:p>
-            <a:fld id="{E53BDD79-8E1D-4C89-A95B-8D68501DF1E5}" type="slidenum">
+            <a:fld id="{FDF9CEBF-D338-4DD8-99E2-EFE709396948}" type="slidenum">
               <a:rPr lang="en-IN" smtClean="0"/>
               <a:t>‹#›</a:t>
             </a:fld>
@@ -5411,7 +5411,7 @@
     </p:spTree>
     <p:extLst>
       <p:ext uri="{BB962C8B-B14F-4D97-AF65-F5344CB8AC3E}">
-        <p14:creationId xmlns:p14="http://schemas.microsoft.com/office/powerpoint/2010/main" val="2936231535"/>
+        <p14:creationId xmlns:p14="http://schemas.microsoft.com/office/powerpoint/2010/main" val="2354757697"/>
       </p:ext>
     </p:extLst>
   </p:cSld>
@@ -5448,7 +5448,7 @@
           <p:cNvPr id="2" name="Title Placeholder 1">
             <a:extLst>
               <a:ext uri="{FF2B5EF4-FFF2-40B4-BE49-F238E27FC236}">
-                <a16:creationId xmlns:a16="http://schemas.microsoft.com/office/drawing/2014/main" id="{6BD9C21F-98CD-03BD-C59D-6BAC729F32DC}"/>
+                <a16:creationId xmlns:a16="http://schemas.microsoft.com/office/drawing/2014/main" id="{E4C8540A-27D1-3BD1-1176-DE98FA21C9D1}"/>
               </a:ext>
             </a:extLst>
           </p:cNvPr>
@@ -5487,7 +5487,7 @@
           <p:cNvPr id="3" name="Text Placeholder 2">
             <a:extLst>
               <a:ext uri="{FF2B5EF4-FFF2-40B4-BE49-F238E27FC236}">
-                <a16:creationId xmlns:a16="http://schemas.microsoft.com/office/drawing/2014/main" id="{29FD3577-6233-6DAB-E639-AE03C81733EE}"/>
+                <a16:creationId xmlns:a16="http://schemas.microsoft.com/office/drawing/2014/main" id="{AF858A94-C27F-4864-880A-E95FC9DB69CD}"/>
               </a:ext>
             </a:extLst>
           </p:cNvPr>
@@ -5555,7 +5555,7 @@
           <p:cNvPr id="4" name="Date Placeholder 3">
             <a:extLst>
               <a:ext uri="{FF2B5EF4-FFF2-40B4-BE49-F238E27FC236}">
-                <a16:creationId xmlns:a16="http://schemas.microsoft.com/office/drawing/2014/main" id="{F403B039-025E-F42F-D21E-099367AB7DD5}"/>
+                <a16:creationId xmlns:a16="http://schemas.microsoft.com/office/drawing/2014/main" id="{428465E3-78C0-1435-30C5-C73B1B683986}"/>
               </a:ext>
             </a:extLst>
           </p:cNvPr>
@@ -5589,7 +5589,7 @@
             </a:lvl1pPr>
           </a:lstStyle>
           <a:p>
-            <a:fld id="{A54649B8-E294-4136-9C79-6865ED46EA31}" type="datetimeFigureOut">
+            <a:fld id="{EB9717B0-EE80-44E4-9C01-29DF6EECFE8D}" type="datetimeFigureOut">
               <a:rPr lang="en-IN" smtClean="0"/>
               <a:t>21-10-2026</a:t>
             </a:fld>
@@ -5602,7 +5602,7 @@
           <p:cNvPr id="5" name="Footer Placeholder 4">
             <a:extLst>
               <a:ext uri="{FF2B5EF4-FFF2-40B4-BE49-F238E27FC236}">
-                <a16:creationId xmlns:a16="http://schemas.microsoft.com/office/drawing/2014/main" id="{62817FF3-FAB1-FDC1-4D46-83E6694DAD7B}"/>
+                <a16:creationId xmlns:a16="http://schemas.microsoft.com/office/drawing/2014/main" id="{0BAEE1AB-802F-B84C-A2A8-E8F50F4A5F06}"/>
               </a:ext>
             </a:extLst>
           </p:cNvPr>
@@ -5645,7 +5645,7 @@
           <p:cNvPr id="6" name="Slide Number Placeholder 5">
             <a:extLst>
               <a:ext uri="{FF2B5EF4-FFF2-40B4-BE49-F238E27FC236}">
-                <a16:creationId xmlns:a16="http://schemas.microsoft.com/office/drawing/2014/main" id="{4E6F0BA3-FD17-7115-B414-3B623E4966CB}"/>
+                <a16:creationId xmlns:a16="http://schemas.microsoft.com/office/drawing/2014/main" id="{40E3E9DA-A0FB-AD68-7DF7-2CA2D3A57415}"/>
               </a:ext>
             </a:extLst>
           </p:cNvPr>
@@ -5679,7 +5679,7 @@
             </a:lvl1pPr>
           </a:lstStyle>
           <a:p>
-            <a:fld id="{E53BDD79-8E1D-4C89-A95B-8D68501DF1E5}" type="slidenum">
+            <a:fld id="{FDF9CEBF-D338-4DD8-99E2-EFE709396948}" type="slidenum">
               <a:rPr lang="en-IN" smtClean="0"/>
               <a:t>‹#›</a:t>
             </a:fld>
@@ -5690,7 +5690,7 @@
     </p:spTree>
     <p:extLst>
       <p:ext uri="{BB962C8B-B14F-4D97-AF65-F5344CB8AC3E}">
-        <p14:creationId xmlns:p14="http://schemas.microsoft.com/office/powerpoint/2010/main" val="2574246329"/>
+        <p14:creationId xmlns:p14="http://schemas.microsoft.com/office/powerpoint/2010/main" val="429926301"/>
       </p:ext>
     </p:extLst>
   </p:cSld>
@@ -6021,7 +6021,7 @@
           <p:cNvPr id="2" name="TextBox 1">
             <a:extLst>
               <a:ext uri="{FF2B5EF4-FFF2-40B4-BE49-F238E27FC236}">
-                <a16:creationId xmlns:a16="http://schemas.microsoft.com/office/drawing/2014/main" id="{29CEE368-6495-B9CA-730A-43EA5264D525}"/>
+                <a16:creationId xmlns:a16="http://schemas.microsoft.com/office/drawing/2014/main" id="{29C51020-6F4A-89FB-B223-BA08A887D92D}"/>
               </a:ext>
             </a:extLst>
           </p:cNvPr>
@@ -6061,7 +6061,7 @@
           <p:cNvPr id="3" name="TextBox 2">
             <a:extLst>
               <a:ext uri="{FF2B5EF4-FFF2-40B4-BE49-F238E27FC236}">
-                <a16:creationId xmlns:a16="http://schemas.microsoft.com/office/drawing/2014/main" id="{0F313B04-165C-4AC1-147C-DA7052018C10}"/>
+                <a16:creationId xmlns:a16="http://schemas.microsoft.com/office/drawing/2014/main" id="{951B9C3D-4766-A5D8-4228-470E0D25DE0C}"/>
               </a:ext>
             </a:extLst>
           </p:cNvPr>
@@ -6107,7 +6107,7 @@
           <p:cNvPr id="4" name="TextBox 3">
             <a:extLst>
               <a:ext uri="{FF2B5EF4-FFF2-40B4-BE49-F238E27FC236}">
-                <a16:creationId xmlns:a16="http://schemas.microsoft.com/office/drawing/2014/main" id="{AEE07F97-C10B-8D45-4714-3165CEBD722C}"/>
+                <a16:creationId xmlns:a16="http://schemas.microsoft.com/office/drawing/2014/main" id="{57EF2E5E-ACD4-16EE-9DB9-6D4661679BAF}"/>
               </a:ext>
             </a:extLst>
           </p:cNvPr>
@@ -6153,7 +6153,7 @@
           <p:cNvPr id="5" name="TextBox 4">
             <a:extLst>
               <a:ext uri="{FF2B5EF4-FFF2-40B4-BE49-F238E27FC236}">
-                <a16:creationId xmlns:a16="http://schemas.microsoft.com/office/drawing/2014/main" id="{888E74F8-1314-76C6-C5E5-055145BA64A1}"/>
+                <a16:creationId xmlns:a16="http://schemas.microsoft.com/office/drawing/2014/main" id="{719E0021-9D62-6482-8850-EA4C1DD47C52}"/>
               </a:ext>
             </a:extLst>
           </p:cNvPr>
@@ -6193,7 +6193,7 @@
           <p:cNvPr id="6" name="Straight Connector 5">
             <a:extLst>
               <a:ext uri="{FF2B5EF4-FFF2-40B4-BE49-F238E27FC236}">
-                <a16:creationId xmlns:a16="http://schemas.microsoft.com/office/drawing/2014/main" id="{E6551BD2-1553-3B1C-D1A0-ADC82FC3D1BA}"/>
+                <a16:creationId xmlns:a16="http://schemas.microsoft.com/office/drawing/2014/main" id="{8501BAFE-9CD4-1C53-C7B7-7E6D38AFAEFB}"/>
               </a:ext>
             </a:extLst>
           </p:cNvPr>
@@ -6234,7 +6234,7 @@
           <p:cNvPr id="7" name="Oval 6">
             <a:extLst>
               <a:ext uri="{FF2B5EF4-FFF2-40B4-BE49-F238E27FC236}">
-                <a16:creationId xmlns:a16="http://schemas.microsoft.com/office/drawing/2014/main" id="{5AFD08FE-B6A9-3173-15F3-17D42BBD987D}"/>
+                <a16:creationId xmlns:a16="http://schemas.microsoft.com/office/drawing/2014/main" id="{775BAD29-C91A-ED04-F2A0-5C47D9E0C91B}"/>
               </a:ext>
             </a:extLst>
           </p:cNvPr>
@@ -6310,7 +6310,7 @@
           <p:cNvPr id="8" name="TextBox 7">
             <a:extLst>
               <a:ext uri="{FF2B5EF4-FFF2-40B4-BE49-F238E27FC236}">
-                <a16:creationId xmlns:a16="http://schemas.microsoft.com/office/drawing/2014/main" id="{FBB7A08D-837A-41E9-EA95-A893A93C08E2}"/>
+                <a16:creationId xmlns:a16="http://schemas.microsoft.com/office/drawing/2014/main" id="{938ED5C3-736B-866D-DDB7-1E1238C24937}"/>
               </a:ext>
             </a:extLst>
           </p:cNvPr>
@@ -6350,7 +6350,7 @@
           <p:cNvPr id="9" name="Oval 8">
             <a:extLst>
               <a:ext uri="{FF2B5EF4-FFF2-40B4-BE49-F238E27FC236}">
-                <a16:creationId xmlns:a16="http://schemas.microsoft.com/office/drawing/2014/main" id="{96648286-14DD-76A4-DBBC-2F7CE5F41D21}"/>
+                <a16:creationId xmlns:a16="http://schemas.microsoft.com/office/drawing/2014/main" id="{5DE5714F-71B6-7768-3E8A-BF9A1FE7A714}"/>
               </a:ext>
             </a:extLst>
           </p:cNvPr>
@@ -6426,7 +6426,7 @@
           <p:cNvPr id="10" name="TextBox 9">
             <a:extLst>
               <a:ext uri="{FF2B5EF4-FFF2-40B4-BE49-F238E27FC236}">
-                <a16:creationId xmlns:a16="http://schemas.microsoft.com/office/drawing/2014/main" id="{82881B10-CAEE-AB13-0ED8-2C46D2D8B842}"/>
+                <a16:creationId xmlns:a16="http://schemas.microsoft.com/office/drawing/2014/main" id="{55B9DB4E-DFD6-F401-413D-D253F0F9BE31}"/>
               </a:ext>
             </a:extLst>
           </p:cNvPr>
@@ -6466,7 +6466,7 @@
           <p:cNvPr id="11" name="Oval 10">
             <a:extLst>
               <a:ext uri="{FF2B5EF4-FFF2-40B4-BE49-F238E27FC236}">
-                <a16:creationId xmlns:a16="http://schemas.microsoft.com/office/drawing/2014/main" id="{44367B12-4CA9-4E2E-CC7B-C41EF6E76F26}"/>
+                <a16:creationId xmlns:a16="http://schemas.microsoft.com/office/drawing/2014/main" id="{A1C836F8-9F46-83DB-5F10-59754434C843}"/>
               </a:ext>
             </a:extLst>
           </p:cNvPr>
@@ -6542,7 +6542,7 @@
           <p:cNvPr id="12" name="TextBox 11">
             <a:extLst>
               <a:ext uri="{FF2B5EF4-FFF2-40B4-BE49-F238E27FC236}">
-                <a16:creationId xmlns:a16="http://schemas.microsoft.com/office/drawing/2014/main" id="{C38BFAF2-9F3C-2617-1E58-3FC59B8ED91E}"/>
+                <a16:creationId xmlns:a16="http://schemas.microsoft.com/office/drawing/2014/main" id="{C3D71357-A9BC-D598-5BD9-8879C67F2E5F}"/>
               </a:ext>
             </a:extLst>
           </p:cNvPr>
@@ -6582,7 +6582,7 @@
           <p:cNvPr id="13" name="Oval 12">
             <a:extLst>
               <a:ext uri="{FF2B5EF4-FFF2-40B4-BE49-F238E27FC236}">
-                <a16:creationId xmlns:a16="http://schemas.microsoft.com/office/drawing/2014/main" id="{86795641-96E1-5AB5-28D5-D75A9064D128}"/>
+                <a16:creationId xmlns:a16="http://schemas.microsoft.com/office/drawing/2014/main" id="{5FDA9577-A864-A10D-ACAE-517FC39F72A1}"/>
               </a:ext>
             </a:extLst>
           </p:cNvPr>
@@ -6646,7 +6646,7 @@
           <p:cNvPr id="14" name="TextBox 13">
             <a:extLst>
               <a:ext uri="{FF2B5EF4-FFF2-40B4-BE49-F238E27FC236}">
-                <a16:creationId xmlns:a16="http://schemas.microsoft.com/office/drawing/2014/main" id="{E7BBC783-5119-6973-F9D9-7CC5C007A681}"/>
+                <a16:creationId xmlns:a16="http://schemas.microsoft.com/office/drawing/2014/main" id="{D6E083E8-0B75-7133-B9AB-236F6B8EABB8}"/>
               </a:ext>
             </a:extLst>
           </p:cNvPr>
@@ -6684,7 +6684,7 @@
     </p:spTree>
     <p:extLst>
       <p:ext uri="{BB962C8B-B14F-4D97-AF65-F5344CB8AC3E}">
-        <p14:creationId xmlns:p14="http://schemas.microsoft.com/office/powerpoint/2010/main" val="2026747126"/>
+        <p14:creationId xmlns:p14="http://schemas.microsoft.com/office/powerpoint/2010/main" val="903320790"/>
       </p:ext>
     </p:extLst>
   </p:cSld>
@@ -6724,7 +6724,7 @@
           <p:cNvPr id="2" name="TextBox 1">
             <a:extLst>
               <a:ext uri="{FF2B5EF4-FFF2-40B4-BE49-F238E27FC236}">
-                <a16:creationId xmlns:a16="http://schemas.microsoft.com/office/drawing/2014/main" id="{1BE6E322-6835-373A-D690-A248563D650D}"/>
+                <a16:creationId xmlns:a16="http://schemas.microsoft.com/office/drawing/2014/main" id="{BCE6C0DD-2207-D0BC-648F-739600DECC1D}"/>
               </a:ext>
             </a:extLst>
           </p:cNvPr>
@@ -6770,7 +6770,7 @@
           <p:cNvPr id="3" name="Rectangle: Rounded Corners 2">
             <a:extLst>
               <a:ext uri="{FF2B5EF4-FFF2-40B4-BE49-F238E27FC236}">
-                <a16:creationId xmlns:a16="http://schemas.microsoft.com/office/drawing/2014/main" id="{254128D8-997E-6D6A-8281-6E5571FD8095}"/>
+                <a16:creationId xmlns:a16="http://schemas.microsoft.com/office/drawing/2014/main" id="{99CE7405-B972-DE4F-DF85-E9F2B74AD8CD}"/>
               </a:ext>
             </a:extLst>
           </p:cNvPr>
@@ -6854,7 +6854,7 @@
           <p:cNvPr id="4" name="Rectangle: Rounded Corners 3">
             <a:extLst>
               <a:ext uri="{FF2B5EF4-FFF2-40B4-BE49-F238E27FC236}">
-                <a16:creationId xmlns:a16="http://schemas.microsoft.com/office/drawing/2014/main" id="{82638731-353A-5D08-A559-EBC7228580B9}"/>
+                <a16:creationId xmlns:a16="http://schemas.microsoft.com/office/drawing/2014/main" id="{7CF26429-E78B-9BF8-679C-EAA8A72C38CE}"/>
               </a:ext>
             </a:extLst>
           </p:cNvPr>
@@ -6938,7 +6938,7 @@
           <p:cNvPr id="5" name="Rectangle: Rounded Corners 4">
             <a:extLst>
               <a:ext uri="{FF2B5EF4-FFF2-40B4-BE49-F238E27FC236}">
-                <a16:creationId xmlns:a16="http://schemas.microsoft.com/office/drawing/2014/main" id="{9FBF8750-100F-6BF7-BE7C-48943A41AED5}"/>
+                <a16:creationId xmlns:a16="http://schemas.microsoft.com/office/drawing/2014/main" id="{1F635945-F5ED-D62F-D408-B591F2128DDB}"/>
               </a:ext>
             </a:extLst>
           </p:cNvPr>
@@ -7016,7 +7016,7 @@
           <p:cNvPr id="6" name="Rectangle: Rounded Corners 5">
             <a:extLst>
               <a:ext uri="{FF2B5EF4-FFF2-40B4-BE49-F238E27FC236}">
-                <a16:creationId xmlns:a16="http://schemas.microsoft.com/office/drawing/2014/main" id="{4F034041-4185-A7C5-C91B-63012FC8F312}"/>
+                <a16:creationId xmlns:a16="http://schemas.microsoft.com/office/drawing/2014/main" id="{02B800BA-8743-7CA8-886A-F85D3B59CBFD}"/>
               </a:ext>
             </a:extLst>
           </p:cNvPr>
@@ -7094,7 +7094,7 @@
           <p:cNvPr id="7" name="Rectangle: Rounded Corners 6">
             <a:extLst>
               <a:ext uri="{FF2B5EF4-FFF2-40B4-BE49-F238E27FC236}">
-                <a16:creationId xmlns:a16="http://schemas.microsoft.com/office/drawing/2014/main" id="{79A72D9C-02FD-C65F-E0A3-BA0842F76776}"/>
+                <a16:creationId xmlns:a16="http://schemas.microsoft.com/office/drawing/2014/main" id="{F7794060-88CB-6286-E0B4-91F5CA121A7A}"/>
               </a:ext>
             </a:extLst>
           </p:cNvPr>
@@ -7172,7 +7172,7 @@
           <p:cNvPr id="8" name="Rectangle: Rounded Corners 7">
             <a:extLst>
               <a:ext uri="{FF2B5EF4-FFF2-40B4-BE49-F238E27FC236}">
-                <a16:creationId xmlns:a16="http://schemas.microsoft.com/office/drawing/2014/main" id="{EFAFFC61-F69B-B57C-89CD-C75CCD934E22}"/>
+                <a16:creationId xmlns:a16="http://schemas.microsoft.com/office/drawing/2014/main" id="{56E52742-7855-672A-8180-E7D7FD6234A6}"/>
               </a:ext>
             </a:extLst>
           </p:cNvPr>
@@ -7242,7 +7242,7 @@
           <p:cNvPr id="9" name="TextBox 8">
             <a:extLst>
               <a:ext uri="{FF2B5EF4-FFF2-40B4-BE49-F238E27FC236}">
-                <a16:creationId xmlns:a16="http://schemas.microsoft.com/office/drawing/2014/main" id="{ABDDF0B3-E420-9E68-4942-57200F2684ED}"/>
+                <a16:creationId xmlns:a16="http://schemas.microsoft.com/office/drawing/2014/main" id="{62778801-14DC-EE12-89D8-B1D2B0E378C7}"/>
               </a:ext>
             </a:extLst>
           </p:cNvPr>
@@ -7338,7 +7338,7 @@
                 </a:solidFill>
                 <a:latin typeface="Consolas" panose="020B0609020204030204" pitchFamily="49" charset="0"/>
               </a:rPr>
-              <a:t>git clone https://github.com/&lt;user&gt;/secure-path-to-cloud.git</a:t>
+              <a:t>git clone https://github.com/PrathameshChopade/MIT-Cloud-Demo.git</a:t>
             </a:r>
           </a:p>
           <a:p>
@@ -7349,7 +7349,7 @@
                 </a:solidFill>
                 <a:latin typeface="Consolas" panose="020B0609020204030204" pitchFamily="49" charset="0"/>
               </a:rPr>
-              <a:t>cd secure-path-to-cloud</a:t>
+              <a:t>cd MIT-Cloud-Demo</a:t>
             </a:r>
           </a:p>
           <a:p>
@@ -7390,7 +7390,7 @@
           <p:cNvPr id="10" name="TextBox 9">
             <a:extLst>
               <a:ext uri="{FF2B5EF4-FFF2-40B4-BE49-F238E27FC236}">
-                <a16:creationId xmlns:a16="http://schemas.microsoft.com/office/drawing/2014/main" id="{FF6987C7-8E04-8004-DA54-F57C55CC4694}"/>
+                <a16:creationId xmlns:a16="http://schemas.microsoft.com/office/drawing/2014/main" id="{8FC4F87B-E7D8-312A-C6CC-D0A23EEABDB5}"/>
               </a:ext>
             </a:extLst>
           </p:cNvPr>
@@ -7436,7 +7436,7 @@
           <p:cNvPr id="11" name="TextBox 10">
             <a:extLst>
               <a:ext uri="{FF2B5EF4-FFF2-40B4-BE49-F238E27FC236}">
-                <a16:creationId xmlns:a16="http://schemas.microsoft.com/office/drawing/2014/main" id="{F7D23C1B-90FC-4977-3987-BB7DD7F2B2B0}"/>
+                <a16:creationId xmlns:a16="http://schemas.microsoft.com/office/drawing/2014/main" id="{558F8910-CFE2-3957-B12A-7EC0911C01E7}"/>
               </a:ext>
             </a:extLst>
           </p:cNvPr>
@@ -7482,7 +7482,7 @@
           <p:cNvPr id="12" name="TextBox 11">
             <a:extLst>
               <a:ext uri="{FF2B5EF4-FFF2-40B4-BE49-F238E27FC236}">
-                <a16:creationId xmlns:a16="http://schemas.microsoft.com/office/drawing/2014/main" id="{0EF324EC-911E-B0E9-F1E1-D7F33ABEAEE4}"/>
+                <a16:creationId xmlns:a16="http://schemas.microsoft.com/office/drawing/2014/main" id="{8247730E-42A9-FF08-79DC-65DE3BCA50C7}"/>
               </a:ext>
             </a:extLst>
           </p:cNvPr>
@@ -7521,7 +7521,7 @@
     </p:spTree>
     <p:extLst>
       <p:ext uri="{BB962C8B-B14F-4D97-AF65-F5344CB8AC3E}">
-        <p14:creationId xmlns:p14="http://schemas.microsoft.com/office/powerpoint/2010/main" val="4118256777"/>
+        <p14:creationId xmlns:p14="http://schemas.microsoft.com/office/powerpoint/2010/main" val="533724092"/>
       </p:ext>
     </p:extLst>
   </p:cSld>
@@ -7561,7 +7561,7 @@
           <p:cNvPr id="2" name="TextBox 1">
             <a:extLst>
               <a:ext uri="{FF2B5EF4-FFF2-40B4-BE49-F238E27FC236}">
-                <a16:creationId xmlns:a16="http://schemas.microsoft.com/office/drawing/2014/main" id="{5479335E-9E3E-9E2B-983E-478645020140}"/>
+                <a16:creationId xmlns:a16="http://schemas.microsoft.com/office/drawing/2014/main" id="{095EA0B8-5601-EAB6-A1C4-3F4D5F0BF945}"/>
               </a:ext>
             </a:extLst>
           </p:cNvPr>
@@ -7601,7 +7601,7 @@
           <p:cNvPr id="3" name="Rectangle: Rounded Corners 2">
             <a:extLst>
               <a:ext uri="{FF2B5EF4-FFF2-40B4-BE49-F238E27FC236}">
-                <a16:creationId xmlns:a16="http://schemas.microsoft.com/office/drawing/2014/main" id="{CF4434BD-8379-9E1A-B791-59B07501F945}"/>
+                <a16:creationId xmlns:a16="http://schemas.microsoft.com/office/drawing/2014/main" id="{5F0D005A-A4F2-6A6F-29DE-E28EA0DC08BF}"/>
               </a:ext>
             </a:extLst>
           </p:cNvPr>
@@ -7671,7 +7671,7 @@
           <p:cNvPr id="4" name="TextBox 3">
             <a:extLst>
               <a:ext uri="{FF2B5EF4-FFF2-40B4-BE49-F238E27FC236}">
-                <a16:creationId xmlns:a16="http://schemas.microsoft.com/office/drawing/2014/main" id="{937F9AAF-3B98-9169-38BB-C6153A54D49A}"/>
+                <a16:creationId xmlns:a16="http://schemas.microsoft.com/office/drawing/2014/main" id="{DA6D1175-5949-8F6F-D4BB-E3FD638F3DB9}"/>
               </a:ext>
             </a:extLst>
           </p:cNvPr>
@@ -7711,7 +7711,7 @@
           <p:cNvPr id="5" name="TextBox 4">
             <a:extLst>
               <a:ext uri="{FF2B5EF4-FFF2-40B4-BE49-F238E27FC236}">
-                <a16:creationId xmlns:a16="http://schemas.microsoft.com/office/drawing/2014/main" id="{789B39A0-8C18-13EE-8E7C-093A0327ADDB}"/>
+                <a16:creationId xmlns:a16="http://schemas.microsoft.com/office/drawing/2014/main" id="{B118464F-4BDC-21C0-E387-09755534970F}"/>
               </a:ext>
             </a:extLst>
           </p:cNvPr>
@@ -7741,7 +7741,7 @@
                 </a:solidFill>
                 <a:latin typeface="Consolas" panose="020B0609020204030204" pitchFamily="49" charset="0"/>
               </a:rPr>
-              <a:t>cd secure-path-to-cloud</a:t>
+              <a:t>cd MIT-Cloud-Demo</a:t>
             </a:r>
           </a:p>
           <a:p>
@@ -7768,7 +7768,7 @@
           <p:cNvPr id="6" name="TextBox 5">
             <a:extLst>
               <a:ext uri="{FF2B5EF4-FFF2-40B4-BE49-F238E27FC236}">
-                <a16:creationId xmlns:a16="http://schemas.microsoft.com/office/drawing/2014/main" id="{CA58F298-C46A-3AA9-2194-C75F94E63A16}"/>
+                <a16:creationId xmlns:a16="http://schemas.microsoft.com/office/drawing/2014/main" id="{02280BAD-D416-CB3B-59C3-21EA6FB4C0B6}"/>
               </a:ext>
             </a:extLst>
           </p:cNvPr>
@@ -7814,7 +7814,7 @@
           <p:cNvPr id="7" name="TextBox 6">
             <a:extLst>
               <a:ext uri="{FF2B5EF4-FFF2-40B4-BE49-F238E27FC236}">
-                <a16:creationId xmlns:a16="http://schemas.microsoft.com/office/drawing/2014/main" id="{9F2ECF70-EBA1-6D18-E942-92251DB958A9}"/>
+                <a16:creationId xmlns:a16="http://schemas.microsoft.com/office/drawing/2014/main" id="{5388339C-9262-6D70-78FA-E881AEB9585B}"/>
               </a:ext>
             </a:extLst>
           </p:cNvPr>
@@ -7860,7 +7860,7 @@
           <p:cNvPr id="8" name="TextBox 7">
             <a:extLst>
               <a:ext uri="{FF2B5EF4-FFF2-40B4-BE49-F238E27FC236}">
-                <a16:creationId xmlns:a16="http://schemas.microsoft.com/office/drawing/2014/main" id="{00C2DE71-2739-7935-44AD-5D064E6BDDA3}"/>
+                <a16:creationId xmlns:a16="http://schemas.microsoft.com/office/drawing/2014/main" id="{283D0789-65BA-CC9C-18B4-308242D27109}"/>
               </a:ext>
             </a:extLst>
           </p:cNvPr>
@@ -7906,7 +7906,7 @@
           <p:cNvPr id="9" name="Oval 8">
             <a:extLst>
               <a:ext uri="{FF2B5EF4-FFF2-40B4-BE49-F238E27FC236}">
-                <a16:creationId xmlns:a16="http://schemas.microsoft.com/office/drawing/2014/main" id="{CE8F1842-2C21-C2B1-2DEE-6583E6423A05}"/>
+                <a16:creationId xmlns:a16="http://schemas.microsoft.com/office/drawing/2014/main" id="{7005BE28-B7FE-B700-781C-11997FF3308B}"/>
               </a:ext>
             </a:extLst>
           </p:cNvPr>
@@ -7982,7 +7982,7 @@
           <p:cNvPr id="10" name="TextBox 9">
             <a:extLst>
               <a:ext uri="{FF2B5EF4-FFF2-40B4-BE49-F238E27FC236}">
-                <a16:creationId xmlns:a16="http://schemas.microsoft.com/office/drawing/2014/main" id="{E6B64E81-E081-4013-4A7E-119A61420D36}"/>
+                <a16:creationId xmlns:a16="http://schemas.microsoft.com/office/drawing/2014/main" id="{03FC3DFA-B445-CAE1-F4BD-E9DC4E18222C}"/>
               </a:ext>
             </a:extLst>
           </p:cNvPr>
@@ -8022,7 +8022,7 @@
           <p:cNvPr id="11" name="TextBox 10">
             <a:extLst>
               <a:ext uri="{FF2B5EF4-FFF2-40B4-BE49-F238E27FC236}">
-                <a16:creationId xmlns:a16="http://schemas.microsoft.com/office/drawing/2014/main" id="{A60F6AA5-BCEB-71CE-16A9-EC29075B1023}"/>
+                <a16:creationId xmlns:a16="http://schemas.microsoft.com/office/drawing/2014/main" id="{B7F54F34-A2E3-918A-04E1-8B905004C189}"/>
               </a:ext>
             </a:extLst>
           </p:cNvPr>
@@ -8068,7 +8068,7 @@
           <p:cNvPr id="12" name="Oval 11">
             <a:extLst>
               <a:ext uri="{FF2B5EF4-FFF2-40B4-BE49-F238E27FC236}">
-                <a16:creationId xmlns:a16="http://schemas.microsoft.com/office/drawing/2014/main" id="{0B6AC7F5-FDBA-352E-7578-A7A3A8C72092}"/>
+                <a16:creationId xmlns:a16="http://schemas.microsoft.com/office/drawing/2014/main" id="{4AD12F44-FFB5-EFBA-0620-10350280A536}"/>
               </a:ext>
             </a:extLst>
           </p:cNvPr>
@@ -8144,7 +8144,7 @@
           <p:cNvPr id="13" name="TextBox 12">
             <a:extLst>
               <a:ext uri="{FF2B5EF4-FFF2-40B4-BE49-F238E27FC236}">
-                <a16:creationId xmlns:a16="http://schemas.microsoft.com/office/drawing/2014/main" id="{91E40CB4-1E18-2D0E-9F23-911AB28E6347}"/>
+                <a16:creationId xmlns:a16="http://schemas.microsoft.com/office/drawing/2014/main" id="{DE9D87A8-6D86-14D2-62CB-8FBBB790C2A3}"/>
               </a:ext>
             </a:extLst>
           </p:cNvPr>
@@ -8184,7 +8184,7 @@
           <p:cNvPr id="14" name="TextBox 13">
             <a:extLst>
               <a:ext uri="{FF2B5EF4-FFF2-40B4-BE49-F238E27FC236}">
-                <a16:creationId xmlns:a16="http://schemas.microsoft.com/office/drawing/2014/main" id="{5D763576-B1D0-794D-7ED5-B683FC5EB4AA}"/>
+                <a16:creationId xmlns:a16="http://schemas.microsoft.com/office/drawing/2014/main" id="{190F20A3-B79F-7B81-C24C-19D82BD73AC3}"/>
               </a:ext>
             </a:extLst>
           </p:cNvPr>
@@ -8230,7 +8230,7 @@
           <p:cNvPr id="15" name="Oval 14">
             <a:extLst>
               <a:ext uri="{FF2B5EF4-FFF2-40B4-BE49-F238E27FC236}">
-                <a16:creationId xmlns:a16="http://schemas.microsoft.com/office/drawing/2014/main" id="{D63C5FFA-A442-E9CA-9E55-C92B3C520097}"/>
+                <a16:creationId xmlns:a16="http://schemas.microsoft.com/office/drawing/2014/main" id="{5E5D8A90-8779-DBC7-53E8-C8565565112A}"/>
               </a:ext>
             </a:extLst>
           </p:cNvPr>
@@ -8306,7 +8306,7 @@
           <p:cNvPr id="16" name="TextBox 15">
             <a:extLst>
               <a:ext uri="{FF2B5EF4-FFF2-40B4-BE49-F238E27FC236}">
-                <a16:creationId xmlns:a16="http://schemas.microsoft.com/office/drawing/2014/main" id="{A03BCFDD-F10B-AA35-F1BC-A79B4FEFAFE1}"/>
+                <a16:creationId xmlns:a16="http://schemas.microsoft.com/office/drawing/2014/main" id="{02C1AC1B-CFB2-40E7-001E-72C00C5F61B7}"/>
               </a:ext>
             </a:extLst>
           </p:cNvPr>
@@ -8346,7 +8346,7 @@
           <p:cNvPr id="17" name="TextBox 16">
             <a:extLst>
               <a:ext uri="{FF2B5EF4-FFF2-40B4-BE49-F238E27FC236}">
-                <a16:creationId xmlns:a16="http://schemas.microsoft.com/office/drawing/2014/main" id="{4DE345F3-DF02-D68A-BC33-8BFF91E96806}"/>
+                <a16:creationId xmlns:a16="http://schemas.microsoft.com/office/drawing/2014/main" id="{7A18E370-E98F-F6FD-6834-104C5B6CCA92}"/>
               </a:ext>
             </a:extLst>
           </p:cNvPr>
@@ -8392,7 +8392,7 @@
           <p:cNvPr id="18" name="Oval 17">
             <a:extLst>
               <a:ext uri="{FF2B5EF4-FFF2-40B4-BE49-F238E27FC236}">
-                <a16:creationId xmlns:a16="http://schemas.microsoft.com/office/drawing/2014/main" id="{67CC480E-2022-32DD-1364-A0CD56AA7252}"/>
+                <a16:creationId xmlns:a16="http://schemas.microsoft.com/office/drawing/2014/main" id="{623CC193-F921-0115-9E4A-D732ECF6A16B}"/>
               </a:ext>
             </a:extLst>
           </p:cNvPr>
@@ -8468,7 +8468,7 @@
           <p:cNvPr id="19" name="TextBox 18">
             <a:extLst>
               <a:ext uri="{FF2B5EF4-FFF2-40B4-BE49-F238E27FC236}">
-                <a16:creationId xmlns:a16="http://schemas.microsoft.com/office/drawing/2014/main" id="{E8F8C4CE-8D66-28CF-700C-70D4B7BF6414}"/>
+                <a16:creationId xmlns:a16="http://schemas.microsoft.com/office/drawing/2014/main" id="{FC110D31-F059-F969-88E9-CE0EFC1CA0AA}"/>
               </a:ext>
             </a:extLst>
           </p:cNvPr>
@@ -8508,7 +8508,7 @@
           <p:cNvPr id="20" name="TextBox 19">
             <a:extLst>
               <a:ext uri="{FF2B5EF4-FFF2-40B4-BE49-F238E27FC236}">
-                <a16:creationId xmlns:a16="http://schemas.microsoft.com/office/drawing/2014/main" id="{3314B54F-7669-A81B-DE58-652593B9A64E}"/>
+                <a16:creationId xmlns:a16="http://schemas.microsoft.com/office/drawing/2014/main" id="{92CCD647-6F2E-1A0D-F63E-0E5B64087A50}"/>
               </a:ext>
             </a:extLst>
           </p:cNvPr>
@@ -8554,7 +8554,7 @@
           <p:cNvPr id="21" name="TextBox 20">
             <a:extLst>
               <a:ext uri="{FF2B5EF4-FFF2-40B4-BE49-F238E27FC236}">
-                <a16:creationId xmlns:a16="http://schemas.microsoft.com/office/drawing/2014/main" id="{A633CC15-149A-6B28-7C64-6811A32BD383}"/>
+                <a16:creationId xmlns:a16="http://schemas.microsoft.com/office/drawing/2014/main" id="{9786B92B-1D4B-BAB5-27D8-6FAF4612A2BE}"/>
               </a:ext>
             </a:extLst>
           </p:cNvPr>
@@ -8600,7 +8600,7 @@
           <p:cNvPr id="22" name="TextBox 21">
             <a:extLst>
               <a:ext uri="{FF2B5EF4-FFF2-40B4-BE49-F238E27FC236}">
-                <a16:creationId xmlns:a16="http://schemas.microsoft.com/office/drawing/2014/main" id="{54143710-7273-2B8F-2082-D944264ADE9B}"/>
+                <a16:creationId xmlns:a16="http://schemas.microsoft.com/office/drawing/2014/main" id="{126A765B-A880-6AF6-8DF6-CF6A7921035B}"/>
               </a:ext>
             </a:extLst>
           </p:cNvPr>
@@ -8639,7 +8639,7 @@
     </p:spTree>
     <p:extLst>
       <p:ext uri="{BB962C8B-B14F-4D97-AF65-F5344CB8AC3E}">
-        <p14:creationId xmlns:p14="http://schemas.microsoft.com/office/powerpoint/2010/main" val="62320841"/>
+        <p14:creationId xmlns:p14="http://schemas.microsoft.com/office/powerpoint/2010/main" val="2193678956"/>
       </p:ext>
     </p:extLst>
   </p:cSld>
@@ -8679,7 +8679,7 @@
           <p:cNvPr id="2" name="TextBox 1">
             <a:extLst>
               <a:ext uri="{FF2B5EF4-FFF2-40B4-BE49-F238E27FC236}">
-                <a16:creationId xmlns:a16="http://schemas.microsoft.com/office/drawing/2014/main" id="{2394C806-7787-834E-5C67-813538EFEA9F}"/>
+                <a16:creationId xmlns:a16="http://schemas.microsoft.com/office/drawing/2014/main" id="{A0AF1240-8293-7DC6-7255-1B504D322565}"/>
               </a:ext>
             </a:extLst>
           </p:cNvPr>
@@ -8719,7 +8719,7 @@
           <p:cNvPr id="3" name="TextBox 2">
             <a:extLst>
               <a:ext uri="{FF2B5EF4-FFF2-40B4-BE49-F238E27FC236}">
-                <a16:creationId xmlns:a16="http://schemas.microsoft.com/office/drawing/2014/main" id="{23F37D18-E6CA-135B-9265-2159567AB553}"/>
+                <a16:creationId xmlns:a16="http://schemas.microsoft.com/office/drawing/2014/main" id="{7C6D77CE-7FD4-2F67-3A3B-6D3AB3F4D7A3}"/>
               </a:ext>
             </a:extLst>
           </p:cNvPr>
@@ -8759,7 +8759,7 @@
           <p:cNvPr id="4" name="TextBox 3">
             <a:extLst>
               <a:ext uri="{FF2B5EF4-FFF2-40B4-BE49-F238E27FC236}">
-                <a16:creationId xmlns:a16="http://schemas.microsoft.com/office/drawing/2014/main" id="{63B65017-8B61-CEFC-0C4E-0003CBB24090}"/>
+                <a16:creationId xmlns:a16="http://schemas.microsoft.com/office/drawing/2014/main" id="{585A8761-901E-27FB-383C-C8641ED0DCDE}"/>
               </a:ext>
             </a:extLst>
           </p:cNvPr>
@@ -8805,7 +8805,7 @@
           <p:cNvPr id="5" name="TextBox 4">
             <a:extLst>
               <a:ext uri="{FF2B5EF4-FFF2-40B4-BE49-F238E27FC236}">
-                <a16:creationId xmlns:a16="http://schemas.microsoft.com/office/drawing/2014/main" id="{9A7A83BC-406A-E97E-E0F0-5667F6B835E9}"/>
+                <a16:creationId xmlns:a16="http://schemas.microsoft.com/office/drawing/2014/main" id="{9F6D4E41-754E-25FD-14FF-A49713A3251D}"/>
               </a:ext>
             </a:extLst>
           </p:cNvPr>
@@ -8849,7 +8849,7 @@
     </p:spTree>
     <p:extLst>
       <p:ext uri="{BB962C8B-B14F-4D97-AF65-F5344CB8AC3E}">
-        <p14:creationId xmlns:p14="http://schemas.microsoft.com/office/powerpoint/2010/main" val="2224718968"/>
+        <p14:creationId xmlns:p14="http://schemas.microsoft.com/office/powerpoint/2010/main" val="404526090"/>
       </p:ext>
     </p:extLst>
   </p:cSld>
@@ -8889,7 +8889,7 @@
           <p:cNvPr id="2" name="TextBox 1">
             <a:extLst>
               <a:ext uri="{FF2B5EF4-FFF2-40B4-BE49-F238E27FC236}">
-                <a16:creationId xmlns:a16="http://schemas.microsoft.com/office/drawing/2014/main" id="{F62CCFF5-F6E1-2CCA-6990-DE3507A8C7E5}"/>
+                <a16:creationId xmlns:a16="http://schemas.microsoft.com/office/drawing/2014/main" id="{3E5A3E44-A03A-D84C-C620-23F7F0D46D4D}"/>
               </a:ext>
             </a:extLst>
           </p:cNvPr>
@@ -8935,7 +8935,7 @@
           <p:cNvPr id="3" name="Rectangle: Rounded Corners 2">
             <a:extLst>
               <a:ext uri="{FF2B5EF4-FFF2-40B4-BE49-F238E27FC236}">
-                <a16:creationId xmlns:a16="http://schemas.microsoft.com/office/drawing/2014/main" id="{6DBC94E7-E9FF-F4A1-B661-99457308B359}"/>
+                <a16:creationId xmlns:a16="http://schemas.microsoft.com/office/drawing/2014/main" id="{415A1DEF-FC7E-B904-FA16-1C3A11DE8B58}"/>
               </a:ext>
             </a:extLst>
           </p:cNvPr>
@@ -9005,7 +9005,7 @@
           <p:cNvPr id="4" name="TextBox 3">
             <a:extLst>
               <a:ext uri="{FF2B5EF4-FFF2-40B4-BE49-F238E27FC236}">
-                <a16:creationId xmlns:a16="http://schemas.microsoft.com/office/drawing/2014/main" id="{1F9420CE-40A0-8DB5-7278-70BA8A085E9D}"/>
+                <a16:creationId xmlns:a16="http://schemas.microsoft.com/office/drawing/2014/main" id="{BC8E5647-4249-EA35-893E-F83F15A78D8F}"/>
               </a:ext>
             </a:extLst>
           </p:cNvPr>
@@ -9045,7 +9045,7 @@
           <p:cNvPr id="5" name="TextBox 4">
             <a:extLst>
               <a:ext uri="{FF2B5EF4-FFF2-40B4-BE49-F238E27FC236}">
-                <a16:creationId xmlns:a16="http://schemas.microsoft.com/office/drawing/2014/main" id="{0B6D8C9F-ED65-1A6B-A08F-FCDFE65A63D8}"/>
+                <a16:creationId xmlns:a16="http://schemas.microsoft.com/office/drawing/2014/main" id="{0E69DAD5-61C7-D377-332F-0C284DF77195}"/>
               </a:ext>
             </a:extLst>
           </p:cNvPr>
@@ -9091,7 +9091,7 @@
           <p:cNvPr id="6" name="TextBox 5">
             <a:extLst>
               <a:ext uri="{FF2B5EF4-FFF2-40B4-BE49-F238E27FC236}">
-                <a16:creationId xmlns:a16="http://schemas.microsoft.com/office/drawing/2014/main" id="{CB05F1CD-F4A7-AEFD-9A75-4E5D4088D297}"/>
+                <a16:creationId xmlns:a16="http://schemas.microsoft.com/office/drawing/2014/main" id="{398BBA56-599A-A1A9-98BA-975DB2F8179C}"/>
               </a:ext>
             </a:extLst>
           </p:cNvPr>
@@ -9137,7 +9137,7 @@
           <p:cNvPr id="7" name="TextBox 6">
             <a:extLst>
               <a:ext uri="{FF2B5EF4-FFF2-40B4-BE49-F238E27FC236}">
-                <a16:creationId xmlns:a16="http://schemas.microsoft.com/office/drawing/2014/main" id="{DFA4AE6C-E32D-BAFD-B78B-8D0808F3FD5B}"/>
+                <a16:creationId xmlns:a16="http://schemas.microsoft.com/office/drawing/2014/main" id="{DDE99764-9E08-7B80-66A6-C5B8E8E498ED}"/>
               </a:ext>
             </a:extLst>
           </p:cNvPr>
@@ -9183,7 +9183,7 @@
           <p:cNvPr id="8" name="Oval 7">
             <a:extLst>
               <a:ext uri="{FF2B5EF4-FFF2-40B4-BE49-F238E27FC236}">
-                <a16:creationId xmlns:a16="http://schemas.microsoft.com/office/drawing/2014/main" id="{F78266E9-38D2-FF36-2A14-E40D8DB63410}"/>
+                <a16:creationId xmlns:a16="http://schemas.microsoft.com/office/drawing/2014/main" id="{5A3B87ED-9EFA-0C74-D4CD-00F861AF599C}"/>
               </a:ext>
             </a:extLst>
           </p:cNvPr>
@@ -9259,7 +9259,7 @@
           <p:cNvPr id="9" name="TextBox 8">
             <a:extLst>
               <a:ext uri="{FF2B5EF4-FFF2-40B4-BE49-F238E27FC236}">
-                <a16:creationId xmlns:a16="http://schemas.microsoft.com/office/drawing/2014/main" id="{E41457D0-1B5F-4B6A-B387-D26A5DDC5F3F}"/>
+                <a16:creationId xmlns:a16="http://schemas.microsoft.com/office/drawing/2014/main" id="{5CA68E64-06BA-0857-F17C-D034DD41C3A5}"/>
               </a:ext>
             </a:extLst>
           </p:cNvPr>
@@ -9305,7 +9305,7 @@
           <p:cNvPr id="10" name="Oval 9">
             <a:extLst>
               <a:ext uri="{FF2B5EF4-FFF2-40B4-BE49-F238E27FC236}">
-                <a16:creationId xmlns:a16="http://schemas.microsoft.com/office/drawing/2014/main" id="{1F9476BF-9FFA-7329-C9E9-30F993648596}"/>
+                <a16:creationId xmlns:a16="http://schemas.microsoft.com/office/drawing/2014/main" id="{B0439720-A57E-EF0A-85CF-E09CDE273E40}"/>
               </a:ext>
             </a:extLst>
           </p:cNvPr>
@@ -9381,7 +9381,7 @@
           <p:cNvPr id="11" name="TextBox 10">
             <a:extLst>
               <a:ext uri="{FF2B5EF4-FFF2-40B4-BE49-F238E27FC236}">
-                <a16:creationId xmlns:a16="http://schemas.microsoft.com/office/drawing/2014/main" id="{FC6E1025-9ED9-8F35-25F0-FC32B5E2DFEF}"/>
+                <a16:creationId xmlns:a16="http://schemas.microsoft.com/office/drawing/2014/main" id="{8353E336-5C4F-3EFB-6843-963AE280F693}"/>
               </a:ext>
             </a:extLst>
           </p:cNvPr>
@@ -9427,7 +9427,7 @@
           <p:cNvPr id="12" name="Oval 11">
             <a:extLst>
               <a:ext uri="{FF2B5EF4-FFF2-40B4-BE49-F238E27FC236}">
-                <a16:creationId xmlns:a16="http://schemas.microsoft.com/office/drawing/2014/main" id="{301EBDFA-0B24-6372-181F-178B252D2BDF}"/>
+                <a16:creationId xmlns:a16="http://schemas.microsoft.com/office/drawing/2014/main" id="{CF74EC6A-CD7A-2B6C-9FA4-84014840300D}"/>
               </a:ext>
             </a:extLst>
           </p:cNvPr>
@@ -9503,7 +9503,7 @@
           <p:cNvPr id="13" name="TextBox 12">
             <a:extLst>
               <a:ext uri="{FF2B5EF4-FFF2-40B4-BE49-F238E27FC236}">
-                <a16:creationId xmlns:a16="http://schemas.microsoft.com/office/drawing/2014/main" id="{2A6AB740-582D-685E-27BD-2BB8BFE1735F}"/>
+                <a16:creationId xmlns:a16="http://schemas.microsoft.com/office/drawing/2014/main" id="{82CA8AA3-08C6-6D37-A3A5-8C2DA3DEC6F6}"/>
               </a:ext>
             </a:extLst>
           </p:cNvPr>
@@ -9549,7 +9549,7 @@
           <p:cNvPr id="14" name="Rectangle: Rounded Corners 13">
             <a:extLst>
               <a:ext uri="{FF2B5EF4-FFF2-40B4-BE49-F238E27FC236}">
-                <a16:creationId xmlns:a16="http://schemas.microsoft.com/office/drawing/2014/main" id="{B39E9189-93C8-DE85-764A-025925EDA3BD}"/>
+                <a16:creationId xmlns:a16="http://schemas.microsoft.com/office/drawing/2014/main" id="{D6FBA146-5D11-FF39-643D-AEE391359AA6}"/>
               </a:ext>
             </a:extLst>
           </p:cNvPr>
@@ -9632,7 +9632,7 @@
           <p:cNvPr id="15" name="TextBox 14">
             <a:extLst>
               <a:ext uri="{FF2B5EF4-FFF2-40B4-BE49-F238E27FC236}">
-                <a16:creationId xmlns:a16="http://schemas.microsoft.com/office/drawing/2014/main" id="{3AB81A3D-97F7-B74F-1B43-F1D7A6BFAE20}"/>
+                <a16:creationId xmlns:a16="http://schemas.microsoft.com/office/drawing/2014/main" id="{1D2D706A-CBDC-86E2-3A71-5330467FC95A}"/>
               </a:ext>
             </a:extLst>
           </p:cNvPr>
@@ -9678,7 +9678,7 @@
           <p:cNvPr id="16" name="TextBox 15">
             <a:extLst>
               <a:ext uri="{FF2B5EF4-FFF2-40B4-BE49-F238E27FC236}">
-                <a16:creationId xmlns:a16="http://schemas.microsoft.com/office/drawing/2014/main" id="{3EED62B0-E60B-C90C-F406-6AD2B0F25A12}"/>
+                <a16:creationId xmlns:a16="http://schemas.microsoft.com/office/drawing/2014/main" id="{1DB73D74-3D4F-3A8E-06B1-D0D1C7210586}"/>
               </a:ext>
             </a:extLst>
           </p:cNvPr>
@@ -9717,7 +9717,7 @@
     </p:spTree>
     <p:extLst>
       <p:ext uri="{BB962C8B-B14F-4D97-AF65-F5344CB8AC3E}">
-        <p14:creationId xmlns:p14="http://schemas.microsoft.com/office/powerpoint/2010/main" val="4050918847"/>
+        <p14:creationId xmlns:p14="http://schemas.microsoft.com/office/powerpoint/2010/main" val="4207872985"/>
       </p:ext>
     </p:extLst>
   </p:cSld>
@@ -9757,7 +9757,7 @@
           <p:cNvPr id="2" name="TextBox 1">
             <a:extLst>
               <a:ext uri="{FF2B5EF4-FFF2-40B4-BE49-F238E27FC236}">
-                <a16:creationId xmlns:a16="http://schemas.microsoft.com/office/drawing/2014/main" id="{D26B37A5-2078-F8AA-6E12-19618A528608}"/>
+                <a16:creationId xmlns:a16="http://schemas.microsoft.com/office/drawing/2014/main" id="{C111AEE9-9963-D2A0-E29D-904283875A60}"/>
               </a:ext>
             </a:extLst>
           </p:cNvPr>
@@ -9803,7 +9803,7 @@
           <p:cNvPr id="3" name="TextBox 2">
             <a:extLst>
               <a:ext uri="{FF2B5EF4-FFF2-40B4-BE49-F238E27FC236}">
-                <a16:creationId xmlns:a16="http://schemas.microsoft.com/office/drawing/2014/main" id="{2D077EBA-D17F-8A9F-F7B9-93B68AE82B4C}"/>
+                <a16:creationId xmlns:a16="http://schemas.microsoft.com/office/drawing/2014/main" id="{D09BD57A-64A5-7425-F96C-F88798D8DDEE}"/>
               </a:ext>
             </a:extLst>
           </p:cNvPr>
@@ -9843,7 +9843,7 @@
           <p:cNvPr id="4" name="Straight Connector 3">
             <a:extLst>
               <a:ext uri="{FF2B5EF4-FFF2-40B4-BE49-F238E27FC236}">
-                <a16:creationId xmlns:a16="http://schemas.microsoft.com/office/drawing/2014/main" id="{5B07C134-3A2E-1F7B-3353-3D242C52AA59}"/>
+                <a16:creationId xmlns:a16="http://schemas.microsoft.com/office/drawing/2014/main" id="{57749792-B82A-F03A-6071-FBCAA61A59D5}"/>
               </a:ext>
             </a:extLst>
           </p:cNvPr>
@@ -9884,7 +9884,7 @@
           <p:cNvPr id="5" name="Oval 4">
             <a:extLst>
               <a:ext uri="{FF2B5EF4-FFF2-40B4-BE49-F238E27FC236}">
-                <a16:creationId xmlns:a16="http://schemas.microsoft.com/office/drawing/2014/main" id="{CDAC6285-1FF8-E498-EEA9-5C16656C2367}"/>
+                <a16:creationId xmlns:a16="http://schemas.microsoft.com/office/drawing/2014/main" id="{34D09139-2AAD-B236-6E75-9D962516DDB0}"/>
               </a:ext>
             </a:extLst>
           </p:cNvPr>
@@ -9960,7 +9960,7 @@
           <p:cNvPr id="6" name="TextBox 5">
             <a:extLst>
               <a:ext uri="{FF2B5EF4-FFF2-40B4-BE49-F238E27FC236}">
-                <a16:creationId xmlns:a16="http://schemas.microsoft.com/office/drawing/2014/main" id="{421219F5-9A62-A77E-CB4C-3A1D720934E3}"/>
+                <a16:creationId xmlns:a16="http://schemas.microsoft.com/office/drawing/2014/main" id="{D05E433F-151B-A1F2-A74E-EEBA700DDF87}"/>
               </a:ext>
             </a:extLst>
           </p:cNvPr>
@@ -10000,7 +10000,7 @@
           <p:cNvPr id="7" name="TextBox 6">
             <a:extLst>
               <a:ext uri="{FF2B5EF4-FFF2-40B4-BE49-F238E27FC236}">
-                <a16:creationId xmlns:a16="http://schemas.microsoft.com/office/drawing/2014/main" id="{5FF5D628-8DD0-8E45-4499-0DEA20A39D0C}"/>
+                <a16:creationId xmlns:a16="http://schemas.microsoft.com/office/drawing/2014/main" id="{4A9846C2-B73B-6AF1-4A75-FDBC8FDBAD8D}"/>
               </a:ext>
             </a:extLst>
           </p:cNvPr>
@@ -10046,7 +10046,7 @@
           <p:cNvPr id="8" name="Oval 7">
             <a:extLst>
               <a:ext uri="{FF2B5EF4-FFF2-40B4-BE49-F238E27FC236}">
-                <a16:creationId xmlns:a16="http://schemas.microsoft.com/office/drawing/2014/main" id="{9DA11DCC-014F-AA8C-B06C-2E44D1D764D7}"/>
+                <a16:creationId xmlns:a16="http://schemas.microsoft.com/office/drawing/2014/main" id="{98986B2F-F12A-65AE-E8ED-D47997B49E6C}"/>
               </a:ext>
             </a:extLst>
           </p:cNvPr>
@@ -10122,7 +10122,7 @@
           <p:cNvPr id="9" name="TextBox 8">
             <a:extLst>
               <a:ext uri="{FF2B5EF4-FFF2-40B4-BE49-F238E27FC236}">
-                <a16:creationId xmlns:a16="http://schemas.microsoft.com/office/drawing/2014/main" id="{DFD2A11A-16FA-2674-34D9-B3A46F56D5F3}"/>
+                <a16:creationId xmlns:a16="http://schemas.microsoft.com/office/drawing/2014/main" id="{A7E8C4AE-A023-05BA-1FCA-FB2AF59657E0}"/>
               </a:ext>
             </a:extLst>
           </p:cNvPr>
@@ -10168,7 +10168,7 @@
           <p:cNvPr id="10" name="TextBox 9">
             <a:extLst>
               <a:ext uri="{FF2B5EF4-FFF2-40B4-BE49-F238E27FC236}">
-                <a16:creationId xmlns:a16="http://schemas.microsoft.com/office/drawing/2014/main" id="{CF7B5D82-D756-AB75-84D7-4273A0D6F4F6}"/>
+                <a16:creationId xmlns:a16="http://schemas.microsoft.com/office/drawing/2014/main" id="{2C840018-ED20-7F1D-609B-47C1752A9502}"/>
               </a:ext>
             </a:extLst>
           </p:cNvPr>
@@ -10214,7 +10214,7 @@
           <p:cNvPr id="11" name="Rectangle: Rounded Corners 10">
             <a:extLst>
               <a:ext uri="{FF2B5EF4-FFF2-40B4-BE49-F238E27FC236}">
-                <a16:creationId xmlns:a16="http://schemas.microsoft.com/office/drawing/2014/main" id="{D0144331-E85F-AF0D-1F3B-212286C2DE72}"/>
+                <a16:creationId xmlns:a16="http://schemas.microsoft.com/office/drawing/2014/main" id="{28B13D75-619E-FA91-37DD-12F69A32BAEB}"/>
               </a:ext>
             </a:extLst>
           </p:cNvPr>
@@ -10284,7 +10284,7 @@
           <p:cNvPr id="12" name="TextBox 11">
             <a:extLst>
               <a:ext uri="{FF2B5EF4-FFF2-40B4-BE49-F238E27FC236}">
-                <a16:creationId xmlns:a16="http://schemas.microsoft.com/office/drawing/2014/main" id="{C2BAF9D3-867C-8F41-A3F9-5B7A6AF73240}"/>
+                <a16:creationId xmlns:a16="http://schemas.microsoft.com/office/drawing/2014/main" id="{EAA63F7A-EEA7-1457-76E4-79D12EA7C2DA}"/>
               </a:ext>
             </a:extLst>
           </p:cNvPr>
@@ -10324,7 +10324,7 @@
           <p:cNvPr id="13" name="TextBox 12">
             <a:extLst>
               <a:ext uri="{FF2B5EF4-FFF2-40B4-BE49-F238E27FC236}">
-                <a16:creationId xmlns:a16="http://schemas.microsoft.com/office/drawing/2014/main" id="{D69D466C-0CC3-898C-CDC9-66516B2A470E}"/>
+                <a16:creationId xmlns:a16="http://schemas.microsoft.com/office/drawing/2014/main" id="{E38FE877-7C45-A25E-028D-7885D2BA6AB7}"/>
               </a:ext>
             </a:extLst>
           </p:cNvPr>
@@ -10370,7 +10370,7 @@
           <p:cNvPr id="14" name="TextBox 13">
             <a:extLst>
               <a:ext uri="{FF2B5EF4-FFF2-40B4-BE49-F238E27FC236}">
-                <a16:creationId xmlns:a16="http://schemas.microsoft.com/office/drawing/2014/main" id="{35A722FE-58FC-9309-89C4-4375E0834AB7}"/>
+                <a16:creationId xmlns:a16="http://schemas.microsoft.com/office/drawing/2014/main" id="{590762CE-0044-EB33-BEA8-2C654165BB3E}"/>
               </a:ext>
             </a:extLst>
           </p:cNvPr>
@@ -10416,7 +10416,7 @@
           <p:cNvPr id="15" name="Oval 14">
             <a:extLst>
               <a:ext uri="{FF2B5EF4-FFF2-40B4-BE49-F238E27FC236}">
-                <a16:creationId xmlns:a16="http://schemas.microsoft.com/office/drawing/2014/main" id="{AA9F0DC6-8867-0CC8-A1CD-294A60088A96}"/>
+                <a16:creationId xmlns:a16="http://schemas.microsoft.com/office/drawing/2014/main" id="{FF72F0FA-F343-B537-8FE9-022CFA36419E}"/>
               </a:ext>
             </a:extLst>
           </p:cNvPr>
@@ -10492,7 +10492,7 @@
           <p:cNvPr id="16" name="TextBox 15">
             <a:extLst>
               <a:ext uri="{FF2B5EF4-FFF2-40B4-BE49-F238E27FC236}">
-                <a16:creationId xmlns:a16="http://schemas.microsoft.com/office/drawing/2014/main" id="{8E78DFCC-C9E7-705A-65FC-F0B8D6F2E3BC}"/>
+                <a16:creationId xmlns:a16="http://schemas.microsoft.com/office/drawing/2014/main" id="{41BCE4E3-2F29-5D61-11B0-3980AF4F1748}"/>
               </a:ext>
             </a:extLst>
           </p:cNvPr>
@@ -10538,7 +10538,7 @@
           <p:cNvPr id="17" name="TextBox 16">
             <a:extLst>
               <a:ext uri="{FF2B5EF4-FFF2-40B4-BE49-F238E27FC236}">
-                <a16:creationId xmlns:a16="http://schemas.microsoft.com/office/drawing/2014/main" id="{C116CDD2-33ED-7B3D-0812-4EE527857498}"/>
+                <a16:creationId xmlns:a16="http://schemas.microsoft.com/office/drawing/2014/main" id="{8DB1BEBC-2E64-17DA-B69A-191556677C7C}"/>
               </a:ext>
             </a:extLst>
           </p:cNvPr>
@@ -10584,7 +10584,7 @@
           <p:cNvPr id="18" name="Oval 17">
             <a:extLst>
               <a:ext uri="{FF2B5EF4-FFF2-40B4-BE49-F238E27FC236}">
-                <a16:creationId xmlns:a16="http://schemas.microsoft.com/office/drawing/2014/main" id="{86783DFD-6FA3-C9FB-6F9A-5B92C7DD24E7}"/>
+                <a16:creationId xmlns:a16="http://schemas.microsoft.com/office/drawing/2014/main" id="{487DE53D-8772-5ACC-F176-0315C2098E0B}"/>
               </a:ext>
             </a:extLst>
           </p:cNvPr>
@@ -10660,7 +10660,7 @@
           <p:cNvPr id="19" name="TextBox 18">
             <a:extLst>
               <a:ext uri="{FF2B5EF4-FFF2-40B4-BE49-F238E27FC236}">
-                <a16:creationId xmlns:a16="http://schemas.microsoft.com/office/drawing/2014/main" id="{EC4C249B-9A5A-B636-FB95-D4DD7B9055A0}"/>
+                <a16:creationId xmlns:a16="http://schemas.microsoft.com/office/drawing/2014/main" id="{555A2DA7-270D-E126-3409-5E7DC6A2D7B6}"/>
               </a:ext>
             </a:extLst>
           </p:cNvPr>
@@ -10706,7 +10706,7 @@
           <p:cNvPr id="20" name="TextBox 19">
             <a:extLst>
               <a:ext uri="{FF2B5EF4-FFF2-40B4-BE49-F238E27FC236}">
-                <a16:creationId xmlns:a16="http://schemas.microsoft.com/office/drawing/2014/main" id="{4C190A64-ACC7-E36D-2EE9-542AA950AE65}"/>
+                <a16:creationId xmlns:a16="http://schemas.microsoft.com/office/drawing/2014/main" id="{F0205048-FD1B-726C-9634-266357D57275}"/>
               </a:ext>
             </a:extLst>
           </p:cNvPr>
@@ -10752,7 +10752,7 @@
           <p:cNvPr id="21" name="Oval 20">
             <a:extLst>
               <a:ext uri="{FF2B5EF4-FFF2-40B4-BE49-F238E27FC236}">
-                <a16:creationId xmlns:a16="http://schemas.microsoft.com/office/drawing/2014/main" id="{99775B94-ADB6-3D92-662A-00C9CDCA7E93}"/>
+                <a16:creationId xmlns:a16="http://schemas.microsoft.com/office/drawing/2014/main" id="{AC08AB7A-7162-735D-B529-28EE1318FA78}"/>
               </a:ext>
             </a:extLst>
           </p:cNvPr>
@@ -10828,7 +10828,7 @@
           <p:cNvPr id="22" name="TextBox 21">
             <a:extLst>
               <a:ext uri="{FF2B5EF4-FFF2-40B4-BE49-F238E27FC236}">
-                <a16:creationId xmlns:a16="http://schemas.microsoft.com/office/drawing/2014/main" id="{DC7C9BEF-2BAE-C02C-9941-3E0D7CD9D425}"/>
+                <a16:creationId xmlns:a16="http://schemas.microsoft.com/office/drawing/2014/main" id="{CD20E01C-E49F-51D0-F786-CF0D71F0019A}"/>
               </a:ext>
             </a:extLst>
           </p:cNvPr>
@@ -10868,7 +10868,7 @@
           <p:cNvPr id="23" name="TextBox 22">
             <a:extLst>
               <a:ext uri="{FF2B5EF4-FFF2-40B4-BE49-F238E27FC236}">
-                <a16:creationId xmlns:a16="http://schemas.microsoft.com/office/drawing/2014/main" id="{B0BF0D39-B701-C11E-FCBE-06D57632EA8C}"/>
+                <a16:creationId xmlns:a16="http://schemas.microsoft.com/office/drawing/2014/main" id="{E78B2EA2-C7FF-6368-8554-A1B4F507CF99}"/>
               </a:ext>
             </a:extLst>
           </p:cNvPr>
@@ -10908,7 +10908,7 @@
           <p:cNvPr id="24" name="Oval 23">
             <a:extLst>
               <a:ext uri="{FF2B5EF4-FFF2-40B4-BE49-F238E27FC236}">
-                <a16:creationId xmlns:a16="http://schemas.microsoft.com/office/drawing/2014/main" id="{E631BABB-E3B8-501C-4556-C369DFA4CD22}"/>
+                <a16:creationId xmlns:a16="http://schemas.microsoft.com/office/drawing/2014/main" id="{9896B1CA-E52D-8662-9ABA-BFF3DAE555F5}"/>
               </a:ext>
             </a:extLst>
           </p:cNvPr>
@@ -10984,7 +10984,7 @@
           <p:cNvPr id="25" name="TextBox 24">
             <a:extLst>
               <a:ext uri="{FF2B5EF4-FFF2-40B4-BE49-F238E27FC236}">
-                <a16:creationId xmlns:a16="http://schemas.microsoft.com/office/drawing/2014/main" id="{A1131667-7F19-E0FB-BE40-94F91BDF07BE}"/>
+                <a16:creationId xmlns:a16="http://schemas.microsoft.com/office/drawing/2014/main" id="{D4C0FDAA-50C1-C719-A11D-CF97387F796C}"/>
               </a:ext>
             </a:extLst>
           </p:cNvPr>
@@ -11024,7 +11024,7 @@
           <p:cNvPr id="26" name="TextBox 25">
             <a:extLst>
               <a:ext uri="{FF2B5EF4-FFF2-40B4-BE49-F238E27FC236}">
-                <a16:creationId xmlns:a16="http://schemas.microsoft.com/office/drawing/2014/main" id="{AF039431-F275-E4A6-D1CD-5993F33F44CD}"/>
+                <a16:creationId xmlns:a16="http://schemas.microsoft.com/office/drawing/2014/main" id="{8092B22F-785F-D315-4937-31DB2CA4E00D}"/>
               </a:ext>
             </a:extLst>
           </p:cNvPr>
@@ -11070,7 +11070,7 @@
           <p:cNvPr id="27" name="TextBox 26">
             <a:extLst>
               <a:ext uri="{FF2B5EF4-FFF2-40B4-BE49-F238E27FC236}">
-                <a16:creationId xmlns:a16="http://schemas.microsoft.com/office/drawing/2014/main" id="{7845A484-BD73-98FC-F339-902161F9A693}"/>
+                <a16:creationId xmlns:a16="http://schemas.microsoft.com/office/drawing/2014/main" id="{0520F1F3-DC03-83CC-75A3-E187C1FC2749}"/>
               </a:ext>
             </a:extLst>
           </p:cNvPr>
@@ -11116,7 +11116,7 @@
           <p:cNvPr id="28" name="TextBox 27">
             <a:extLst>
               <a:ext uri="{FF2B5EF4-FFF2-40B4-BE49-F238E27FC236}">
-                <a16:creationId xmlns:a16="http://schemas.microsoft.com/office/drawing/2014/main" id="{D29CCD79-1BE6-F7F0-2A2C-8A43A26C2695}"/>
+                <a16:creationId xmlns:a16="http://schemas.microsoft.com/office/drawing/2014/main" id="{DF4CA74F-CABD-8AF6-B35D-8680A7A32253}"/>
               </a:ext>
             </a:extLst>
           </p:cNvPr>
@@ -11155,7 +11155,7 @@
     </p:spTree>
     <p:extLst>
       <p:ext uri="{BB962C8B-B14F-4D97-AF65-F5344CB8AC3E}">
-        <p14:creationId xmlns:p14="http://schemas.microsoft.com/office/powerpoint/2010/main" val="2652112389"/>
+        <p14:creationId xmlns:p14="http://schemas.microsoft.com/office/powerpoint/2010/main" val="2358408386"/>
       </p:ext>
     </p:extLst>
   </p:cSld>
@@ -11195,7 +11195,7 @@
           <p:cNvPr id="2" name="TextBox 1">
             <a:extLst>
               <a:ext uri="{FF2B5EF4-FFF2-40B4-BE49-F238E27FC236}">
-                <a16:creationId xmlns:a16="http://schemas.microsoft.com/office/drawing/2014/main" id="{EE8B45B3-E62E-8C03-B32F-F04FAC040472}"/>
+                <a16:creationId xmlns:a16="http://schemas.microsoft.com/office/drawing/2014/main" id="{A5ADEC69-EB8B-826F-45D3-25EE77775865}"/>
               </a:ext>
             </a:extLst>
           </p:cNvPr>
@@ -11235,7 +11235,7 @@
           <p:cNvPr id="3" name="TextBox 2">
             <a:extLst>
               <a:ext uri="{FF2B5EF4-FFF2-40B4-BE49-F238E27FC236}">
-                <a16:creationId xmlns:a16="http://schemas.microsoft.com/office/drawing/2014/main" id="{3536802A-53A6-8F6F-139B-47D5C1AAC97A}"/>
+                <a16:creationId xmlns:a16="http://schemas.microsoft.com/office/drawing/2014/main" id="{8006D8AE-22E7-2447-9A48-520F8E770A0A}"/>
               </a:ext>
             </a:extLst>
           </p:cNvPr>
@@ -11281,7 +11281,7 @@
           <p:cNvPr id="4" name="Rectangle: Rounded Corners 3">
             <a:extLst>
               <a:ext uri="{FF2B5EF4-FFF2-40B4-BE49-F238E27FC236}">
-                <a16:creationId xmlns:a16="http://schemas.microsoft.com/office/drawing/2014/main" id="{892F5882-1976-DE35-2326-BAEAF7D6DFC7}"/>
+                <a16:creationId xmlns:a16="http://schemas.microsoft.com/office/drawing/2014/main" id="{79658458-1BCA-F469-882B-72C1287BFFBD}"/>
               </a:ext>
             </a:extLst>
           </p:cNvPr>
@@ -11351,7 +11351,7 @@
           <p:cNvPr id="5" name="TextBox 4">
             <a:extLst>
               <a:ext uri="{FF2B5EF4-FFF2-40B4-BE49-F238E27FC236}">
-                <a16:creationId xmlns:a16="http://schemas.microsoft.com/office/drawing/2014/main" id="{BBB1DB86-45AD-C0FD-307B-1F7F1E9C972D}"/>
+                <a16:creationId xmlns:a16="http://schemas.microsoft.com/office/drawing/2014/main" id="{4A87A5FE-663C-2137-D6E5-AF10C17DE6CE}"/>
               </a:ext>
             </a:extLst>
           </p:cNvPr>
@@ -11581,7 +11581,7 @@
           <p:cNvPr id="6" name="TextBox 5">
             <a:extLst>
               <a:ext uri="{FF2B5EF4-FFF2-40B4-BE49-F238E27FC236}">
-                <a16:creationId xmlns:a16="http://schemas.microsoft.com/office/drawing/2014/main" id="{79AFF2B9-75BD-261F-5C37-FD8991F928F5}"/>
+                <a16:creationId xmlns:a16="http://schemas.microsoft.com/office/drawing/2014/main" id="{D168536F-BE92-A9B5-CB0E-13FD07D6153B}"/>
               </a:ext>
             </a:extLst>
           </p:cNvPr>
@@ -11627,7 +11627,7 @@
           <p:cNvPr id="7" name="TextBox 6">
             <a:extLst>
               <a:ext uri="{FF2B5EF4-FFF2-40B4-BE49-F238E27FC236}">
-                <a16:creationId xmlns:a16="http://schemas.microsoft.com/office/drawing/2014/main" id="{FF64C81B-8408-3A5F-D712-187433E67407}"/>
+                <a16:creationId xmlns:a16="http://schemas.microsoft.com/office/drawing/2014/main" id="{045543DF-F520-C844-B1BD-60288133B171}"/>
               </a:ext>
             </a:extLst>
           </p:cNvPr>
@@ -11666,7 +11666,7 @@
     </p:spTree>
     <p:extLst>
       <p:ext uri="{BB962C8B-B14F-4D97-AF65-F5344CB8AC3E}">
-        <p14:creationId xmlns:p14="http://schemas.microsoft.com/office/powerpoint/2010/main" val="1838616536"/>
+        <p14:creationId xmlns:p14="http://schemas.microsoft.com/office/powerpoint/2010/main" val="1195480077"/>
       </p:ext>
     </p:extLst>
   </p:cSld>
@@ -11706,7 +11706,7 @@
           <p:cNvPr id="2" name="TextBox 1">
             <a:extLst>
               <a:ext uri="{FF2B5EF4-FFF2-40B4-BE49-F238E27FC236}">
-                <a16:creationId xmlns:a16="http://schemas.microsoft.com/office/drawing/2014/main" id="{673CB8A5-13AD-384B-62C3-3C1284AFC8AD}"/>
+                <a16:creationId xmlns:a16="http://schemas.microsoft.com/office/drawing/2014/main" id="{447C4B8D-2CBC-E30D-57BA-0F3174E654BF}"/>
               </a:ext>
             </a:extLst>
           </p:cNvPr>
@@ -11746,7 +11746,7 @@
           <p:cNvPr id="3" name="TextBox 2">
             <a:extLst>
               <a:ext uri="{FF2B5EF4-FFF2-40B4-BE49-F238E27FC236}">
-                <a16:creationId xmlns:a16="http://schemas.microsoft.com/office/drawing/2014/main" id="{1F0EAFF6-C6BC-8444-7589-42299122AA71}"/>
+                <a16:creationId xmlns:a16="http://schemas.microsoft.com/office/drawing/2014/main" id="{8C4BB0DA-A4A2-9309-51F8-DB71BA5B04A1}"/>
               </a:ext>
             </a:extLst>
           </p:cNvPr>
@@ -11786,7 +11786,7 @@
           <p:cNvPr id="4" name="TextBox 3">
             <a:extLst>
               <a:ext uri="{FF2B5EF4-FFF2-40B4-BE49-F238E27FC236}">
-                <a16:creationId xmlns:a16="http://schemas.microsoft.com/office/drawing/2014/main" id="{CB37770C-A985-B3ED-777D-B22FD82602DD}"/>
+                <a16:creationId xmlns:a16="http://schemas.microsoft.com/office/drawing/2014/main" id="{2C15107C-18E5-5C28-D024-5475217B32D4}"/>
               </a:ext>
             </a:extLst>
           </p:cNvPr>
@@ -11832,7 +11832,7 @@
           <p:cNvPr id="5" name="TextBox 4">
             <a:extLst>
               <a:ext uri="{FF2B5EF4-FFF2-40B4-BE49-F238E27FC236}">
-                <a16:creationId xmlns:a16="http://schemas.microsoft.com/office/drawing/2014/main" id="{235F9449-819E-CB38-F078-2D864F91659E}"/>
+                <a16:creationId xmlns:a16="http://schemas.microsoft.com/office/drawing/2014/main" id="{CA56DB1A-DAC1-42DF-D578-25835FE871D6}"/>
               </a:ext>
             </a:extLst>
           </p:cNvPr>
@@ -11876,7 +11876,7 @@
     </p:spTree>
     <p:extLst>
       <p:ext uri="{BB962C8B-B14F-4D97-AF65-F5344CB8AC3E}">
-        <p14:creationId xmlns:p14="http://schemas.microsoft.com/office/powerpoint/2010/main" val="2837527211"/>
+        <p14:creationId xmlns:p14="http://schemas.microsoft.com/office/powerpoint/2010/main" val="3188260751"/>
       </p:ext>
     </p:extLst>
   </p:cSld>
@@ -11916,7 +11916,7 @@
           <p:cNvPr id="2" name="TextBox 1">
             <a:extLst>
               <a:ext uri="{FF2B5EF4-FFF2-40B4-BE49-F238E27FC236}">
-                <a16:creationId xmlns:a16="http://schemas.microsoft.com/office/drawing/2014/main" id="{84F3C073-504A-16F5-AA5A-00033E16E26C}"/>
+                <a16:creationId xmlns:a16="http://schemas.microsoft.com/office/drawing/2014/main" id="{D1680B47-80B6-A117-AF4F-E66352411D12}"/>
               </a:ext>
             </a:extLst>
           </p:cNvPr>
@@ -11962,7 +11962,7 @@
           <p:cNvPr id="3" name="Rectangle: Rounded Corners 2">
             <a:extLst>
               <a:ext uri="{FF2B5EF4-FFF2-40B4-BE49-F238E27FC236}">
-                <a16:creationId xmlns:a16="http://schemas.microsoft.com/office/drawing/2014/main" id="{C029BD99-97DB-2DD7-06BC-FD0E7230FBC1}"/>
+                <a16:creationId xmlns:a16="http://schemas.microsoft.com/office/drawing/2014/main" id="{F99E69AB-D12B-B4A8-57FA-4C8A5FF84578}"/>
               </a:ext>
             </a:extLst>
           </p:cNvPr>
@@ -12032,7 +12032,7 @@
           <p:cNvPr id="4" name="TextBox 3">
             <a:extLst>
               <a:ext uri="{FF2B5EF4-FFF2-40B4-BE49-F238E27FC236}">
-                <a16:creationId xmlns:a16="http://schemas.microsoft.com/office/drawing/2014/main" id="{1D291250-2C53-B6EE-FBFC-B031EC1D63E6}"/>
+                <a16:creationId xmlns:a16="http://schemas.microsoft.com/office/drawing/2014/main" id="{83027C3D-1FDB-6261-77E2-6F3379AA5A54}"/>
               </a:ext>
             </a:extLst>
           </p:cNvPr>
@@ -12072,7 +12072,7 @@
           <p:cNvPr id="5" name="TextBox 4">
             <a:extLst>
               <a:ext uri="{FF2B5EF4-FFF2-40B4-BE49-F238E27FC236}">
-                <a16:creationId xmlns:a16="http://schemas.microsoft.com/office/drawing/2014/main" id="{83A38032-AAC9-707A-D56C-E786C33B0669}"/>
+                <a16:creationId xmlns:a16="http://schemas.microsoft.com/office/drawing/2014/main" id="{A356FA44-0F2C-E3E9-32BE-7CE4E2882DD8}"/>
               </a:ext>
             </a:extLst>
           </p:cNvPr>
@@ -12118,7 +12118,7 @@
           <p:cNvPr id="6" name="TextBox 5">
             <a:extLst>
               <a:ext uri="{FF2B5EF4-FFF2-40B4-BE49-F238E27FC236}">
-                <a16:creationId xmlns:a16="http://schemas.microsoft.com/office/drawing/2014/main" id="{DFD265E8-3444-2E07-A91C-8E3C63A11756}"/>
+                <a16:creationId xmlns:a16="http://schemas.microsoft.com/office/drawing/2014/main" id="{2865CC64-C392-4F7C-9556-D15394A5FA2C}"/>
               </a:ext>
             </a:extLst>
           </p:cNvPr>
@@ -12164,7 +12164,7 @@
           <p:cNvPr id="7" name="TextBox 6">
             <a:extLst>
               <a:ext uri="{FF2B5EF4-FFF2-40B4-BE49-F238E27FC236}">
-                <a16:creationId xmlns:a16="http://schemas.microsoft.com/office/drawing/2014/main" id="{BA7B1DD5-FA93-E51A-54BA-66F0B73A246D}"/>
+                <a16:creationId xmlns:a16="http://schemas.microsoft.com/office/drawing/2014/main" id="{E742AFCB-9392-7694-D853-25727CBADFCB}"/>
               </a:ext>
             </a:extLst>
           </p:cNvPr>
@@ -12210,7 +12210,7 @@
           <p:cNvPr id="8" name="Oval 7">
             <a:extLst>
               <a:ext uri="{FF2B5EF4-FFF2-40B4-BE49-F238E27FC236}">
-                <a16:creationId xmlns:a16="http://schemas.microsoft.com/office/drawing/2014/main" id="{97B674AD-B6EE-94E9-84C9-81A37AF9561C}"/>
+                <a16:creationId xmlns:a16="http://schemas.microsoft.com/office/drawing/2014/main" id="{04D149A0-1739-29D6-D419-AECB827CF57B}"/>
               </a:ext>
             </a:extLst>
           </p:cNvPr>
@@ -12286,7 +12286,7 @@
           <p:cNvPr id="9" name="TextBox 8">
             <a:extLst>
               <a:ext uri="{FF2B5EF4-FFF2-40B4-BE49-F238E27FC236}">
-                <a16:creationId xmlns:a16="http://schemas.microsoft.com/office/drawing/2014/main" id="{B213CC10-EBBC-FF36-0E9C-CB844B47567F}"/>
+                <a16:creationId xmlns:a16="http://schemas.microsoft.com/office/drawing/2014/main" id="{52A56C53-CC1D-EBBF-690A-D80020381925}"/>
               </a:ext>
             </a:extLst>
           </p:cNvPr>
@@ -12332,7 +12332,7 @@
           <p:cNvPr id="10" name="Oval 9">
             <a:extLst>
               <a:ext uri="{FF2B5EF4-FFF2-40B4-BE49-F238E27FC236}">
-                <a16:creationId xmlns:a16="http://schemas.microsoft.com/office/drawing/2014/main" id="{10E8EEA7-F01F-17F6-B6F7-C3CF969B7782}"/>
+                <a16:creationId xmlns:a16="http://schemas.microsoft.com/office/drawing/2014/main" id="{232401A3-C918-A663-2EAC-08166717B992}"/>
               </a:ext>
             </a:extLst>
           </p:cNvPr>
@@ -12408,7 +12408,7 @@
           <p:cNvPr id="11" name="TextBox 10">
             <a:extLst>
               <a:ext uri="{FF2B5EF4-FFF2-40B4-BE49-F238E27FC236}">
-                <a16:creationId xmlns:a16="http://schemas.microsoft.com/office/drawing/2014/main" id="{6336F127-0F8D-7722-86FB-D52C5CDE8B5B}"/>
+                <a16:creationId xmlns:a16="http://schemas.microsoft.com/office/drawing/2014/main" id="{18D925F5-4A1F-63C7-92A3-B1877CBBA6FA}"/>
               </a:ext>
             </a:extLst>
           </p:cNvPr>
@@ -12454,7 +12454,7 @@
           <p:cNvPr id="12" name="Oval 11">
             <a:extLst>
               <a:ext uri="{FF2B5EF4-FFF2-40B4-BE49-F238E27FC236}">
-                <a16:creationId xmlns:a16="http://schemas.microsoft.com/office/drawing/2014/main" id="{30E36292-BDD9-CEB5-3821-3E3BED5D9422}"/>
+                <a16:creationId xmlns:a16="http://schemas.microsoft.com/office/drawing/2014/main" id="{F3D10FB0-DE61-E657-99B6-2158E321E6D3}"/>
               </a:ext>
             </a:extLst>
           </p:cNvPr>
@@ -12530,7 +12530,7 @@
           <p:cNvPr id="13" name="TextBox 12">
             <a:extLst>
               <a:ext uri="{FF2B5EF4-FFF2-40B4-BE49-F238E27FC236}">
-                <a16:creationId xmlns:a16="http://schemas.microsoft.com/office/drawing/2014/main" id="{994B87C7-078A-EF94-5593-CE1F52EE72C6}"/>
+                <a16:creationId xmlns:a16="http://schemas.microsoft.com/office/drawing/2014/main" id="{2544443F-140E-78C6-B7E2-9BFE808FD935}"/>
               </a:ext>
             </a:extLst>
           </p:cNvPr>
@@ -12576,7 +12576,7 @@
           <p:cNvPr id="14" name="Rectangle: Rounded Corners 13">
             <a:extLst>
               <a:ext uri="{FF2B5EF4-FFF2-40B4-BE49-F238E27FC236}">
-                <a16:creationId xmlns:a16="http://schemas.microsoft.com/office/drawing/2014/main" id="{B31637E3-65FC-F565-166E-CBEF7D23AB61}"/>
+                <a16:creationId xmlns:a16="http://schemas.microsoft.com/office/drawing/2014/main" id="{78B9FD2E-FAC2-8081-51B1-81B1C436D4B7}"/>
               </a:ext>
             </a:extLst>
           </p:cNvPr>
@@ -12659,7 +12659,7 @@
           <p:cNvPr id="15" name="TextBox 14">
             <a:extLst>
               <a:ext uri="{FF2B5EF4-FFF2-40B4-BE49-F238E27FC236}">
-                <a16:creationId xmlns:a16="http://schemas.microsoft.com/office/drawing/2014/main" id="{DE11E32B-B5D1-79FD-F4BD-EEF03350BF27}"/>
+                <a16:creationId xmlns:a16="http://schemas.microsoft.com/office/drawing/2014/main" id="{6707F4F4-454D-8AE4-BF4F-79FE86111DAA}"/>
               </a:ext>
             </a:extLst>
           </p:cNvPr>
@@ -12705,7 +12705,7 @@
           <p:cNvPr id="16" name="TextBox 15">
             <a:extLst>
               <a:ext uri="{FF2B5EF4-FFF2-40B4-BE49-F238E27FC236}">
-                <a16:creationId xmlns:a16="http://schemas.microsoft.com/office/drawing/2014/main" id="{A43926C5-E216-73FA-9205-18157163D5E5}"/>
+                <a16:creationId xmlns:a16="http://schemas.microsoft.com/office/drawing/2014/main" id="{9607DA81-464B-CE89-D42D-EA46F5287F0B}"/>
               </a:ext>
             </a:extLst>
           </p:cNvPr>
@@ -12744,7 +12744,7 @@
     </p:spTree>
     <p:extLst>
       <p:ext uri="{BB962C8B-B14F-4D97-AF65-F5344CB8AC3E}">
-        <p14:creationId xmlns:p14="http://schemas.microsoft.com/office/powerpoint/2010/main" val="1096100116"/>
+        <p14:creationId xmlns:p14="http://schemas.microsoft.com/office/powerpoint/2010/main" val="1985034565"/>
       </p:ext>
     </p:extLst>
   </p:cSld>
@@ -12784,7 +12784,7 @@
           <p:cNvPr id="2" name="TextBox 1">
             <a:extLst>
               <a:ext uri="{FF2B5EF4-FFF2-40B4-BE49-F238E27FC236}">
-                <a16:creationId xmlns:a16="http://schemas.microsoft.com/office/drawing/2014/main" id="{2215D8FB-4FC5-79A4-8AF8-9266B7DD779E}"/>
+                <a16:creationId xmlns:a16="http://schemas.microsoft.com/office/drawing/2014/main" id="{EF1D8F43-87DC-549D-3B65-CDF16386EF23}"/>
               </a:ext>
             </a:extLst>
           </p:cNvPr>
@@ -12824,7 +12824,7 @@
           <p:cNvPr id="3" name="Rectangle: Rounded Corners 2">
             <a:extLst>
               <a:ext uri="{FF2B5EF4-FFF2-40B4-BE49-F238E27FC236}">
-                <a16:creationId xmlns:a16="http://schemas.microsoft.com/office/drawing/2014/main" id="{922924D2-911F-EB6A-E249-5CF3B40D7A64}"/>
+                <a16:creationId xmlns:a16="http://schemas.microsoft.com/office/drawing/2014/main" id="{32FB3538-AD64-C350-0759-A69C896DA867}"/>
               </a:ext>
             </a:extLst>
           </p:cNvPr>
@@ -12894,7 +12894,7 @@
           <p:cNvPr id="4" name="TextBox 3">
             <a:extLst>
               <a:ext uri="{FF2B5EF4-FFF2-40B4-BE49-F238E27FC236}">
-                <a16:creationId xmlns:a16="http://schemas.microsoft.com/office/drawing/2014/main" id="{3636D581-C299-C772-E766-521D3BAA0A12}"/>
+                <a16:creationId xmlns:a16="http://schemas.microsoft.com/office/drawing/2014/main" id="{D41D97C3-47C6-367E-693C-B86F962D2DB9}"/>
               </a:ext>
             </a:extLst>
           </p:cNvPr>
@@ -12934,7 +12934,7 @@
           <p:cNvPr id="5" name="TextBox 4">
             <a:extLst>
               <a:ext uri="{FF2B5EF4-FFF2-40B4-BE49-F238E27FC236}">
-                <a16:creationId xmlns:a16="http://schemas.microsoft.com/office/drawing/2014/main" id="{A22E8864-EC4E-003D-3A3F-B1ED7A871CCA}"/>
+                <a16:creationId xmlns:a16="http://schemas.microsoft.com/office/drawing/2014/main" id="{342CB875-C75B-833D-60F5-746FE9633D1F}"/>
               </a:ext>
             </a:extLst>
           </p:cNvPr>
@@ -12980,7 +12980,7 @@
           <p:cNvPr id="6" name="TextBox 5">
             <a:extLst>
               <a:ext uri="{FF2B5EF4-FFF2-40B4-BE49-F238E27FC236}">
-                <a16:creationId xmlns:a16="http://schemas.microsoft.com/office/drawing/2014/main" id="{EE078C07-ADD8-C7BE-A35A-C2F55B676A0D}"/>
+                <a16:creationId xmlns:a16="http://schemas.microsoft.com/office/drawing/2014/main" id="{7D289F0D-0D7D-FD1F-9A20-C358D3F8AD19}"/>
               </a:ext>
             </a:extLst>
           </p:cNvPr>
@@ -13026,7 +13026,7 @@
           <p:cNvPr id="7" name="TextBox 6">
             <a:extLst>
               <a:ext uri="{FF2B5EF4-FFF2-40B4-BE49-F238E27FC236}">
-                <a16:creationId xmlns:a16="http://schemas.microsoft.com/office/drawing/2014/main" id="{A3FD2984-9EDA-2F78-67F9-D967B1312DA6}"/>
+                <a16:creationId xmlns:a16="http://schemas.microsoft.com/office/drawing/2014/main" id="{4EA4C6ED-329D-09F5-1984-FDB9388A6E6F}"/>
               </a:ext>
             </a:extLst>
           </p:cNvPr>
@@ -13066,7 +13066,7 @@
           <p:cNvPr id="8" name="Rectangle: Rounded Corners 7">
             <a:extLst>
               <a:ext uri="{FF2B5EF4-FFF2-40B4-BE49-F238E27FC236}">
-                <a16:creationId xmlns:a16="http://schemas.microsoft.com/office/drawing/2014/main" id="{4D3FFCB4-E28B-CF68-3B50-3B1D2CC1235B}"/>
+                <a16:creationId xmlns:a16="http://schemas.microsoft.com/office/drawing/2014/main" id="{9736067D-448E-24AD-DDD2-C509865CA1DA}"/>
               </a:ext>
             </a:extLst>
           </p:cNvPr>
@@ -13136,7 +13136,7 @@
           <p:cNvPr id="9" name="TextBox 8">
             <a:extLst>
               <a:ext uri="{FF2B5EF4-FFF2-40B4-BE49-F238E27FC236}">
-                <a16:creationId xmlns:a16="http://schemas.microsoft.com/office/drawing/2014/main" id="{078E2BD9-6EF0-CBF7-117D-839D1B40EF54}"/>
+                <a16:creationId xmlns:a16="http://schemas.microsoft.com/office/drawing/2014/main" id="{373C18F7-9444-D2EF-5381-0447C8F2907B}"/>
               </a:ext>
             </a:extLst>
           </p:cNvPr>
@@ -13176,7 +13176,7 @@
           <p:cNvPr id="10" name="TextBox 9">
             <a:extLst>
               <a:ext uri="{FF2B5EF4-FFF2-40B4-BE49-F238E27FC236}">
-                <a16:creationId xmlns:a16="http://schemas.microsoft.com/office/drawing/2014/main" id="{8B1F01B8-0139-3E17-A839-BE7185AE0313}"/>
+                <a16:creationId xmlns:a16="http://schemas.microsoft.com/office/drawing/2014/main" id="{B11443B7-95BE-E48C-5B20-3478A466C8E9}"/>
               </a:ext>
             </a:extLst>
           </p:cNvPr>
@@ -13216,7 +13216,7 @@
           <p:cNvPr id="11" name="TextBox 10">
             <a:extLst>
               <a:ext uri="{FF2B5EF4-FFF2-40B4-BE49-F238E27FC236}">
-                <a16:creationId xmlns:a16="http://schemas.microsoft.com/office/drawing/2014/main" id="{36D02A21-E8C1-030E-9C60-3EE44EDD60F9}"/>
+                <a16:creationId xmlns:a16="http://schemas.microsoft.com/office/drawing/2014/main" id="{F635CA4F-5E56-8E1A-2EEA-753620FCF643}"/>
               </a:ext>
             </a:extLst>
           </p:cNvPr>
@@ -13262,7 +13262,7 @@
           <p:cNvPr id="12" name="TextBox 11">
             <a:extLst>
               <a:ext uri="{FF2B5EF4-FFF2-40B4-BE49-F238E27FC236}">
-                <a16:creationId xmlns:a16="http://schemas.microsoft.com/office/drawing/2014/main" id="{4018ED41-6555-38F9-B2BE-5DF2DE1FFCE8}"/>
+                <a16:creationId xmlns:a16="http://schemas.microsoft.com/office/drawing/2014/main" id="{9411C3BE-DDF6-402E-1DFC-373A74B3F824}"/>
               </a:ext>
             </a:extLst>
           </p:cNvPr>
@@ -13308,7 +13308,7 @@
           <p:cNvPr id="13" name="Rectangle: Rounded Corners 12">
             <a:extLst>
               <a:ext uri="{FF2B5EF4-FFF2-40B4-BE49-F238E27FC236}">
-                <a16:creationId xmlns:a16="http://schemas.microsoft.com/office/drawing/2014/main" id="{8405C866-8DE6-C6A6-BA53-25718BA9D0FC}"/>
+                <a16:creationId xmlns:a16="http://schemas.microsoft.com/office/drawing/2014/main" id="{538BD363-876F-D258-7415-BAFE5CF3A702}"/>
               </a:ext>
             </a:extLst>
           </p:cNvPr>
@@ -13378,7 +13378,7 @@
           <p:cNvPr id="14" name="TextBox 13">
             <a:extLst>
               <a:ext uri="{FF2B5EF4-FFF2-40B4-BE49-F238E27FC236}">
-                <a16:creationId xmlns:a16="http://schemas.microsoft.com/office/drawing/2014/main" id="{23E6547F-B4E3-8378-1AC7-1A1D2D9A7FCC}"/>
+                <a16:creationId xmlns:a16="http://schemas.microsoft.com/office/drawing/2014/main" id="{542C2084-1309-48F8-1874-681002C65F78}"/>
               </a:ext>
             </a:extLst>
           </p:cNvPr>
@@ -13418,7 +13418,7 @@
           <p:cNvPr id="15" name="TextBox 14">
             <a:extLst>
               <a:ext uri="{FF2B5EF4-FFF2-40B4-BE49-F238E27FC236}">
-                <a16:creationId xmlns:a16="http://schemas.microsoft.com/office/drawing/2014/main" id="{7BDADDE0-69BE-CCDB-F9D7-037DE7A51E8B}"/>
+                <a16:creationId xmlns:a16="http://schemas.microsoft.com/office/drawing/2014/main" id="{403D7485-08DA-CD38-EA92-A09F5FE6CD67}"/>
               </a:ext>
             </a:extLst>
           </p:cNvPr>
@@ -13458,7 +13458,7 @@
           <p:cNvPr id="16" name="TextBox 15">
             <a:extLst>
               <a:ext uri="{FF2B5EF4-FFF2-40B4-BE49-F238E27FC236}">
-                <a16:creationId xmlns:a16="http://schemas.microsoft.com/office/drawing/2014/main" id="{94E087FA-55FB-9482-C268-E25731A65853}"/>
+                <a16:creationId xmlns:a16="http://schemas.microsoft.com/office/drawing/2014/main" id="{352A4152-330F-DE72-A56F-4B500C835A2B}"/>
               </a:ext>
             </a:extLst>
           </p:cNvPr>
@@ -13504,7 +13504,7 @@
           <p:cNvPr id="17" name="TextBox 16">
             <a:extLst>
               <a:ext uri="{FF2B5EF4-FFF2-40B4-BE49-F238E27FC236}">
-                <a16:creationId xmlns:a16="http://schemas.microsoft.com/office/drawing/2014/main" id="{88F847B2-80D9-1895-36C4-16A94E112BBD}"/>
+                <a16:creationId xmlns:a16="http://schemas.microsoft.com/office/drawing/2014/main" id="{90356292-A4AB-9634-53B1-3195E894C643}"/>
               </a:ext>
             </a:extLst>
           </p:cNvPr>
@@ -13550,7 +13550,7 @@
           <p:cNvPr id="18" name="Rectangle: Rounded Corners 17">
             <a:extLst>
               <a:ext uri="{FF2B5EF4-FFF2-40B4-BE49-F238E27FC236}">
-                <a16:creationId xmlns:a16="http://schemas.microsoft.com/office/drawing/2014/main" id="{0FF75F7B-478B-DFA8-4D84-A4B97A1E2979}"/>
+                <a16:creationId xmlns:a16="http://schemas.microsoft.com/office/drawing/2014/main" id="{7C069907-ABAE-C977-4622-526B84776F6E}"/>
               </a:ext>
             </a:extLst>
           </p:cNvPr>
@@ -13620,7 +13620,7 @@
           <p:cNvPr id="19" name="TextBox 18">
             <a:extLst>
               <a:ext uri="{FF2B5EF4-FFF2-40B4-BE49-F238E27FC236}">
-                <a16:creationId xmlns:a16="http://schemas.microsoft.com/office/drawing/2014/main" id="{43A65154-8F43-7E3B-6315-F82E094273BE}"/>
+                <a16:creationId xmlns:a16="http://schemas.microsoft.com/office/drawing/2014/main" id="{5B50112A-C9C8-D719-4310-4064AB291E41}"/>
               </a:ext>
             </a:extLst>
           </p:cNvPr>
@@ -13660,7 +13660,7 @@
           <p:cNvPr id="20" name="TextBox 19">
             <a:extLst>
               <a:ext uri="{FF2B5EF4-FFF2-40B4-BE49-F238E27FC236}">
-                <a16:creationId xmlns:a16="http://schemas.microsoft.com/office/drawing/2014/main" id="{6F331406-94B1-1FEB-7F0D-1FEDC4A4552A}"/>
+                <a16:creationId xmlns:a16="http://schemas.microsoft.com/office/drawing/2014/main" id="{F11EBB4B-6B4D-9E86-C377-5E70399AE9D0}"/>
               </a:ext>
             </a:extLst>
           </p:cNvPr>
@@ -13706,7 +13706,7 @@
           <p:cNvPr id="21" name="TextBox 20">
             <a:extLst>
               <a:ext uri="{FF2B5EF4-FFF2-40B4-BE49-F238E27FC236}">
-                <a16:creationId xmlns:a16="http://schemas.microsoft.com/office/drawing/2014/main" id="{9276F98F-0D3A-20A3-C21F-17D35D0877D1}"/>
+                <a16:creationId xmlns:a16="http://schemas.microsoft.com/office/drawing/2014/main" id="{A54194DA-01A4-8119-82AD-8314FFB3D7CD}"/>
               </a:ext>
             </a:extLst>
           </p:cNvPr>
@@ -13752,7 +13752,7 @@
           <p:cNvPr id="22" name="TextBox 21">
             <a:extLst>
               <a:ext uri="{FF2B5EF4-FFF2-40B4-BE49-F238E27FC236}">
-                <a16:creationId xmlns:a16="http://schemas.microsoft.com/office/drawing/2014/main" id="{3D1FAACC-518B-2C2A-13EB-44FD11D3A119}"/>
+                <a16:creationId xmlns:a16="http://schemas.microsoft.com/office/drawing/2014/main" id="{14BF804D-26C0-B9A6-94CD-B2FE1E2D3EB8}"/>
               </a:ext>
             </a:extLst>
           </p:cNvPr>
@@ -13798,7 +13798,7 @@
           <p:cNvPr id="23" name="Rectangle: Rounded Corners 22">
             <a:extLst>
               <a:ext uri="{FF2B5EF4-FFF2-40B4-BE49-F238E27FC236}">
-                <a16:creationId xmlns:a16="http://schemas.microsoft.com/office/drawing/2014/main" id="{32E6B85A-62FD-14DA-8FF7-5AD2FD692974}"/>
+                <a16:creationId xmlns:a16="http://schemas.microsoft.com/office/drawing/2014/main" id="{75AFD87A-4F7A-96D5-C90C-FA08CBFE7ED9}"/>
               </a:ext>
             </a:extLst>
           </p:cNvPr>
@@ -13868,7 +13868,7 @@
           <p:cNvPr id="24" name="TextBox 23">
             <a:extLst>
               <a:ext uri="{FF2B5EF4-FFF2-40B4-BE49-F238E27FC236}">
-                <a16:creationId xmlns:a16="http://schemas.microsoft.com/office/drawing/2014/main" id="{770D6B43-8641-0350-33D5-F03BF770BF29}"/>
+                <a16:creationId xmlns:a16="http://schemas.microsoft.com/office/drawing/2014/main" id="{BC3038AE-860A-3EAF-3B7E-B7CC83B1A1BD}"/>
               </a:ext>
             </a:extLst>
           </p:cNvPr>
@@ -13908,7 +13908,7 @@
           <p:cNvPr id="25" name="TextBox 24">
             <a:extLst>
               <a:ext uri="{FF2B5EF4-FFF2-40B4-BE49-F238E27FC236}">
-                <a16:creationId xmlns:a16="http://schemas.microsoft.com/office/drawing/2014/main" id="{35B55DB9-56DE-4D59-DDB6-F8B0DCDAEF2E}"/>
+                <a16:creationId xmlns:a16="http://schemas.microsoft.com/office/drawing/2014/main" id="{BE6E6EAC-EA6F-863D-D339-40A71E9AFDF8}"/>
               </a:ext>
             </a:extLst>
           </p:cNvPr>
@@ -13948,7 +13948,7 @@
           <p:cNvPr id="26" name="TextBox 25">
             <a:extLst>
               <a:ext uri="{FF2B5EF4-FFF2-40B4-BE49-F238E27FC236}">
-                <a16:creationId xmlns:a16="http://schemas.microsoft.com/office/drawing/2014/main" id="{AECFED03-939A-32EF-ACDD-250ABB03323F}"/>
+                <a16:creationId xmlns:a16="http://schemas.microsoft.com/office/drawing/2014/main" id="{2407F7FF-7700-EA52-CAC9-158568F4C65B}"/>
               </a:ext>
             </a:extLst>
           </p:cNvPr>
@@ -13994,7 +13994,7 @@
           <p:cNvPr id="27" name="TextBox 26">
             <a:extLst>
               <a:ext uri="{FF2B5EF4-FFF2-40B4-BE49-F238E27FC236}">
-                <a16:creationId xmlns:a16="http://schemas.microsoft.com/office/drawing/2014/main" id="{B23D9BAD-CBEA-BE2D-54D4-5ADE5CDA8218}"/>
+                <a16:creationId xmlns:a16="http://schemas.microsoft.com/office/drawing/2014/main" id="{EDC895A9-83D6-5E30-DDE2-8A4600112198}"/>
               </a:ext>
             </a:extLst>
           </p:cNvPr>
@@ -14034,7 +14034,7 @@
           <p:cNvPr id="28" name="Rectangle: Rounded Corners 27">
             <a:extLst>
               <a:ext uri="{FF2B5EF4-FFF2-40B4-BE49-F238E27FC236}">
-                <a16:creationId xmlns:a16="http://schemas.microsoft.com/office/drawing/2014/main" id="{2A21B658-6296-E416-4B87-878BD5DC1FF5}"/>
+                <a16:creationId xmlns:a16="http://schemas.microsoft.com/office/drawing/2014/main" id="{CC6A9C95-F9B5-F6A2-18AA-370E0A3DE24B}"/>
               </a:ext>
             </a:extLst>
           </p:cNvPr>
@@ -14104,7 +14104,7 @@
           <p:cNvPr id="29" name="TextBox 28">
             <a:extLst>
               <a:ext uri="{FF2B5EF4-FFF2-40B4-BE49-F238E27FC236}">
-                <a16:creationId xmlns:a16="http://schemas.microsoft.com/office/drawing/2014/main" id="{EE835CCF-6FEB-BECC-5AF2-5C1BFC0428A3}"/>
+                <a16:creationId xmlns:a16="http://schemas.microsoft.com/office/drawing/2014/main" id="{DC46202A-4A48-AAC9-FC7C-C630A50957F1}"/>
               </a:ext>
             </a:extLst>
           </p:cNvPr>
@@ -14144,7 +14144,7 @@
           <p:cNvPr id="30" name="TextBox 29">
             <a:extLst>
               <a:ext uri="{FF2B5EF4-FFF2-40B4-BE49-F238E27FC236}">
-                <a16:creationId xmlns:a16="http://schemas.microsoft.com/office/drawing/2014/main" id="{C9306359-1249-CCBC-E34A-9D22C8D52071}"/>
+                <a16:creationId xmlns:a16="http://schemas.microsoft.com/office/drawing/2014/main" id="{CEB65153-CC8D-0217-88E2-9A9295A4B24E}"/>
               </a:ext>
             </a:extLst>
           </p:cNvPr>
@@ -14184,7 +14184,7 @@
           <p:cNvPr id="31" name="TextBox 30">
             <a:extLst>
               <a:ext uri="{FF2B5EF4-FFF2-40B4-BE49-F238E27FC236}">
-                <a16:creationId xmlns:a16="http://schemas.microsoft.com/office/drawing/2014/main" id="{252CF02B-F414-9C96-984F-B634EB7A9032}"/>
+                <a16:creationId xmlns:a16="http://schemas.microsoft.com/office/drawing/2014/main" id="{3A70C102-89EF-4947-CF4C-2516A6051199}"/>
               </a:ext>
             </a:extLst>
           </p:cNvPr>
@@ -14230,7 +14230,7 @@
           <p:cNvPr id="32" name="TextBox 31">
             <a:extLst>
               <a:ext uri="{FF2B5EF4-FFF2-40B4-BE49-F238E27FC236}">
-                <a16:creationId xmlns:a16="http://schemas.microsoft.com/office/drawing/2014/main" id="{CBB72F92-E491-CF06-208D-4BEF25F270A3}"/>
+                <a16:creationId xmlns:a16="http://schemas.microsoft.com/office/drawing/2014/main" id="{BB084E75-10E1-BE49-F509-0955828D11B0}"/>
               </a:ext>
             </a:extLst>
           </p:cNvPr>
@@ -14270,7 +14270,7 @@
           <p:cNvPr id="33" name="TextBox 32">
             <a:extLst>
               <a:ext uri="{FF2B5EF4-FFF2-40B4-BE49-F238E27FC236}">
-                <a16:creationId xmlns:a16="http://schemas.microsoft.com/office/drawing/2014/main" id="{E0DABB91-E933-93FE-EC40-AABF79FBFF1D}"/>
+                <a16:creationId xmlns:a16="http://schemas.microsoft.com/office/drawing/2014/main" id="{78AB0043-B56E-0BE5-ACDC-572C0FED1DD0}"/>
               </a:ext>
             </a:extLst>
           </p:cNvPr>
@@ -14316,7 +14316,7 @@
           <p:cNvPr id="34" name="TextBox 33">
             <a:extLst>
               <a:ext uri="{FF2B5EF4-FFF2-40B4-BE49-F238E27FC236}">
-                <a16:creationId xmlns:a16="http://schemas.microsoft.com/office/drawing/2014/main" id="{4AB8C656-07A7-F687-D365-21B3AA4E9D86}"/>
+                <a16:creationId xmlns:a16="http://schemas.microsoft.com/office/drawing/2014/main" id="{3C2826B6-4707-D072-90A1-F8C48DD5FCCE}"/>
               </a:ext>
             </a:extLst>
           </p:cNvPr>
@@ -14355,7 +14355,7 @@
     </p:spTree>
     <p:extLst>
       <p:ext uri="{BB962C8B-B14F-4D97-AF65-F5344CB8AC3E}">
-        <p14:creationId xmlns:p14="http://schemas.microsoft.com/office/powerpoint/2010/main" val="2604361020"/>
+        <p14:creationId xmlns:p14="http://schemas.microsoft.com/office/powerpoint/2010/main" val="2641347059"/>
       </p:ext>
     </p:extLst>
   </p:cSld>
@@ -14395,7 +14395,7 @@
           <p:cNvPr id="2" name="TextBox 1">
             <a:extLst>
               <a:ext uri="{FF2B5EF4-FFF2-40B4-BE49-F238E27FC236}">
-                <a16:creationId xmlns:a16="http://schemas.microsoft.com/office/drawing/2014/main" id="{223152FD-D028-1BAE-93C0-586F7E4B1C5B}"/>
+                <a16:creationId xmlns:a16="http://schemas.microsoft.com/office/drawing/2014/main" id="{4588C018-0C79-ADA9-5AC0-F9727316FF42}"/>
               </a:ext>
             </a:extLst>
           </p:cNvPr>
@@ -14435,7 +14435,7 @@
           <p:cNvPr id="3" name="Rectangle: Rounded Corners 2">
             <a:extLst>
               <a:ext uri="{FF2B5EF4-FFF2-40B4-BE49-F238E27FC236}">
-                <a16:creationId xmlns:a16="http://schemas.microsoft.com/office/drawing/2014/main" id="{968DBBEA-B4E0-CD73-ACB2-D874C5DFE476}"/>
+                <a16:creationId xmlns:a16="http://schemas.microsoft.com/office/drawing/2014/main" id="{E2D593A4-88CF-D32C-38AE-DF8A54244F97}"/>
               </a:ext>
             </a:extLst>
           </p:cNvPr>
@@ -14505,7 +14505,7 @@
           <p:cNvPr id="4" name="Oval 3">
             <a:extLst>
               <a:ext uri="{FF2B5EF4-FFF2-40B4-BE49-F238E27FC236}">
-                <a16:creationId xmlns:a16="http://schemas.microsoft.com/office/drawing/2014/main" id="{ACEDFD82-1CBC-ED25-899B-B46293A7EF32}"/>
+                <a16:creationId xmlns:a16="http://schemas.microsoft.com/office/drawing/2014/main" id="{E39F1FAF-8398-3DF0-0497-7ED14718C022}"/>
               </a:ext>
             </a:extLst>
           </p:cNvPr>
@@ -14581,7 +14581,7 @@
           <p:cNvPr id="5" name="TextBox 4">
             <a:extLst>
               <a:ext uri="{FF2B5EF4-FFF2-40B4-BE49-F238E27FC236}">
-                <a16:creationId xmlns:a16="http://schemas.microsoft.com/office/drawing/2014/main" id="{F0D92B7F-3970-6984-C36F-BB06B255D880}"/>
+                <a16:creationId xmlns:a16="http://schemas.microsoft.com/office/drawing/2014/main" id="{57994923-9551-6136-8BFB-63B23B77A893}"/>
               </a:ext>
             </a:extLst>
           </p:cNvPr>
@@ -14621,7 +14621,7 @@
           <p:cNvPr id="6" name="TextBox 5">
             <a:extLst>
               <a:ext uri="{FF2B5EF4-FFF2-40B4-BE49-F238E27FC236}">
-                <a16:creationId xmlns:a16="http://schemas.microsoft.com/office/drawing/2014/main" id="{5539A2F6-D773-0239-EF49-81B675DE9D61}"/>
+                <a16:creationId xmlns:a16="http://schemas.microsoft.com/office/drawing/2014/main" id="{20332981-42DF-9A04-D26E-8AE8BAE8B0C5}"/>
               </a:ext>
             </a:extLst>
           </p:cNvPr>
@@ -14667,7 +14667,7 @@
           <p:cNvPr id="7" name="TextBox 6">
             <a:extLst>
               <a:ext uri="{FF2B5EF4-FFF2-40B4-BE49-F238E27FC236}">
-                <a16:creationId xmlns:a16="http://schemas.microsoft.com/office/drawing/2014/main" id="{99AC2CE3-0A10-7198-C9FB-235EFE183948}"/>
+                <a16:creationId xmlns:a16="http://schemas.microsoft.com/office/drawing/2014/main" id="{BA8CDE76-F43B-0A85-736A-F47A5CAE7645}"/>
               </a:ext>
             </a:extLst>
           </p:cNvPr>
@@ -14707,7 +14707,7 @@
           <p:cNvPr id="8" name="Rectangle: Rounded Corners 7">
             <a:extLst>
               <a:ext uri="{FF2B5EF4-FFF2-40B4-BE49-F238E27FC236}">
-                <a16:creationId xmlns:a16="http://schemas.microsoft.com/office/drawing/2014/main" id="{2765C21C-68E6-FCC7-0CA6-D7CB5CE8105D}"/>
+                <a16:creationId xmlns:a16="http://schemas.microsoft.com/office/drawing/2014/main" id="{2265AB28-EBA5-50AA-6D78-7FF434ABB3B4}"/>
               </a:ext>
             </a:extLst>
           </p:cNvPr>
@@ -14777,7 +14777,7 @@
           <p:cNvPr id="9" name="Oval 8">
             <a:extLst>
               <a:ext uri="{FF2B5EF4-FFF2-40B4-BE49-F238E27FC236}">
-                <a16:creationId xmlns:a16="http://schemas.microsoft.com/office/drawing/2014/main" id="{E4CF711A-68E3-0016-97DE-7AEFE458328D}"/>
+                <a16:creationId xmlns:a16="http://schemas.microsoft.com/office/drawing/2014/main" id="{3191B9E7-AAED-012C-0516-136F64E62B7A}"/>
               </a:ext>
             </a:extLst>
           </p:cNvPr>
@@ -14853,7 +14853,7 @@
           <p:cNvPr id="10" name="TextBox 9">
             <a:extLst>
               <a:ext uri="{FF2B5EF4-FFF2-40B4-BE49-F238E27FC236}">
-                <a16:creationId xmlns:a16="http://schemas.microsoft.com/office/drawing/2014/main" id="{FB0A64DC-1C54-59F5-A10D-610642D35D05}"/>
+                <a16:creationId xmlns:a16="http://schemas.microsoft.com/office/drawing/2014/main" id="{9BF1DE7A-F7EF-4B72-BD7D-5EF7891FB6B4}"/>
               </a:ext>
             </a:extLst>
           </p:cNvPr>
@@ -14893,7 +14893,7 @@
           <p:cNvPr id="11" name="TextBox 10">
             <a:extLst>
               <a:ext uri="{FF2B5EF4-FFF2-40B4-BE49-F238E27FC236}">
-                <a16:creationId xmlns:a16="http://schemas.microsoft.com/office/drawing/2014/main" id="{6EDA531A-F23C-1B21-A7A2-0D92143B6B78}"/>
+                <a16:creationId xmlns:a16="http://schemas.microsoft.com/office/drawing/2014/main" id="{E8EE0050-4C6D-A72B-DA9E-EB579BDDFDF8}"/>
               </a:ext>
             </a:extLst>
           </p:cNvPr>
@@ -14939,7 +14939,7 @@
           <p:cNvPr id="12" name="TextBox 11">
             <a:extLst>
               <a:ext uri="{FF2B5EF4-FFF2-40B4-BE49-F238E27FC236}">
-                <a16:creationId xmlns:a16="http://schemas.microsoft.com/office/drawing/2014/main" id="{B82EBE60-5E89-FF3E-5EF9-02249BFEC41F}"/>
+                <a16:creationId xmlns:a16="http://schemas.microsoft.com/office/drawing/2014/main" id="{F018A56D-48B3-EF33-D62B-A08B505342B4}"/>
               </a:ext>
             </a:extLst>
           </p:cNvPr>
@@ -14985,7 +14985,7 @@
           <p:cNvPr id="13" name="Rectangle: Rounded Corners 12">
             <a:extLst>
               <a:ext uri="{FF2B5EF4-FFF2-40B4-BE49-F238E27FC236}">
-                <a16:creationId xmlns:a16="http://schemas.microsoft.com/office/drawing/2014/main" id="{88583E5F-58C1-45DE-9C34-BC98262D7AE9}"/>
+                <a16:creationId xmlns:a16="http://schemas.microsoft.com/office/drawing/2014/main" id="{830720AB-E6F9-66BB-E612-FCAE1A716141}"/>
               </a:ext>
             </a:extLst>
           </p:cNvPr>
@@ -15055,7 +15055,7 @@
           <p:cNvPr id="14" name="Oval 13">
             <a:extLst>
               <a:ext uri="{FF2B5EF4-FFF2-40B4-BE49-F238E27FC236}">
-                <a16:creationId xmlns:a16="http://schemas.microsoft.com/office/drawing/2014/main" id="{DED16510-5403-F480-B403-53DBDD64B0D8}"/>
+                <a16:creationId xmlns:a16="http://schemas.microsoft.com/office/drawing/2014/main" id="{CDF294BE-0834-E085-50B4-7B8E4FC1D080}"/>
               </a:ext>
             </a:extLst>
           </p:cNvPr>
@@ -15131,7 +15131,7 @@
           <p:cNvPr id="15" name="TextBox 14">
             <a:extLst>
               <a:ext uri="{FF2B5EF4-FFF2-40B4-BE49-F238E27FC236}">
-                <a16:creationId xmlns:a16="http://schemas.microsoft.com/office/drawing/2014/main" id="{B6B8B4E7-FF1B-41AC-9226-861827A2C90E}"/>
+                <a16:creationId xmlns:a16="http://schemas.microsoft.com/office/drawing/2014/main" id="{4BD32EFD-F9E0-46F4-8A24-1309A3AD4ACD}"/>
               </a:ext>
             </a:extLst>
           </p:cNvPr>
@@ -15171,7 +15171,7 @@
           <p:cNvPr id="16" name="TextBox 15">
             <a:extLst>
               <a:ext uri="{FF2B5EF4-FFF2-40B4-BE49-F238E27FC236}">
-                <a16:creationId xmlns:a16="http://schemas.microsoft.com/office/drawing/2014/main" id="{40B1B1B5-C7D2-B4A9-2991-644432A9D0E7}"/>
+                <a16:creationId xmlns:a16="http://schemas.microsoft.com/office/drawing/2014/main" id="{C2EABB69-7A35-0C64-E254-06304757CD97}"/>
               </a:ext>
             </a:extLst>
           </p:cNvPr>
@@ -15217,7 +15217,7 @@
           <p:cNvPr id="17" name="TextBox 16">
             <a:extLst>
               <a:ext uri="{FF2B5EF4-FFF2-40B4-BE49-F238E27FC236}">
-                <a16:creationId xmlns:a16="http://schemas.microsoft.com/office/drawing/2014/main" id="{6ED1EBD3-76F2-7FAA-6D1A-5BA133773670}"/>
+                <a16:creationId xmlns:a16="http://schemas.microsoft.com/office/drawing/2014/main" id="{14D85C16-1982-B22E-71AF-ECB5EB1EF4CE}"/>
               </a:ext>
             </a:extLst>
           </p:cNvPr>
@@ -15263,7 +15263,7 @@
           <p:cNvPr id="18" name="Rectangle: Rounded Corners 17">
             <a:extLst>
               <a:ext uri="{FF2B5EF4-FFF2-40B4-BE49-F238E27FC236}">
-                <a16:creationId xmlns:a16="http://schemas.microsoft.com/office/drawing/2014/main" id="{89823252-77D9-75D2-3F64-C5BF0A4E0DFA}"/>
+                <a16:creationId xmlns:a16="http://schemas.microsoft.com/office/drawing/2014/main" id="{EC19F799-A4F5-4812-CA64-E6CC2C37C94A}"/>
               </a:ext>
             </a:extLst>
           </p:cNvPr>
@@ -15333,7 +15333,7 @@
           <p:cNvPr id="19" name="Oval 18">
             <a:extLst>
               <a:ext uri="{FF2B5EF4-FFF2-40B4-BE49-F238E27FC236}">
-                <a16:creationId xmlns:a16="http://schemas.microsoft.com/office/drawing/2014/main" id="{7C652BB9-A84D-98E0-FB99-7E081FE85361}"/>
+                <a16:creationId xmlns:a16="http://schemas.microsoft.com/office/drawing/2014/main" id="{76338D07-DB88-ADDE-B0AF-91F9175834CD}"/>
               </a:ext>
             </a:extLst>
           </p:cNvPr>
@@ -15409,7 +15409,7 @@
           <p:cNvPr id="20" name="TextBox 19">
             <a:extLst>
               <a:ext uri="{FF2B5EF4-FFF2-40B4-BE49-F238E27FC236}">
-                <a16:creationId xmlns:a16="http://schemas.microsoft.com/office/drawing/2014/main" id="{8B9F2F0E-FFAC-00F9-7562-5CDE7040EBCC}"/>
+                <a16:creationId xmlns:a16="http://schemas.microsoft.com/office/drawing/2014/main" id="{1F15B40A-A606-35C9-B530-A830537522F0}"/>
               </a:ext>
             </a:extLst>
           </p:cNvPr>
@@ -15449,7 +15449,7 @@
           <p:cNvPr id="21" name="TextBox 20">
             <a:extLst>
               <a:ext uri="{FF2B5EF4-FFF2-40B4-BE49-F238E27FC236}">
-                <a16:creationId xmlns:a16="http://schemas.microsoft.com/office/drawing/2014/main" id="{1062F79C-3D6A-F2FD-4141-512256F0B729}"/>
+                <a16:creationId xmlns:a16="http://schemas.microsoft.com/office/drawing/2014/main" id="{0B3F3023-871C-0F96-0C80-47D3214AA78F}"/>
               </a:ext>
             </a:extLst>
           </p:cNvPr>
@@ -15495,7 +15495,7 @@
           <p:cNvPr id="22" name="TextBox 21">
             <a:extLst>
               <a:ext uri="{FF2B5EF4-FFF2-40B4-BE49-F238E27FC236}">
-                <a16:creationId xmlns:a16="http://schemas.microsoft.com/office/drawing/2014/main" id="{02738BE1-F009-3882-7F9F-0F1ED589F2C0}"/>
+                <a16:creationId xmlns:a16="http://schemas.microsoft.com/office/drawing/2014/main" id="{EAEDBB06-A8D2-9886-CED3-8E85BAB2E3B6}"/>
               </a:ext>
             </a:extLst>
           </p:cNvPr>
@@ -15541,7 +15541,7 @@
           <p:cNvPr id="23" name="TextBox 22">
             <a:extLst>
               <a:ext uri="{FF2B5EF4-FFF2-40B4-BE49-F238E27FC236}">
-                <a16:creationId xmlns:a16="http://schemas.microsoft.com/office/drawing/2014/main" id="{A97E9189-FF9E-BBFA-50AD-EB65F8E76D01}"/>
+                <a16:creationId xmlns:a16="http://schemas.microsoft.com/office/drawing/2014/main" id="{CA57CFFC-B16E-777E-0D16-514925906BCC}"/>
               </a:ext>
             </a:extLst>
           </p:cNvPr>
@@ -15587,7 +15587,7 @@
           <p:cNvPr id="24" name="TextBox 23">
             <a:extLst>
               <a:ext uri="{FF2B5EF4-FFF2-40B4-BE49-F238E27FC236}">
-                <a16:creationId xmlns:a16="http://schemas.microsoft.com/office/drawing/2014/main" id="{B43D726A-E20B-E97F-F1BD-BDE4FF860BA3}"/>
+                <a16:creationId xmlns:a16="http://schemas.microsoft.com/office/drawing/2014/main" id="{B289A5BB-86F9-AD22-EC81-576D17585630}"/>
               </a:ext>
             </a:extLst>
           </p:cNvPr>
@@ -15633,7 +15633,7 @@
           <p:cNvPr id="25" name="TextBox 24">
             <a:extLst>
               <a:ext uri="{FF2B5EF4-FFF2-40B4-BE49-F238E27FC236}">
-                <a16:creationId xmlns:a16="http://schemas.microsoft.com/office/drawing/2014/main" id="{1BDF7295-A26E-DA68-06B7-F391DF6BFFA4}"/>
+                <a16:creationId xmlns:a16="http://schemas.microsoft.com/office/drawing/2014/main" id="{238C9130-C3E3-9730-1448-2D8D2FA1065D}"/>
               </a:ext>
             </a:extLst>
           </p:cNvPr>
@@ -15672,7 +15672,7 @@
     </p:spTree>
     <p:extLst>
       <p:ext uri="{BB962C8B-B14F-4D97-AF65-F5344CB8AC3E}">
-        <p14:creationId xmlns:p14="http://schemas.microsoft.com/office/powerpoint/2010/main" val="2362548426"/>
+        <p14:creationId xmlns:p14="http://schemas.microsoft.com/office/powerpoint/2010/main" val="932829381"/>
       </p:ext>
     </p:extLst>
   </p:cSld>
@@ -15712,7 +15712,7 @@
           <p:cNvPr id="2" name="TextBox 1">
             <a:extLst>
               <a:ext uri="{FF2B5EF4-FFF2-40B4-BE49-F238E27FC236}">
-                <a16:creationId xmlns:a16="http://schemas.microsoft.com/office/drawing/2014/main" id="{61A6D906-8BA8-35E0-7708-9B8CF01A9450}"/>
+                <a16:creationId xmlns:a16="http://schemas.microsoft.com/office/drawing/2014/main" id="{0CAB9158-5CA1-6F73-9FC6-3A0D664AB7C5}"/>
               </a:ext>
             </a:extLst>
           </p:cNvPr>
@@ -15752,7 +15752,7 @@
           <p:cNvPr id="3" name="Rectangle: Rounded Corners 2">
             <a:extLst>
               <a:ext uri="{FF2B5EF4-FFF2-40B4-BE49-F238E27FC236}">
-                <a16:creationId xmlns:a16="http://schemas.microsoft.com/office/drawing/2014/main" id="{AD5EA9E5-6EC5-CA85-B81C-FA58C0845F11}"/>
+                <a16:creationId xmlns:a16="http://schemas.microsoft.com/office/drawing/2014/main" id="{B14184A7-C4B5-CE18-2681-BE7E2F86288D}"/>
               </a:ext>
             </a:extLst>
           </p:cNvPr>
@@ -15830,7 +15830,7 @@
           <p:cNvPr id="4" name="TextBox 3">
             <a:extLst>
               <a:ext uri="{FF2B5EF4-FFF2-40B4-BE49-F238E27FC236}">
-                <a16:creationId xmlns:a16="http://schemas.microsoft.com/office/drawing/2014/main" id="{EE7BA10E-6DB6-C0D2-34E9-88A84DB48A2A}"/>
+                <a16:creationId xmlns:a16="http://schemas.microsoft.com/office/drawing/2014/main" id="{B467DF4C-EAE0-432C-F3FA-6EC5623AC82E}"/>
               </a:ext>
             </a:extLst>
           </p:cNvPr>
@@ -15876,7 +15876,7 @@
           <p:cNvPr id="5" name="TextBox 4">
             <a:extLst>
               <a:ext uri="{FF2B5EF4-FFF2-40B4-BE49-F238E27FC236}">
-                <a16:creationId xmlns:a16="http://schemas.microsoft.com/office/drawing/2014/main" id="{016086E2-ADB1-884C-AB79-0883FDFF4314}"/>
+                <a16:creationId xmlns:a16="http://schemas.microsoft.com/office/drawing/2014/main" id="{DDABDFB9-8D4E-91DE-9EFF-1685B2AE4084}"/>
               </a:ext>
             </a:extLst>
           </p:cNvPr>
@@ -15917,7 +15917,7 @@
           <p:cNvPr id="6" name="Rectangle: Rounded Corners 5">
             <a:extLst>
               <a:ext uri="{FF2B5EF4-FFF2-40B4-BE49-F238E27FC236}">
-                <a16:creationId xmlns:a16="http://schemas.microsoft.com/office/drawing/2014/main" id="{6E965ED9-78B9-4625-43FF-C511A365CE84}"/>
+                <a16:creationId xmlns:a16="http://schemas.microsoft.com/office/drawing/2014/main" id="{654E278F-E9B4-9989-253B-391D499E0B85}"/>
               </a:ext>
             </a:extLst>
           </p:cNvPr>
@@ -15995,7 +15995,7 @@
           <p:cNvPr id="7" name="TextBox 6">
             <a:extLst>
               <a:ext uri="{FF2B5EF4-FFF2-40B4-BE49-F238E27FC236}">
-                <a16:creationId xmlns:a16="http://schemas.microsoft.com/office/drawing/2014/main" id="{000E5600-3538-C683-B976-57DA0425EFC1}"/>
+                <a16:creationId xmlns:a16="http://schemas.microsoft.com/office/drawing/2014/main" id="{41472E6C-3315-2BC6-C5A3-2898CAA51CC7}"/>
               </a:ext>
             </a:extLst>
           </p:cNvPr>
@@ -16041,7 +16041,7 @@
           <p:cNvPr id="8" name="TextBox 7">
             <a:extLst>
               <a:ext uri="{FF2B5EF4-FFF2-40B4-BE49-F238E27FC236}">
-                <a16:creationId xmlns:a16="http://schemas.microsoft.com/office/drawing/2014/main" id="{9A67AE4D-31E1-D7B2-B006-4AEE7417D629}"/>
+                <a16:creationId xmlns:a16="http://schemas.microsoft.com/office/drawing/2014/main" id="{23C26A25-005B-D7ED-29DC-A1F7076D4B81}"/>
               </a:ext>
             </a:extLst>
           </p:cNvPr>
@@ -16082,7 +16082,7 @@
           <p:cNvPr id="9" name="Rectangle: Rounded Corners 8">
             <a:extLst>
               <a:ext uri="{FF2B5EF4-FFF2-40B4-BE49-F238E27FC236}">
-                <a16:creationId xmlns:a16="http://schemas.microsoft.com/office/drawing/2014/main" id="{5ECB1034-4ED2-108B-0A88-A992FC7F08ED}"/>
+                <a16:creationId xmlns:a16="http://schemas.microsoft.com/office/drawing/2014/main" id="{7667077B-C47E-9236-AFDB-B47D94509828}"/>
               </a:ext>
             </a:extLst>
           </p:cNvPr>
@@ -16160,7 +16160,7 @@
           <p:cNvPr id="10" name="TextBox 9">
             <a:extLst>
               <a:ext uri="{FF2B5EF4-FFF2-40B4-BE49-F238E27FC236}">
-                <a16:creationId xmlns:a16="http://schemas.microsoft.com/office/drawing/2014/main" id="{3414C6CA-1BCB-AA98-2458-6F9DA1AAB5B5}"/>
+                <a16:creationId xmlns:a16="http://schemas.microsoft.com/office/drawing/2014/main" id="{118AD5AD-6BB2-4283-F65E-B2597F8620C7}"/>
               </a:ext>
             </a:extLst>
           </p:cNvPr>
@@ -16200,7 +16200,7 @@
           <p:cNvPr id="11" name="TextBox 10">
             <a:extLst>
               <a:ext uri="{FF2B5EF4-FFF2-40B4-BE49-F238E27FC236}">
-                <a16:creationId xmlns:a16="http://schemas.microsoft.com/office/drawing/2014/main" id="{F4433ACD-1FEC-0CFA-771B-67CDF854B844}"/>
+                <a16:creationId xmlns:a16="http://schemas.microsoft.com/office/drawing/2014/main" id="{EA54AEF0-48C9-40F7-AFB0-ACFC790D0F78}"/>
               </a:ext>
             </a:extLst>
           </p:cNvPr>
@@ -16241,7 +16241,7 @@
           <p:cNvPr id="12" name="Rectangle: Rounded Corners 11">
             <a:extLst>
               <a:ext uri="{FF2B5EF4-FFF2-40B4-BE49-F238E27FC236}">
-                <a16:creationId xmlns:a16="http://schemas.microsoft.com/office/drawing/2014/main" id="{E46647ED-1367-56C4-3927-B260FE3278AC}"/>
+                <a16:creationId xmlns:a16="http://schemas.microsoft.com/office/drawing/2014/main" id="{DDEA9CAF-4E0A-EC5A-6E78-BECA4049CAEE}"/>
               </a:ext>
             </a:extLst>
           </p:cNvPr>
@@ -16319,7 +16319,7 @@
           <p:cNvPr id="13" name="TextBox 12">
             <a:extLst>
               <a:ext uri="{FF2B5EF4-FFF2-40B4-BE49-F238E27FC236}">
-                <a16:creationId xmlns:a16="http://schemas.microsoft.com/office/drawing/2014/main" id="{25CA594F-2BA1-5444-4096-1DE55875BB71}"/>
+                <a16:creationId xmlns:a16="http://schemas.microsoft.com/office/drawing/2014/main" id="{A91D7139-EC00-B8D6-4076-5B2283918600}"/>
               </a:ext>
             </a:extLst>
           </p:cNvPr>
@@ -16359,7 +16359,7 @@
           <p:cNvPr id="14" name="TextBox 13">
             <a:extLst>
               <a:ext uri="{FF2B5EF4-FFF2-40B4-BE49-F238E27FC236}">
-                <a16:creationId xmlns:a16="http://schemas.microsoft.com/office/drawing/2014/main" id="{1EF703DF-A415-097E-4964-DFA795EA9629}"/>
+                <a16:creationId xmlns:a16="http://schemas.microsoft.com/office/drawing/2014/main" id="{F2D5088B-FDE7-2A86-EF52-40F6DB51EB45}"/>
               </a:ext>
             </a:extLst>
           </p:cNvPr>
@@ -16400,7 +16400,7 @@
           <p:cNvPr id="15" name="Rectangle: Rounded Corners 14">
             <a:extLst>
               <a:ext uri="{FF2B5EF4-FFF2-40B4-BE49-F238E27FC236}">
-                <a16:creationId xmlns:a16="http://schemas.microsoft.com/office/drawing/2014/main" id="{86549A75-F30D-72A7-1A06-7D80E301DA6B}"/>
+                <a16:creationId xmlns:a16="http://schemas.microsoft.com/office/drawing/2014/main" id="{CDF5FDFB-7B75-28F8-4DDE-0B640C79F904}"/>
               </a:ext>
             </a:extLst>
           </p:cNvPr>
@@ -16478,7 +16478,7 @@
           <p:cNvPr id="16" name="TextBox 15">
             <a:extLst>
               <a:ext uri="{FF2B5EF4-FFF2-40B4-BE49-F238E27FC236}">
-                <a16:creationId xmlns:a16="http://schemas.microsoft.com/office/drawing/2014/main" id="{DF7A9E48-30F2-D8E6-C0E8-6C6008EE6379}"/>
+                <a16:creationId xmlns:a16="http://schemas.microsoft.com/office/drawing/2014/main" id="{287D824A-F28A-644C-ED8E-F37D67BA0568}"/>
               </a:ext>
             </a:extLst>
           </p:cNvPr>
@@ -16518,7 +16518,7 @@
           <p:cNvPr id="17" name="TextBox 16">
             <a:extLst>
               <a:ext uri="{FF2B5EF4-FFF2-40B4-BE49-F238E27FC236}">
-                <a16:creationId xmlns:a16="http://schemas.microsoft.com/office/drawing/2014/main" id="{D71C8C57-701A-6EF4-79AA-6830384E67D1}"/>
+                <a16:creationId xmlns:a16="http://schemas.microsoft.com/office/drawing/2014/main" id="{7EF9C727-9137-4FAD-1EC0-C2A8E6E0A6A0}"/>
               </a:ext>
             </a:extLst>
           </p:cNvPr>
@@ -16559,7 +16559,7 @@
           <p:cNvPr id="18" name="Rectangle: Rounded Corners 17">
             <a:extLst>
               <a:ext uri="{FF2B5EF4-FFF2-40B4-BE49-F238E27FC236}">
-                <a16:creationId xmlns:a16="http://schemas.microsoft.com/office/drawing/2014/main" id="{C621FE8D-A6B8-CDE1-3A53-7163456F22E4}"/>
+                <a16:creationId xmlns:a16="http://schemas.microsoft.com/office/drawing/2014/main" id="{A6D5CB5E-747C-DF97-AEF3-6A51B765A3A7}"/>
               </a:ext>
             </a:extLst>
           </p:cNvPr>
@@ -16637,7 +16637,7 @@
           <p:cNvPr id="19" name="TextBox 18">
             <a:extLst>
               <a:ext uri="{FF2B5EF4-FFF2-40B4-BE49-F238E27FC236}">
-                <a16:creationId xmlns:a16="http://schemas.microsoft.com/office/drawing/2014/main" id="{5A95C472-8C13-BF42-8509-60D200D84656}"/>
+                <a16:creationId xmlns:a16="http://schemas.microsoft.com/office/drawing/2014/main" id="{70A899B0-9756-03F8-1FD9-728FE84373CE}"/>
               </a:ext>
             </a:extLst>
           </p:cNvPr>
@@ -16677,7 +16677,7 @@
           <p:cNvPr id="20" name="TextBox 19">
             <a:extLst>
               <a:ext uri="{FF2B5EF4-FFF2-40B4-BE49-F238E27FC236}">
-                <a16:creationId xmlns:a16="http://schemas.microsoft.com/office/drawing/2014/main" id="{92EB2C09-E64E-E935-9ED1-DF03995E088F}"/>
+                <a16:creationId xmlns:a16="http://schemas.microsoft.com/office/drawing/2014/main" id="{3FC978A1-EC70-5FF3-6C46-8A149C8B4791}"/>
               </a:ext>
             </a:extLst>
           </p:cNvPr>
@@ -16718,7 +16718,7 @@
           <p:cNvPr id="21" name="Rectangle: Rounded Corners 20">
             <a:extLst>
               <a:ext uri="{FF2B5EF4-FFF2-40B4-BE49-F238E27FC236}">
-                <a16:creationId xmlns:a16="http://schemas.microsoft.com/office/drawing/2014/main" id="{39679D03-6195-332B-006E-687204B6ED1D}"/>
+                <a16:creationId xmlns:a16="http://schemas.microsoft.com/office/drawing/2014/main" id="{6BA37BA4-A7B9-FDAF-2770-DAE3303DC377}"/>
               </a:ext>
             </a:extLst>
           </p:cNvPr>
@@ -16796,7 +16796,7 @@
           <p:cNvPr id="22" name="TextBox 21">
             <a:extLst>
               <a:ext uri="{FF2B5EF4-FFF2-40B4-BE49-F238E27FC236}">
-                <a16:creationId xmlns:a16="http://schemas.microsoft.com/office/drawing/2014/main" id="{B7F6C314-F0E8-8CCD-9064-FEDC4C6DFA9F}"/>
+                <a16:creationId xmlns:a16="http://schemas.microsoft.com/office/drawing/2014/main" id="{2B87149B-2D3B-7E04-19AC-0FD671A9B6E2}"/>
               </a:ext>
             </a:extLst>
           </p:cNvPr>
@@ -16836,7 +16836,7 @@
           <p:cNvPr id="23" name="TextBox 22">
             <a:extLst>
               <a:ext uri="{FF2B5EF4-FFF2-40B4-BE49-F238E27FC236}">
-                <a16:creationId xmlns:a16="http://schemas.microsoft.com/office/drawing/2014/main" id="{1B103557-CF90-AE2B-7A4B-DC32FE2D419E}"/>
+                <a16:creationId xmlns:a16="http://schemas.microsoft.com/office/drawing/2014/main" id="{C79CEE0B-8802-6A82-065B-77447B5A0003}"/>
               </a:ext>
             </a:extLst>
           </p:cNvPr>
@@ -16877,7 +16877,7 @@
           <p:cNvPr id="24" name="TextBox 23">
             <a:extLst>
               <a:ext uri="{FF2B5EF4-FFF2-40B4-BE49-F238E27FC236}">
-                <a16:creationId xmlns:a16="http://schemas.microsoft.com/office/drawing/2014/main" id="{4827780D-F918-F127-0683-080FC56EF120}"/>
+                <a16:creationId xmlns:a16="http://schemas.microsoft.com/office/drawing/2014/main" id="{04319009-711E-6B31-1B9C-9D1C32CA1248}"/>
               </a:ext>
             </a:extLst>
           </p:cNvPr>
@@ -16923,7 +16923,7 @@
           <p:cNvPr id="25" name="TextBox 24">
             <a:extLst>
               <a:ext uri="{FF2B5EF4-FFF2-40B4-BE49-F238E27FC236}">
-                <a16:creationId xmlns:a16="http://schemas.microsoft.com/office/drawing/2014/main" id="{6C1117BB-47E1-B7D1-2000-BD2AB850C1FA}"/>
+                <a16:creationId xmlns:a16="http://schemas.microsoft.com/office/drawing/2014/main" id="{F48FBE6C-C8C5-97DB-8BCE-28A977D6FADC}"/>
               </a:ext>
             </a:extLst>
           </p:cNvPr>
@@ -16962,7 +16962,7 @@
     </p:spTree>
     <p:extLst>
       <p:ext uri="{BB962C8B-B14F-4D97-AF65-F5344CB8AC3E}">
-        <p14:creationId xmlns:p14="http://schemas.microsoft.com/office/powerpoint/2010/main" val="1107396353"/>
+        <p14:creationId xmlns:p14="http://schemas.microsoft.com/office/powerpoint/2010/main" val="3426666685"/>
       </p:ext>
     </p:extLst>
   </p:cSld>
@@ -17002,7 +17002,7 @@
           <p:cNvPr id="2" name="TextBox 1">
             <a:extLst>
               <a:ext uri="{FF2B5EF4-FFF2-40B4-BE49-F238E27FC236}">
-                <a16:creationId xmlns:a16="http://schemas.microsoft.com/office/drawing/2014/main" id="{400AF7E3-FE48-4B3F-DE3F-1E98156480CD}"/>
+                <a16:creationId xmlns:a16="http://schemas.microsoft.com/office/drawing/2014/main" id="{6471D3BE-9096-9C20-E033-32BB05539667}"/>
               </a:ext>
             </a:extLst>
           </p:cNvPr>
@@ -17042,7 +17042,7 @@
           <p:cNvPr id="3" name="TextBox 2">
             <a:extLst>
               <a:ext uri="{FF2B5EF4-FFF2-40B4-BE49-F238E27FC236}">
-                <a16:creationId xmlns:a16="http://schemas.microsoft.com/office/drawing/2014/main" id="{C59CEF67-AAD5-F709-9967-510638E26C4D}"/>
+                <a16:creationId xmlns:a16="http://schemas.microsoft.com/office/drawing/2014/main" id="{D891D65F-8D65-63DD-AFCE-A4F536FCF4C8}"/>
               </a:ext>
             </a:extLst>
           </p:cNvPr>
@@ -17082,7 +17082,7 @@
           <p:cNvPr id="4" name="Rectangle: Rounded Corners 3">
             <a:extLst>
               <a:ext uri="{FF2B5EF4-FFF2-40B4-BE49-F238E27FC236}">
-                <a16:creationId xmlns:a16="http://schemas.microsoft.com/office/drawing/2014/main" id="{B25B5939-AF9F-3412-3E93-2BAE3927960B}"/>
+                <a16:creationId xmlns:a16="http://schemas.microsoft.com/office/drawing/2014/main" id="{E2E80DA6-B6F9-6FDB-6F5C-F321F111F1BD}"/>
               </a:ext>
             </a:extLst>
           </p:cNvPr>
@@ -17152,7 +17152,7 @@
           <p:cNvPr id="5" name="TextBox 4">
             <a:extLst>
               <a:ext uri="{FF2B5EF4-FFF2-40B4-BE49-F238E27FC236}">
-                <a16:creationId xmlns:a16="http://schemas.microsoft.com/office/drawing/2014/main" id="{3C005EDC-0402-8B66-F9C9-A4BA19BE4196}"/>
+                <a16:creationId xmlns:a16="http://schemas.microsoft.com/office/drawing/2014/main" id="{7449A356-0F39-83BB-ACF4-F6DE0F1ABAEB}"/>
               </a:ext>
             </a:extLst>
           </p:cNvPr>
@@ -17198,7 +17198,7 @@
           <p:cNvPr id="6" name="TextBox 5">
             <a:extLst>
               <a:ext uri="{FF2B5EF4-FFF2-40B4-BE49-F238E27FC236}">
-                <a16:creationId xmlns:a16="http://schemas.microsoft.com/office/drawing/2014/main" id="{E15C8DDE-E9E6-8A7E-4850-5B1B7FA8BA8C}"/>
+                <a16:creationId xmlns:a16="http://schemas.microsoft.com/office/drawing/2014/main" id="{64BD909A-767D-6770-68C3-A393EDCEC66D}"/>
               </a:ext>
             </a:extLst>
           </p:cNvPr>
@@ -17238,7 +17238,7 @@
           <p:cNvPr id="7" name="Rectangle: Rounded Corners 6">
             <a:extLst>
               <a:ext uri="{FF2B5EF4-FFF2-40B4-BE49-F238E27FC236}">
-                <a16:creationId xmlns:a16="http://schemas.microsoft.com/office/drawing/2014/main" id="{A355168F-17AB-41E0-8239-7663D91A5E6F}"/>
+                <a16:creationId xmlns:a16="http://schemas.microsoft.com/office/drawing/2014/main" id="{2D7F5A97-22FC-466A-B7DA-25DEA5851EF1}"/>
               </a:ext>
             </a:extLst>
           </p:cNvPr>
@@ -17308,7 +17308,7 @@
           <p:cNvPr id="8" name="TextBox 7">
             <a:extLst>
               <a:ext uri="{FF2B5EF4-FFF2-40B4-BE49-F238E27FC236}">
-                <a16:creationId xmlns:a16="http://schemas.microsoft.com/office/drawing/2014/main" id="{8EE6E8F9-45CF-122E-3BFB-C69F118BC42D}"/>
+                <a16:creationId xmlns:a16="http://schemas.microsoft.com/office/drawing/2014/main" id="{59364EB8-BFB6-8C6B-03E8-B45A55F29244}"/>
               </a:ext>
             </a:extLst>
           </p:cNvPr>
@@ -17434,7 +17434,7 @@
           <p:cNvPr id="9" name="TextBox 8">
             <a:extLst>
               <a:ext uri="{FF2B5EF4-FFF2-40B4-BE49-F238E27FC236}">
-                <a16:creationId xmlns:a16="http://schemas.microsoft.com/office/drawing/2014/main" id="{FEFDCE97-C144-77A0-1822-0FED7C64C78F}"/>
+                <a16:creationId xmlns:a16="http://schemas.microsoft.com/office/drawing/2014/main" id="{8C41FD67-FDDD-1B31-5274-4DA8DBF35FD9}"/>
               </a:ext>
             </a:extLst>
           </p:cNvPr>
@@ -17480,7 +17480,7 @@
           <p:cNvPr id="10" name="TextBox 9">
             <a:extLst>
               <a:ext uri="{FF2B5EF4-FFF2-40B4-BE49-F238E27FC236}">
-                <a16:creationId xmlns:a16="http://schemas.microsoft.com/office/drawing/2014/main" id="{AFE49391-B30C-AA2A-4CB5-84409D174B67}"/>
+                <a16:creationId xmlns:a16="http://schemas.microsoft.com/office/drawing/2014/main" id="{35EEDE20-6D02-C702-251A-97725E7A8ECE}"/>
               </a:ext>
             </a:extLst>
           </p:cNvPr>
@@ -17519,7 +17519,7 @@
     </p:spTree>
     <p:extLst>
       <p:ext uri="{BB962C8B-B14F-4D97-AF65-F5344CB8AC3E}">
-        <p14:creationId xmlns:p14="http://schemas.microsoft.com/office/powerpoint/2010/main" val="2330559127"/>
+        <p14:creationId xmlns:p14="http://schemas.microsoft.com/office/powerpoint/2010/main" val="1967462964"/>
       </p:ext>
     </p:extLst>
   </p:cSld>
@@ -17559,7 +17559,7 @@
           <p:cNvPr id="2" name="TextBox 1">
             <a:extLst>
               <a:ext uri="{FF2B5EF4-FFF2-40B4-BE49-F238E27FC236}">
-                <a16:creationId xmlns:a16="http://schemas.microsoft.com/office/drawing/2014/main" id="{FDC89038-8D58-1C9D-7769-34F5632F49AC}"/>
+                <a16:creationId xmlns:a16="http://schemas.microsoft.com/office/drawing/2014/main" id="{08F53055-93E6-6F4B-F83F-3111C9B30B92}"/>
               </a:ext>
             </a:extLst>
           </p:cNvPr>
@@ -17599,7 +17599,7 @@
           <p:cNvPr id="3" name="TextBox 2">
             <a:extLst>
               <a:ext uri="{FF2B5EF4-FFF2-40B4-BE49-F238E27FC236}">
-                <a16:creationId xmlns:a16="http://schemas.microsoft.com/office/drawing/2014/main" id="{E5404883-16D5-EA04-FFDC-92822133D795}"/>
+                <a16:creationId xmlns:a16="http://schemas.microsoft.com/office/drawing/2014/main" id="{D12232FA-79A3-42A8-DCFA-63D023B4F82D}"/>
               </a:ext>
             </a:extLst>
           </p:cNvPr>
@@ -17639,7 +17639,7 @@
           <p:cNvPr id="4" name="TextBox 3">
             <a:extLst>
               <a:ext uri="{FF2B5EF4-FFF2-40B4-BE49-F238E27FC236}">
-                <a16:creationId xmlns:a16="http://schemas.microsoft.com/office/drawing/2014/main" id="{2F16F919-60D3-DA7A-5678-D7D4D7390353}"/>
+                <a16:creationId xmlns:a16="http://schemas.microsoft.com/office/drawing/2014/main" id="{49A9D09B-AD51-7E5F-E6F5-E1AE94E98AC1}"/>
               </a:ext>
             </a:extLst>
           </p:cNvPr>
@@ -17685,7 +17685,7 @@
           <p:cNvPr id="5" name="TextBox 4">
             <a:extLst>
               <a:ext uri="{FF2B5EF4-FFF2-40B4-BE49-F238E27FC236}">
-                <a16:creationId xmlns:a16="http://schemas.microsoft.com/office/drawing/2014/main" id="{31F155E1-7971-3C87-233E-4C4778499A27}"/>
+                <a16:creationId xmlns:a16="http://schemas.microsoft.com/office/drawing/2014/main" id="{81BBE043-4DF4-91DB-0C0B-DC19867B7535}"/>
               </a:ext>
             </a:extLst>
           </p:cNvPr>
@@ -17723,7 +17723,7 @@
     </p:spTree>
     <p:extLst>
       <p:ext uri="{BB962C8B-B14F-4D97-AF65-F5344CB8AC3E}">
-        <p14:creationId xmlns:p14="http://schemas.microsoft.com/office/powerpoint/2010/main" val="124221948"/>
+        <p14:creationId xmlns:p14="http://schemas.microsoft.com/office/powerpoint/2010/main" val="935546748"/>
       </p:ext>
     </p:extLst>
   </p:cSld>
@@ -17763,7 +17763,7 @@
           <p:cNvPr id="2" name="TextBox 1">
             <a:extLst>
               <a:ext uri="{FF2B5EF4-FFF2-40B4-BE49-F238E27FC236}">
-                <a16:creationId xmlns:a16="http://schemas.microsoft.com/office/drawing/2014/main" id="{577B71A3-196C-8535-032A-0CA9AAB7CB64}"/>
+                <a16:creationId xmlns:a16="http://schemas.microsoft.com/office/drawing/2014/main" id="{05891659-9BFD-C0DA-D540-4C498E486829}"/>
               </a:ext>
             </a:extLst>
           </p:cNvPr>
@@ -17809,7 +17809,7 @@
           <p:cNvPr id="3" name="Rectangle: Rounded Corners 2">
             <a:extLst>
               <a:ext uri="{FF2B5EF4-FFF2-40B4-BE49-F238E27FC236}">
-                <a16:creationId xmlns:a16="http://schemas.microsoft.com/office/drawing/2014/main" id="{72A94546-15AD-300E-152A-43C50D66F654}"/>
+                <a16:creationId xmlns:a16="http://schemas.microsoft.com/office/drawing/2014/main" id="{1ED1AB95-5CC2-C0F5-3705-B0A5A098243B}"/>
               </a:ext>
             </a:extLst>
           </p:cNvPr>
@@ -17879,7 +17879,7 @@
           <p:cNvPr id="4" name="TextBox 3">
             <a:extLst>
               <a:ext uri="{FF2B5EF4-FFF2-40B4-BE49-F238E27FC236}">
-                <a16:creationId xmlns:a16="http://schemas.microsoft.com/office/drawing/2014/main" id="{5FAC1582-3EBD-8349-76F1-9BC21A3855DE}"/>
+                <a16:creationId xmlns:a16="http://schemas.microsoft.com/office/drawing/2014/main" id="{90207654-A91D-12BD-505E-1AB2B49EFF36}"/>
               </a:ext>
             </a:extLst>
           </p:cNvPr>
@@ -17919,7 +17919,7 @@
           <p:cNvPr id="5" name="TextBox 4">
             <a:extLst>
               <a:ext uri="{FF2B5EF4-FFF2-40B4-BE49-F238E27FC236}">
-                <a16:creationId xmlns:a16="http://schemas.microsoft.com/office/drawing/2014/main" id="{A8155FE2-4348-C828-0C9E-A6D166A36C1C}"/>
+                <a16:creationId xmlns:a16="http://schemas.microsoft.com/office/drawing/2014/main" id="{3B34A5E3-AE4D-DFA9-532D-15AAC5D1F848}"/>
               </a:ext>
             </a:extLst>
           </p:cNvPr>
@@ -17965,7 +17965,7 @@
           <p:cNvPr id="6" name="TextBox 5">
             <a:extLst>
               <a:ext uri="{FF2B5EF4-FFF2-40B4-BE49-F238E27FC236}">
-                <a16:creationId xmlns:a16="http://schemas.microsoft.com/office/drawing/2014/main" id="{173D6B63-C7CC-6650-7A99-18369CE2AF79}"/>
+                <a16:creationId xmlns:a16="http://schemas.microsoft.com/office/drawing/2014/main" id="{89FCF746-8559-7F4E-A5A5-371BBA032157}"/>
               </a:ext>
             </a:extLst>
           </p:cNvPr>
@@ -18011,7 +18011,7 @@
           <p:cNvPr id="7" name="TextBox 6">
             <a:extLst>
               <a:ext uri="{FF2B5EF4-FFF2-40B4-BE49-F238E27FC236}">
-                <a16:creationId xmlns:a16="http://schemas.microsoft.com/office/drawing/2014/main" id="{649F07CA-8D31-D317-628F-7232D2E62864}"/>
+                <a16:creationId xmlns:a16="http://schemas.microsoft.com/office/drawing/2014/main" id="{5E085A28-3BA4-0EDD-5386-B5C58A238F6D}"/>
               </a:ext>
             </a:extLst>
           </p:cNvPr>
@@ -18057,7 +18057,7 @@
           <p:cNvPr id="8" name="Oval 7">
             <a:extLst>
               <a:ext uri="{FF2B5EF4-FFF2-40B4-BE49-F238E27FC236}">
-                <a16:creationId xmlns:a16="http://schemas.microsoft.com/office/drawing/2014/main" id="{B14580BB-AA98-1604-FC2F-F21FE4558C6E}"/>
+                <a16:creationId xmlns:a16="http://schemas.microsoft.com/office/drawing/2014/main" id="{F731AF8E-DBF2-B485-CDDC-79CD15DCC7D6}"/>
               </a:ext>
             </a:extLst>
           </p:cNvPr>
@@ -18133,7 +18133,7 @@
           <p:cNvPr id="9" name="TextBox 8">
             <a:extLst>
               <a:ext uri="{FF2B5EF4-FFF2-40B4-BE49-F238E27FC236}">
-                <a16:creationId xmlns:a16="http://schemas.microsoft.com/office/drawing/2014/main" id="{12051EC6-6279-2C13-034F-0C60E5D97EF3}"/>
+                <a16:creationId xmlns:a16="http://schemas.microsoft.com/office/drawing/2014/main" id="{5EF1C051-EF0F-EB17-A453-8CA38AC0CB5B}"/>
               </a:ext>
             </a:extLst>
           </p:cNvPr>
@@ -18173,7 +18173,7 @@
           <p:cNvPr id="10" name="Oval 9">
             <a:extLst>
               <a:ext uri="{FF2B5EF4-FFF2-40B4-BE49-F238E27FC236}">
-                <a16:creationId xmlns:a16="http://schemas.microsoft.com/office/drawing/2014/main" id="{34C1580C-A83D-C8EA-375A-7A8E21A9A56F}"/>
+                <a16:creationId xmlns:a16="http://schemas.microsoft.com/office/drawing/2014/main" id="{C9F4C8EC-9662-9466-9D28-922900FCAE79}"/>
               </a:ext>
             </a:extLst>
           </p:cNvPr>
@@ -18249,7 +18249,7 @@
           <p:cNvPr id="11" name="TextBox 10">
             <a:extLst>
               <a:ext uri="{FF2B5EF4-FFF2-40B4-BE49-F238E27FC236}">
-                <a16:creationId xmlns:a16="http://schemas.microsoft.com/office/drawing/2014/main" id="{01C9D0EA-70FE-8F07-0E0C-4EB163DC9986}"/>
+                <a16:creationId xmlns:a16="http://schemas.microsoft.com/office/drawing/2014/main" id="{97485B6E-66F9-6BD4-7A2A-1EA83476C2A1}"/>
               </a:ext>
             </a:extLst>
           </p:cNvPr>
@@ -18295,7 +18295,7 @@
           <p:cNvPr id="12" name="Oval 11">
             <a:extLst>
               <a:ext uri="{FF2B5EF4-FFF2-40B4-BE49-F238E27FC236}">
-                <a16:creationId xmlns:a16="http://schemas.microsoft.com/office/drawing/2014/main" id="{9EDE1600-771B-890E-53B8-32E3F0E8BE5F}"/>
+                <a16:creationId xmlns:a16="http://schemas.microsoft.com/office/drawing/2014/main" id="{3B53F686-9461-A92F-3CE1-76F819EFC93B}"/>
               </a:ext>
             </a:extLst>
           </p:cNvPr>
@@ -18371,7 +18371,7 @@
           <p:cNvPr id="13" name="TextBox 12">
             <a:extLst>
               <a:ext uri="{FF2B5EF4-FFF2-40B4-BE49-F238E27FC236}">
-                <a16:creationId xmlns:a16="http://schemas.microsoft.com/office/drawing/2014/main" id="{8A671AB8-E223-6051-74E7-EC5E26262B45}"/>
+                <a16:creationId xmlns:a16="http://schemas.microsoft.com/office/drawing/2014/main" id="{076F1276-7BCA-16E7-BC2A-CA7FAFA21F1A}"/>
               </a:ext>
             </a:extLst>
           </p:cNvPr>
@@ -18417,7 +18417,7 @@
           <p:cNvPr id="14" name="Rectangle: Rounded Corners 13">
             <a:extLst>
               <a:ext uri="{FF2B5EF4-FFF2-40B4-BE49-F238E27FC236}">
-                <a16:creationId xmlns:a16="http://schemas.microsoft.com/office/drawing/2014/main" id="{8105E034-4110-A3EF-8343-0491B39CAB08}"/>
+                <a16:creationId xmlns:a16="http://schemas.microsoft.com/office/drawing/2014/main" id="{A4495139-4703-61C1-6F92-153C13344020}"/>
               </a:ext>
             </a:extLst>
           </p:cNvPr>
@@ -18500,7 +18500,7 @@
           <p:cNvPr id="15" name="TextBox 14">
             <a:extLst>
               <a:ext uri="{FF2B5EF4-FFF2-40B4-BE49-F238E27FC236}">
-                <a16:creationId xmlns:a16="http://schemas.microsoft.com/office/drawing/2014/main" id="{67567923-95BB-651D-F34E-927E5D869545}"/>
+                <a16:creationId xmlns:a16="http://schemas.microsoft.com/office/drawing/2014/main" id="{35A24F55-83EB-CBCF-40D9-ADD78E9E7147}"/>
               </a:ext>
             </a:extLst>
           </p:cNvPr>
@@ -18546,7 +18546,7 @@
           <p:cNvPr id="16" name="TextBox 15">
             <a:extLst>
               <a:ext uri="{FF2B5EF4-FFF2-40B4-BE49-F238E27FC236}">
-                <a16:creationId xmlns:a16="http://schemas.microsoft.com/office/drawing/2014/main" id="{86C7C27D-D89E-387E-0B58-3E9099886265}"/>
+                <a16:creationId xmlns:a16="http://schemas.microsoft.com/office/drawing/2014/main" id="{4F3034C4-324E-0551-6674-32F57C49DC40}"/>
               </a:ext>
             </a:extLst>
           </p:cNvPr>
@@ -18585,7 +18585,7 @@
     </p:spTree>
     <p:extLst>
       <p:ext uri="{BB962C8B-B14F-4D97-AF65-F5344CB8AC3E}">
-        <p14:creationId xmlns:p14="http://schemas.microsoft.com/office/powerpoint/2010/main" val="240224852"/>
+        <p14:creationId xmlns:p14="http://schemas.microsoft.com/office/powerpoint/2010/main" val="2481960027"/>
       </p:ext>
     </p:extLst>
   </p:cSld>
@@ -18625,7 +18625,7 @@
           <p:cNvPr id="2" name="TextBox 1">
             <a:extLst>
               <a:ext uri="{FF2B5EF4-FFF2-40B4-BE49-F238E27FC236}">
-                <a16:creationId xmlns:a16="http://schemas.microsoft.com/office/drawing/2014/main" id="{EC9B7797-F958-D329-35C1-E937FFEBF23F}"/>
+                <a16:creationId xmlns:a16="http://schemas.microsoft.com/office/drawing/2014/main" id="{461A9E52-2AA4-D568-3C37-EBEA8CEC2254}"/>
               </a:ext>
             </a:extLst>
           </p:cNvPr>
@@ -18671,7 +18671,7 @@
           <p:cNvPr id="3" name="Rectangle 2">
             <a:extLst>
               <a:ext uri="{FF2B5EF4-FFF2-40B4-BE49-F238E27FC236}">
-                <a16:creationId xmlns:a16="http://schemas.microsoft.com/office/drawing/2014/main" id="{EE0A573E-8F3E-B7D7-4FCF-3C697807D8D2}"/>
+                <a16:creationId xmlns:a16="http://schemas.microsoft.com/office/drawing/2014/main" id="{8731EC83-03B2-0301-C7CA-7A39106EC43B}"/>
               </a:ext>
             </a:extLst>
           </p:cNvPr>
@@ -18746,7 +18746,7 @@
           <p:cNvPr id="4" name="Rectangle 3">
             <a:extLst>
               <a:ext uri="{FF2B5EF4-FFF2-40B4-BE49-F238E27FC236}">
-                <a16:creationId xmlns:a16="http://schemas.microsoft.com/office/drawing/2014/main" id="{7789EDD8-D420-9C56-F67B-A424FEE86E82}"/>
+                <a16:creationId xmlns:a16="http://schemas.microsoft.com/office/drawing/2014/main" id="{E52A1281-F2AE-D41E-BE14-9215189E687A}"/>
               </a:ext>
             </a:extLst>
           </p:cNvPr>
@@ -18821,7 +18821,7 @@
           <p:cNvPr id="5" name="Rectangle 4">
             <a:extLst>
               <a:ext uri="{FF2B5EF4-FFF2-40B4-BE49-F238E27FC236}">
-                <a16:creationId xmlns:a16="http://schemas.microsoft.com/office/drawing/2014/main" id="{F1BE66EF-F595-3D6F-AC3A-FE2430CE78D8}"/>
+                <a16:creationId xmlns:a16="http://schemas.microsoft.com/office/drawing/2014/main" id="{12D28CDA-80AC-0839-1EFA-C8EDBDAE8ADB}"/>
               </a:ext>
             </a:extLst>
           </p:cNvPr>
@@ -18896,7 +18896,7 @@
           <p:cNvPr id="6" name="Rectangle 5">
             <a:extLst>
               <a:ext uri="{FF2B5EF4-FFF2-40B4-BE49-F238E27FC236}">
-                <a16:creationId xmlns:a16="http://schemas.microsoft.com/office/drawing/2014/main" id="{B313D7A2-43C9-5369-77F1-17C453CAB251}"/>
+                <a16:creationId xmlns:a16="http://schemas.microsoft.com/office/drawing/2014/main" id="{5924CD8C-33DF-8769-5D35-CC7B9E3C2809}"/>
               </a:ext>
             </a:extLst>
           </p:cNvPr>
@@ -18971,7 +18971,7 @@
           <p:cNvPr id="7" name="Rectangle 6">
             <a:extLst>
               <a:ext uri="{FF2B5EF4-FFF2-40B4-BE49-F238E27FC236}">
-                <a16:creationId xmlns:a16="http://schemas.microsoft.com/office/drawing/2014/main" id="{26E0820F-4A21-6A64-000E-68CF68FF189F}"/>
+                <a16:creationId xmlns:a16="http://schemas.microsoft.com/office/drawing/2014/main" id="{08EE39BA-972E-292A-756C-8F4883F967A6}"/>
               </a:ext>
             </a:extLst>
           </p:cNvPr>
@@ -19046,7 +19046,7 @@
           <p:cNvPr id="8" name="Rectangle 7">
             <a:extLst>
               <a:ext uri="{FF2B5EF4-FFF2-40B4-BE49-F238E27FC236}">
-                <a16:creationId xmlns:a16="http://schemas.microsoft.com/office/drawing/2014/main" id="{B9703E96-E2DF-962D-AA06-55B8A172BD95}"/>
+                <a16:creationId xmlns:a16="http://schemas.microsoft.com/office/drawing/2014/main" id="{2FEA8B48-171B-4791-9335-126F5152B3DF}"/>
               </a:ext>
             </a:extLst>
           </p:cNvPr>
@@ -19121,7 +19121,7 @@
           <p:cNvPr id="9" name="Rectangle 8">
             <a:extLst>
               <a:ext uri="{FF2B5EF4-FFF2-40B4-BE49-F238E27FC236}">
-                <a16:creationId xmlns:a16="http://schemas.microsoft.com/office/drawing/2014/main" id="{8E9CA5A1-D667-7939-B4C8-2704D1AB1AC3}"/>
+                <a16:creationId xmlns:a16="http://schemas.microsoft.com/office/drawing/2014/main" id="{76D28E52-15CA-4B95-91A9-9D2503880B53}"/>
               </a:ext>
             </a:extLst>
           </p:cNvPr>
@@ -19196,7 +19196,7 @@
           <p:cNvPr id="10" name="Rectangle 9">
             <a:extLst>
               <a:ext uri="{FF2B5EF4-FFF2-40B4-BE49-F238E27FC236}">
-                <a16:creationId xmlns:a16="http://schemas.microsoft.com/office/drawing/2014/main" id="{00058159-753C-B38B-C7DC-AC80D4B60874}"/>
+                <a16:creationId xmlns:a16="http://schemas.microsoft.com/office/drawing/2014/main" id="{B8ADE2B1-6E3B-29F2-1CD0-29E6BE001F26}"/>
               </a:ext>
             </a:extLst>
           </p:cNvPr>
@@ -19277,7 +19277,7 @@
           <p:cNvPr id="11" name="Rectangle 10">
             <a:extLst>
               <a:ext uri="{FF2B5EF4-FFF2-40B4-BE49-F238E27FC236}">
-                <a16:creationId xmlns:a16="http://schemas.microsoft.com/office/drawing/2014/main" id="{6BB490C9-92DC-005C-97DC-CDE2291B0E56}"/>
+                <a16:creationId xmlns:a16="http://schemas.microsoft.com/office/drawing/2014/main" id="{F99422FE-F47B-C0F4-1537-BD7BF218FDE0}"/>
               </a:ext>
             </a:extLst>
           </p:cNvPr>
@@ -19358,7 +19358,7 @@
           <p:cNvPr id="12" name="Rectangle 11">
             <a:extLst>
               <a:ext uri="{FF2B5EF4-FFF2-40B4-BE49-F238E27FC236}">
-                <a16:creationId xmlns:a16="http://schemas.microsoft.com/office/drawing/2014/main" id="{E569AE55-5B42-7AE3-F808-6A8811EBF8F7}"/>
+                <a16:creationId xmlns:a16="http://schemas.microsoft.com/office/drawing/2014/main" id="{6812D41B-0BD3-5E4B-2D3B-5ABA070D8997}"/>
               </a:ext>
             </a:extLst>
           </p:cNvPr>
@@ -19433,7 +19433,7 @@
           <p:cNvPr id="13" name="Rectangle 12">
             <a:extLst>
               <a:ext uri="{FF2B5EF4-FFF2-40B4-BE49-F238E27FC236}">
-                <a16:creationId xmlns:a16="http://schemas.microsoft.com/office/drawing/2014/main" id="{421DB59A-AEF3-D4F9-E2AF-8FEA842452B3}"/>
+                <a16:creationId xmlns:a16="http://schemas.microsoft.com/office/drawing/2014/main" id="{426F004E-067E-39B7-B5DD-6245D27081BC}"/>
               </a:ext>
             </a:extLst>
           </p:cNvPr>
@@ -19508,7 +19508,7 @@
           <p:cNvPr id="14" name="Rectangle 13">
             <a:extLst>
               <a:ext uri="{FF2B5EF4-FFF2-40B4-BE49-F238E27FC236}">
-                <a16:creationId xmlns:a16="http://schemas.microsoft.com/office/drawing/2014/main" id="{6570B01A-B930-8737-C414-11A241A15959}"/>
+                <a16:creationId xmlns:a16="http://schemas.microsoft.com/office/drawing/2014/main" id="{585DBE03-C8E9-50DA-57B9-3F31F258CFAE}"/>
               </a:ext>
             </a:extLst>
           </p:cNvPr>
@@ -19589,7 +19589,7 @@
           <p:cNvPr id="15" name="Rectangle 14">
             <a:extLst>
               <a:ext uri="{FF2B5EF4-FFF2-40B4-BE49-F238E27FC236}">
-                <a16:creationId xmlns:a16="http://schemas.microsoft.com/office/drawing/2014/main" id="{B3A71A42-871A-EED6-C5C0-E888425EAFD8}"/>
+                <a16:creationId xmlns:a16="http://schemas.microsoft.com/office/drawing/2014/main" id="{1618E329-14C3-5D73-0C16-30373FF70914}"/>
               </a:ext>
             </a:extLst>
           </p:cNvPr>
@@ -19664,7 +19664,7 @@
           <p:cNvPr id="16" name="Rectangle 15">
             <a:extLst>
               <a:ext uri="{FF2B5EF4-FFF2-40B4-BE49-F238E27FC236}">
-                <a16:creationId xmlns:a16="http://schemas.microsoft.com/office/drawing/2014/main" id="{DC005D56-C578-13DB-24FC-447AA807D69F}"/>
+                <a16:creationId xmlns:a16="http://schemas.microsoft.com/office/drawing/2014/main" id="{1954760A-3C63-DEB0-9C32-E06C90FE69E2}"/>
               </a:ext>
             </a:extLst>
           </p:cNvPr>
@@ -19739,7 +19739,7 @@
           <p:cNvPr id="17" name="Rectangle 16">
             <a:extLst>
               <a:ext uri="{FF2B5EF4-FFF2-40B4-BE49-F238E27FC236}">
-                <a16:creationId xmlns:a16="http://schemas.microsoft.com/office/drawing/2014/main" id="{C9A5B9CF-8602-DCEA-4451-066BC328FA4A}"/>
+                <a16:creationId xmlns:a16="http://schemas.microsoft.com/office/drawing/2014/main" id="{3476A93D-C6FE-745E-0D11-7DDC729955AF}"/>
               </a:ext>
             </a:extLst>
           </p:cNvPr>
@@ -19814,7 +19814,7 @@
           <p:cNvPr id="18" name="Rectangle 17">
             <a:extLst>
               <a:ext uri="{FF2B5EF4-FFF2-40B4-BE49-F238E27FC236}">
-                <a16:creationId xmlns:a16="http://schemas.microsoft.com/office/drawing/2014/main" id="{4FAEE9E7-9E14-87FE-345B-402B6E3CC0E7}"/>
+                <a16:creationId xmlns:a16="http://schemas.microsoft.com/office/drawing/2014/main" id="{4C4E7D9E-D610-505E-BABF-D678DA90E763}"/>
               </a:ext>
             </a:extLst>
           </p:cNvPr>
@@ -19889,7 +19889,7 @@
           <p:cNvPr id="19" name="Rectangle 18">
             <a:extLst>
               <a:ext uri="{FF2B5EF4-FFF2-40B4-BE49-F238E27FC236}">
-                <a16:creationId xmlns:a16="http://schemas.microsoft.com/office/drawing/2014/main" id="{9AB48A81-1F49-7424-8351-1EA991AF6018}"/>
+                <a16:creationId xmlns:a16="http://schemas.microsoft.com/office/drawing/2014/main" id="{109B8179-42FC-CF79-6BAD-AE5191CA1D7D}"/>
               </a:ext>
             </a:extLst>
           </p:cNvPr>
@@ -19964,7 +19964,7 @@
           <p:cNvPr id="20" name="Rectangle 19">
             <a:extLst>
               <a:ext uri="{FF2B5EF4-FFF2-40B4-BE49-F238E27FC236}">
-                <a16:creationId xmlns:a16="http://schemas.microsoft.com/office/drawing/2014/main" id="{8B3F8BC8-AECF-197B-F28D-4B6F38ECDE0A}"/>
+                <a16:creationId xmlns:a16="http://schemas.microsoft.com/office/drawing/2014/main" id="{C6C7F1CB-9F80-250E-51B8-9F7B433B24D3}"/>
               </a:ext>
             </a:extLst>
           </p:cNvPr>
@@ -20039,7 +20039,7 @@
           <p:cNvPr id="21" name="Rectangle 20">
             <a:extLst>
               <a:ext uri="{FF2B5EF4-FFF2-40B4-BE49-F238E27FC236}">
-                <a16:creationId xmlns:a16="http://schemas.microsoft.com/office/drawing/2014/main" id="{2CFFD6FE-00F0-60E0-95E9-00792367D79A}"/>
+                <a16:creationId xmlns:a16="http://schemas.microsoft.com/office/drawing/2014/main" id="{131B4DAD-2E97-F56A-93FC-63F47FF7B539}"/>
               </a:ext>
             </a:extLst>
           </p:cNvPr>
@@ -20114,7 +20114,7 @@
           <p:cNvPr id="22" name="Rectangle 21">
             <a:extLst>
               <a:ext uri="{FF2B5EF4-FFF2-40B4-BE49-F238E27FC236}">
-                <a16:creationId xmlns:a16="http://schemas.microsoft.com/office/drawing/2014/main" id="{640CF11D-35A9-79CD-673B-0A4BDAA43FD1}"/>
+                <a16:creationId xmlns:a16="http://schemas.microsoft.com/office/drawing/2014/main" id="{8B316730-0ECA-8F6D-99F7-884221B98D66}"/>
               </a:ext>
             </a:extLst>
           </p:cNvPr>
@@ -20195,7 +20195,7 @@
           <p:cNvPr id="23" name="Rectangle 22">
             <a:extLst>
               <a:ext uri="{FF2B5EF4-FFF2-40B4-BE49-F238E27FC236}">
-                <a16:creationId xmlns:a16="http://schemas.microsoft.com/office/drawing/2014/main" id="{2FCDFC3D-62D9-194B-FD1D-7996CA63791C}"/>
+                <a16:creationId xmlns:a16="http://schemas.microsoft.com/office/drawing/2014/main" id="{AB788021-86F7-42E4-56C4-A23012C2C041}"/>
               </a:ext>
             </a:extLst>
           </p:cNvPr>
@@ -20276,7 +20276,7 @@
           <p:cNvPr id="24" name="TextBox 23">
             <a:extLst>
               <a:ext uri="{FF2B5EF4-FFF2-40B4-BE49-F238E27FC236}">
-                <a16:creationId xmlns:a16="http://schemas.microsoft.com/office/drawing/2014/main" id="{27725D5E-CD44-5BAE-81C5-C792CBF32B15}"/>
+                <a16:creationId xmlns:a16="http://schemas.microsoft.com/office/drawing/2014/main" id="{64BFBCD3-4BCC-863C-AFEF-081820674DCB}"/>
               </a:ext>
             </a:extLst>
           </p:cNvPr>
@@ -20322,7 +20322,7 @@
           <p:cNvPr id="25" name="TextBox 24">
             <a:extLst>
               <a:ext uri="{FF2B5EF4-FFF2-40B4-BE49-F238E27FC236}">
-                <a16:creationId xmlns:a16="http://schemas.microsoft.com/office/drawing/2014/main" id="{FDB91336-0615-D713-D692-1CA37F07FF71}"/>
+                <a16:creationId xmlns:a16="http://schemas.microsoft.com/office/drawing/2014/main" id="{611D0841-D5AC-3820-701C-E4894A565B5C}"/>
               </a:ext>
             </a:extLst>
           </p:cNvPr>
@@ -20368,7 +20368,7 @@
           <p:cNvPr id="26" name="TextBox 25">
             <a:extLst>
               <a:ext uri="{FF2B5EF4-FFF2-40B4-BE49-F238E27FC236}">
-                <a16:creationId xmlns:a16="http://schemas.microsoft.com/office/drawing/2014/main" id="{4B7FB8E9-E2B9-3D56-6B7C-8EDD2877ACDB}"/>
+                <a16:creationId xmlns:a16="http://schemas.microsoft.com/office/drawing/2014/main" id="{FCC3EB9D-5ED0-9D02-2330-39D0CBC3ADCD}"/>
               </a:ext>
             </a:extLst>
           </p:cNvPr>
@@ -20407,7 +20407,7 @@
     </p:spTree>
     <p:extLst>
       <p:ext uri="{BB962C8B-B14F-4D97-AF65-F5344CB8AC3E}">
-        <p14:creationId xmlns:p14="http://schemas.microsoft.com/office/powerpoint/2010/main" val="3727046248"/>
+        <p14:creationId xmlns:p14="http://schemas.microsoft.com/office/powerpoint/2010/main" val="3033984085"/>
       </p:ext>
     </p:extLst>
   </p:cSld>
@@ -20447,7 +20447,7 @@
           <p:cNvPr id="2" name="TextBox 1">
             <a:extLst>
               <a:ext uri="{FF2B5EF4-FFF2-40B4-BE49-F238E27FC236}">
-                <a16:creationId xmlns:a16="http://schemas.microsoft.com/office/drawing/2014/main" id="{B1C885F9-EFFC-601F-C7B8-20163A71FF62}"/>
+                <a16:creationId xmlns:a16="http://schemas.microsoft.com/office/drawing/2014/main" id="{7FA5581C-9A49-2B97-FB5C-1C8A5652B632}"/>
               </a:ext>
             </a:extLst>
           </p:cNvPr>
@@ -20493,7 +20493,7 @@
           <p:cNvPr id="3" name="TextBox 2">
             <a:extLst>
               <a:ext uri="{FF2B5EF4-FFF2-40B4-BE49-F238E27FC236}">
-                <a16:creationId xmlns:a16="http://schemas.microsoft.com/office/drawing/2014/main" id="{BC2FDFAE-EE7F-5E42-F02E-F2419DD36BA0}"/>
+                <a16:creationId xmlns:a16="http://schemas.microsoft.com/office/drawing/2014/main" id="{8E589C71-CADE-627E-A6DD-7E84256ED25B}"/>
               </a:ext>
             </a:extLst>
           </p:cNvPr>
@@ -20533,7 +20533,7 @@
           <p:cNvPr id="4" name="Rectangle: Rounded Corners 3">
             <a:extLst>
               <a:ext uri="{FF2B5EF4-FFF2-40B4-BE49-F238E27FC236}">
-                <a16:creationId xmlns:a16="http://schemas.microsoft.com/office/drawing/2014/main" id="{1E0132CC-0019-2B07-3F00-ED70AB605D3A}"/>
+                <a16:creationId xmlns:a16="http://schemas.microsoft.com/office/drawing/2014/main" id="{DE89F0F0-F669-0116-3A0F-5634AB56FAAD}"/>
               </a:ext>
             </a:extLst>
           </p:cNvPr>
@@ -20623,7 +20623,7 @@
           <p:cNvPr id="5" name="Straight Connector 4">
             <a:extLst>
               <a:ext uri="{FF2B5EF4-FFF2-40B4-BE49-F238E27FC236}">
-                <a16:creationId xmlns:a16="http://schemas.microsoft.com/office/drawing/2014/main" id="{43AA7DB5-7391-22D5-7E8D-04AA202B24C9}"/>
+                <a16:creationId xmlns:a16="http://schemas.microsoft.com/office/drawing/2014/main" id="{D14C8519-4AB8-D1A9-56EE-6B4C440D7D4A}"/>
               </a:ext>
             </a:extLst>
           </p:cNvPr>
@@ -20665,7 +20665,7 @@
           <p:cNvPr id="6" name="Rectangle: Rounded Corners 5">
             <a:extLst>
               <a:ext uri="{FF2B5EF4-FFF2-40B4-BE49-F238E27FC236}">
-                <a16:creationId xmlns:a16="http://schemas.microsoft.com/office/drawing/2014/main" id="{19B85FD6-E019-AB15-33C7-8F5536138156}"/>
+                <a16:creationId xmlns:a16="http://schemas.microsoft.com/office/drawing/2014/main" id="{7A9947FA-C5A8-B6CD-2965-A2D4DA55AB99}"/>
               </a:ext>
             </a:extLst>
           </p:cNvPr>
@@ -20755,7 +20755,7 @@
           <p:cNvPr id="7" name="Rectangle: Rounded Corners 6">
             <a:extLst>
               <a:ext uri="{FF2B5EF4-FFF2-40B4-BE49-F238E27FC236}">
-                <a16:creationId xmlns:a16="http://schemas.microsoft.com/office/drawing/2014/main" id="{E09C9391-6A02-BD1C-171F-2E0EAA0A886E}"/>
+                <a16:creationId xmlns:a16="http://schemas.microsoft.com/office/drawing/2014/main" id="{17C11520-A751-2D83-CCA3-355DE201D177}"/>
               </a:ext>
             </a:extLst>
           </p:cNvPr>
@@ -20833,7 +20833,7 @@
           <p:cNvPr id="8" name="TextBox 7">
             <a:extLst>
               <a:ext uri="{FF2B5EF4-FFF2-40B4-BE49-F238E27FC236}">
-                <a16:creationId xmlns:a16="http://schemas.microsoft.com/office/drawing/2014/main" id="{15478130-42D3-3101-C768-50E8DA0032F0}"/>
+                <a16:creationId xmlns:a16="http://schemas.microsoft.com/office/drawing/2014/main" id="{BE1A0A3A-0560-1E96-6EF2-9C5F072311DA}"/>
               </a:ext>
             </a:extLst>
           </p:cNvPr>
@@ -20873,7 +20873,7 @@
           <p:cNvPr id="9" name="Rectangle: Rounded Corners 8">
             <a:extLst>
               <a:ext uri="{FF2B5EF4-FFF2-40B4-BE49-F238E27FC236}">
-                <a16:creationId xmlns:a16="http://schemas.microsoft.com/office/drawing/2014/main" id="{75880728-4525-3644-9B46-68308561105A}"/>
+                <a16:creationId xmlns:a16="http://schemas.microsoft.com/office/drawing/2014/main" id="{1715CBDB-1406-57D1-E0C7-AB191F8C5C19}"/>
               </a:ext>
             </a:extLst>
           </p:cNvPr>
@@ -20963,7 +20963,7 @@
           <p:cNvPr id="10" name="Straight Connector 9">
             <a:extLst>
               <a:ext uri="{FF2B5EF4-FFF2-40B4-BE49-F238E27FC236}">
-                <a16:creationId xmlns:a16="http://schemas.microsoft.com/office/drawing/2014/main" id="{AA4F403A-1424-2CC6-69BF-2B6DFDB6125C}"/>
+                <a16:creationId xmlns:a16="http://schemas.microsoft.com/office/drawing/2014/main" id="{42131CA3-C4EF-B2F9-38A5-3B2C4AE8BB76}"/>
               </a:ext>
             </a:extLst>
           </p:cNvPr>
@@ -21005,7 +21005,7 @@
           <p:cNvPr id="11" name="Rectangle: Rounded Corners 10">
             <a:extLst>
               <a:ext uri="{FF2B5EF4-FFF2-40B4-BE49-F238E27FC236}">
-                <a16:creationId xmlns:a16="http://schemas.microsoft.com/office/drawing/2014/main" id="{71C19192-795F-5373-7E3C-A1847D07277D}"/>
+                <a16:creationId xmlns:a16="http://schemas.microsoft.com/office/drawing/2014/main" id="{AD6C8617-583E-4F2D-2B3D-DBF85AD84D55}"/>
               </a:ext>
             </a:extLst>
           </p:cNvPr>
@@ -21095,7 +21095,7 @@
           <p:cNvPr id="12" name="Rectangle: Rounded Corners 11">
             <a:extLst>
               <a:ext uri="{FF2B5EF4-FFF2-40B4-BE49-F238E27FC236}">
-                <a16:creationId xmlns:a16="http://schemas.microsoft.com/office/drawing/2014/main" id="{90882FE3-608D-C065-8570-93213C37DE3E}"/>
+                <a16:creationId xmlns:a16="http://schemas.microsoft.com/office/drawing/2014/main" id="{3092D265-D929-026F-1443-5D8A41825648}"/>
               </a:ext>
             </a:extLst>
           </p:cNvPr>
@@ -21173,7 +21173,7 @@
           <p:cNvPr id="13" name="Rectangle: Rounded Corners 12">
             <a:extLst>
               <a:ext uri="{FF2B5EF4-FFF2-40B4-BE49-F238E27FC236}">
-                <a16:creationId xmlns:a16="http://schemas.microsoft.com/office/drawing/2014/main" id="{AC68BA8A-AB1B-0D1B-BAA1-AF500759DA92}"/>
+                <a16:creationId xmlns:a16="http://schemas.microsoft.com/office/drawing/2014/main" id="{9003084A-DAC4-60A7-94EA-BCAE8A099C0C}"/>
               </a:ext>
             </a:extLst>
           </p:cNvPr>
@@ -21243,7 +21243,7 @@
           <p:cNvPr id="14" name="TextBox 13">
             <a:extLst>
               <a:ext uri="{FF2B5EF4-FFF2-40B4-BE49-F238E27FC236}">
-                <a16:creationId xmlns:a16="http://schemas.microsoft.com/office/drawing/2014/main" id="{D375B546-70EF-93D2-DEF3-F7BA4D3651A0}"/>
+                <a16:creationId xmlns:a16="http://schemas.microsoft.com/office/drawing/2014/main" id="{6B05F662-D7A0-452A-F24F-C81955891643}"/>
               </a:ext>
             </a:extLst>
           </p:cNvPr>
@@ -21283,7 +21283,7 @@
           <p:cNvPr id="15" name="TextBox 14">
             <a:extLst>
               <a:ext uri="{FF2B5EF4-FFF2-40B4-BE49-F238E27FC236}">
-                <a16:creationId xmlns:a16="http://schemas.microsoft.com/office/drawing/2014/main" id="{0EA39B59-D59C-63CD-F662-E64D78862773}"/>
+                <a16:creationId xmlns:a16="http://schemas.microsoft.com/office/drawing/2014/main" id="{CEFC68FF-3309-E026-2415-AE67E4CE8141}"/>
               </a:ext>
             </a:extLst>
           </p:cNvPr>
@@ -21329,7 +21329,7 @@
           <p:cNvPr id="16" name="TextBox 15">
             <a:extLst>
               <a:ext uri="{FF2B5EF4-FFF2-40B4-BE49-F238E27FC236}">
-                <a16:creationId xmlns:a16="http://schemas.microsoft.com/office/drawing/2014/main" id="{A94F46B0-B2DE-0F25-9E54-BD7343A72F97}"/>
+                <a16:creationId xmlns:a16="http://schemas.microsoft.com/office/drawing/2014/main" id="{2C6398B5-1C52-A274-479F-9D5B3A1EDD42}"/>
               </a:ext>
             </a:extLst>
           </p:cNvPr>
@@ -21375,7 +21375,7 @@
           <p:cNvPr id="17" name="TextBox 16">
             <a:extLst>
               <a:ext uri="{FF2B5EF4-FFF2-40B4-BE49-F238E27FC236}">
-                <a16:creationId xmlns:a16="http://schemas.microsoft.com/office/drawing/2014/main" id="{CC037E94-8DCE-4E18-E205-A5B69608588F}"/>
+                <a16:creationId xmlns:a16="http://schemas.microsoft.com/office/drawing/2014/main" id="{CC2403DA-F6E1-1101-0726-D6F501C98208}"/>
               </a:ext>
             </a:extLst>
           </p:cNvPr>
@@ -21414,7 +21414,7 @@
     </p:spTree>
     <p:extLst>
       <p:ext uri="{BB962C8B-B14F-4D97-AF65-F5344CB8AC3E}">
-        <p14:creationId xmlns:p14="http://schemas.microsoft.com/office/powerpoint/2010/main" val="4179755934"/>
+        <p14:creationId xmlns:p14="http://schemas.microsoft.com/office/powerpoint/2010/main" val="687545439"/>
       </p:ext>
     </p:extLst>
   </p:cSld>
@@ -21454,7 +21454,7 @@
           <p:cNvPr id="2" name="TextBox 1">
             <a:extLst>
               <a:ext uri="{FF2B5EF4-FFF2-40B4-BE49-F238E27FC236}">
-                <a16:creationId xmlns:a16="http://schemas.microsoft.com/office/drawing/2014/main" id="{24F84566-F0D8-E6EA-9D95-137549222FB7}"/>
+                <a16:creationId xmlns:a16="http://schemas.microsoft.com/office/drawing/2014/main" id="{C55F1E7F-07A5-2BB8-E477-8826ADAB8EC3}"/>
               </a:ext>
             </a:extLst>
           </p:cNvPr>
@@ -21494,7 +21494,7 @@
           <p:cNvPr id="3" name="TextBox 2">
             <a:extLst>
               <a:ext uri="{FF2B5EF4-FFF2-40B4-BE49-F238E27FC236}">
-                <a16:creationId xmlns:a16="http://schemas.microsoft.com/office/drawing/2014/main" id="{E6975397-38C1-4388-398B-2109E42A3BF5}"/>
+                <a16:creationId xmlns:a16="http://schemas.microsoft.com/office/drawing/2014/main" id="{5CE19AE7-DFFC-1A9A-5946-EB7DEA24435A}"/>
               </a:ext>
             </a:extLst>
           </p:cNvPr>
@@ -21534,7 +21534,7 @@
           <p:cNvPr id="4" name="Rectangle: Rounded Corners 3">
             <a:extLst>
               <a:ext uri="{FF2B5EF4-FFF2-40B4-BE49-F238E27FC236}">
-                <a16:creationId xmlns:a16="http://schemas.microsoft.com/office/drawing/2014/main" id="{887BFFF6-C401-57C3-3610-8CA92D594078}"/>
+                <a16:creationId xmlns:a16="http://schemas.microsoft.com/office/drawing/2014/main" id="{87E64368-FA15-9574-9CC2-784600033ED7}"/>
               </a:ext>
             </a:extLst>
           </p:cNvPr>
@@ -21604,7 +21604,7 @@
           <p:cNvPr id="5" name="TextBox 4">
             <a:extLst>
               <a:ext uri="{FF2B5EF4-FFF2-40B4-BE49-F238E27FC236}">
-                <a16:creationId xmlns:a16="http://schemas.microsoft.com/office/drawing/2014/main" id="{FA5DFF2E-E323-3F78-0D60-BB25BF77C14F}"/>
+                <a16:creationId xmlns:a16="http://schemas.microsoft.com/office/drawing/2014/main" id="{2B97FE43-A3B6-EB1D-1523-CBE2C3E2CE72}"/>
               </a:ext>
             </a:extLst>
           </p:cNvPr>
@@ -21673,7 +21673,7 @@
           <p:cNvPr id="6" name="TextBox 5">
             <a:extLst>
               <a:ext uri="{FF2B5EF4-FFF2-40B4-BE49-F238E27FC236}">
-                <a16:creationId xmlns:a16="http://schemas.microsoft.com/office/drawing/2014/main" id="{D9E78A4C-2FD8-6F59-6653-215AECCB76E5}"/>
+                <a16:creationId xmlns:a16="http://schemas.microsoft.com/office/drawing/2014/main" id="{F03739D1-36B1-A977-6702-E35E856855D9}"/>
               </a:ext>
             </a:extLst>
           </p:cNvPr>
@@ -21719,7 +21719,7 @@
           <p:cNvPr id="7" name="Rectangle: Rounded Corners 6">
             <a:extLst>
               <a:ext uri="{FF2B5EF4-FFF2-40B4-BE49-F238E27FC236}">
-                <a16:creationId xmlns:a16="http://schemas.microsoft.com/office/drawing/2014/main" id="{05EB933F-48F6-5D28-AE97-FAF62817BC3C}"/>
+                <a16:creationId xmlns:a16="http://schemas.microsoft.com/office/drawing/2014/main" id="{8D0D6236-FF55-CED7-44C2-D69A590FBEEF}"/>
               </a:ext>
             </a:extLst>
           </p:cNvPr>
@@ -21789,7 +21789,7 @@
           <p:cNvPr id="8" name="TextBox 7">
             <a:extLst>
               <a:ext uri="{FF2B5EF4-FFF2-40B4-BE49-F238E27FC236}">
-                <a16:creationId xmlns:a16="http://schemas.microsoft.com/office/drawing/2014/main" id="{F6EF810A-1BC5-F5E2-3D02-4BD4E63D8CB4}"/>
+                <a16:creationId xmlns:a16="http://schemas.microsoft.com/office/drawing/2014/main" id="{6B825C2E-86A4-B720-21EA-CC826F20327E}"/>
               </a:ext>
             </a:extLst>
           </p:cNvPr>
@@ -21884,7 +21884,7 @@
           <p:cNvPr id="9" name="TextBox 8">
             <a:extLst>
               <a:ext uri="{FF2B5EF4-FFF2-40B4-BE49-F238E27FC236}">
-                <a16:creationId xmlns:a16="http://schemas.microsoft.com/office/drawing/2014/main" id="{D5E84F1E-347B-5F00-9ABA-3D9C87A3041A}"/>
+                <a16:creationId xmlns:a16="http://schemas.microsoft.com/office/drawing/2014/main" id="{356ABA66-F617-D01A-954A-326FC3ADDB32}"/>
               </a:ext>
             </a:extLst>
           </p:cNvPr>
@@ -21930,7 +21930,7 @@
           <p:cNvPr id="10" name="TextBox 9">
             <a:extLst>
               <a:ext uri="{FF2B5EF4-FFF2-40B4-BE49-F238E27FC236}">
-                <a16:creationId xmlns:a16="http://schemas.microsoft.com/office/drawing/2014/main" id="{BCF74D82-E5A8-A30D-5CB0-1FCDCC8EF696}"/>
+                <a16:creationId xmlns:a16="http://schemas.microsoft.com/office/drawing/2014/main" id="{640DE0A6-02C8-A9D8-B809-B321EAE317AF}"/>
               </a:ext>
             </a:extLst>
           </p:cNvPr>
@@ -21969,7 +21969,7 @@
     </p:spTree>
     <p:extLst>
       <p:ext uri="{BB962C8B-B14F-4D97-AF65-F5344CB8AC3E}">
-        <p14:creationId xmlns:p14="http://schemas.microsoft.com/office/powerpoint/2010/main" val="1513864313"/>
+        <p14:creationId xmlns:p14="http://schemas.microsoft.com/office/powerpoint/2010/main" val="3076632079"/>
       </p:ext>
     </p:extLst>
   </p:cSld>
@@ -22009,7 +22009,7 @@
           <p:cNvPr id="2" name="TextBox 1">
             <a:extLst>
               <a:ext uri="{FF2B5EF4-FFF2-40B4-BE49-F238E27FC236}">
-                <a16:creationId xmlns:a16="http://schemas.microsoft.com/office/drawing/2014/main" id="{98D85AAC-B3BD-1173-DB2B-84F5BB0D15CE}"/>
+                <a16:creationId xmlns:a16="http://schemas.microsoft.com/office/drawing/2014/main" id="{60297E4B-6663-8913-9F46-1B3FCEE7C96F}"/>
               </a:ext>
             </a:extLst>
           </p:cNvPr>
@@ -22049,7 +22049,7 @@
           <p:cNvPr id="3" name="Oval 2">
             <a:extLst>
               <a:ext uri="{FF2B5EF4-FFF2-40B4-BE49-F238E27FC236}">
-                <a16:creationId xmlns:a16="http://schemas.microsoft.com/office/drawing/2014/main" id="{8C1D7986-6BB2-0792-8A73-AFDEFF2B0107}"/>
+                <a16:creationId xmlns:a16="http://schemas.microsoft.com/office/drawing/2014/main" id="{6DD68935-56B0-5E7A-41B3-F25AFA301168}"/>
               </a:ext>
             </a:extLst>
           </p:cNvPr>
@@ -22125,7 +22125,7 @@
           <p:cNvPr id="4" name="TextBox 3">
             <a:extLst>
               <a:ext uri="{FF2B5EF4-FFF2-40B4-BE49-F238E27FC236}">
-                <a16:creationId xmlns:a16="http://schemas.microsoft.com/office/drawing/2014/main" id="{35AA7095-DD6E-BB75-2452-0280DDC2C4ED}"/>
+                <a16:creationId xmlns:a16="http://schemas.microsoft.com/office/drawing/2014/main" id="{796FD36A-0FE6-91B3-8050-FF7B30B6B52A}"/>
               </a:ext>
             </a:extLst>
           </p:cNvPr>
@@ -22171,7 +22171,7 @@
           <p:cNvPr id="5" name="Oval 4">
             <a:extLst>
               <a:ext uri="{FF2B5EF4-FFF2-40B4-BE49-F238E27FC236}">
-                <a16:creationId xmlns:a16="http://schemas.microsoft.com/office/drawing/2014/main" id="{DB683244-C34D-EFDA-ABE3-34ABCFD84291}"/>
+                <a16:creationId xmlns:a16="http://schemas.microsoft.com/office/drawing/2014/main" id="{EDA2113D-B91A-0540-F3B0-0406A25EC33F}"/>
               </a:ext>
             </a:extLst>
           </p:cNvPr>
@@ -22247,7 +22247,7 @@
           <p:cNvPr id="6" name="TextBox 5">
             <a:extLst>
               <a:ext uri="{FF2B5EF4-FFF2-40B4-BE49-F238E27FC236}">
-                <a16:creationId xmlns:a16="http://schemas.microsoft.com/office/drawing/2014/main" id="{8356F632-AC9C-25FA-4677-BAD072BF7FA6}"/>
+                <a16:creationId xmlns:a16="http://schemas.microsoft.com/office/drawing/2014/main" id="{F545B516-281B-DB03-5C24-08B6FA2BDDE1}"/>
               </a:ext>
             </a:extLst>
           </p:cNvPr>
@@ -22293,7 +22293,7 @@
           <p:cNvPr id="7" name="Oval 6">
             <a:extLst>
               <a:ext uri="{FF2B5EF4-FFF2-40B4-BE49-F238E27FC236}">
-                <a16:creationId xmlns:a16="http://schemas.microsoft.com/office/drawing/2014/main" id="{819924B9-B9FC-1F70-B96B-4C2DB82A3505}"/>
+                <a16:creationId xmlns:a16="http://schemas.microsoft.com/office/drawing/2014/main" id="{269BBF7F-F55D-0A0E-7440-3C913285BC85}"/>
               </a:ext>
             </a:extLst>
           </p:cNvPr>
@@ -22369,7 +22369,7 @@
           <p:cNvPr id="8" name="TextBox 7">
             <a:extLst>
               <a:ext uri="{FF2B5EF4-FFF2-40B4-BE49-F238E27FC236}">
-                <a16:creationId xmlns:a16="http://schemas.microsoft.com/office/drawing/2014/main" id="{500F83BC-53C0-FAE1-D087-9569D2DB9689}"/>
+                <a16:creationId xmlns:a16="http://schemas.microsoft.com/office/drawing/2014/main" id="{83D8A858-AE0A-C8B0-BAA4-C3F204A165A4}"/>
               </a:ext>
             </a:extLst>
           </p:cNvPr>
@@ -22415,7 +22415,7 @@
           <p:cNvPr id="9" name="Oval 8">
             <a:extLst>
               <a:ext uri="{FF2B5EF4-FFF2-40B4-BE49-F238E27FC236}">
-                <a16:creationId xmlns:a16="http://schemas.microsoft.com/office/drawing/2014/main" id="{4277A427-0215-9F76-99F9-28F615F7780D}"/>
+                <a16:creationId xmlns:a16="http://schemas.microsoft.com/office/drawing/2014/main" id="{23E7C38F-3F26-073B-8D3A-AF65DDF5F3CE}"/>
               </a:ext>
             </a:extLst>
           </p:cNvPr>
@@ -22491,7 +22491,7 @@
           <p:cNvPr id="10" name="TextBox 9">
             <a:extLst>
               <a:ext uri="{FF2B5EF4-FFF2-40B4-BE49-F238E27FC236}">
-                <a16:creationId xmlns:a16="http://schemas.microsoft.com/office/drawing/2014/main" id="{A9A890E7-087B-C676-08BB-2D33EE1C523A}"/>
+                <a16:creationId xmlns:a16="http://schemas.microsoft.com/office/drawing/2014/main" id="{1DC040CF-DDC0-44E1-5531-C889DB93B808}"/>
               </a:ext>
             </a:extLst>
           </p:cNvPr>
@@ -22537,7 +22537,7 @@
           <p:cNvPr id="11" name="TextBox 10">
             <a:extLst>
               <a:ext uri="{FF2B5EF4-FFF2-40B4-BE49-F238E27FC236}">
-                <a16:creationId xmlns:a16="http://schemas.microsoft.com/office/drawing/2014/main" id="{A91BC838-A9E9-F223-EB55-DEC74546BBD8}"/>
+                <a16:creationId xmlns:a16="http://schemas.microsoft.com/office/drawing/2014/main" id="{CB570117-00B9-EA5A-DABA-F3D675EAFE08}"/>
               </a:ext>
             </a:extLst>
           </p:cNvPr>
@@ -22583,7 +22583,7 @@
           <p:cNvPr id="12" name="TextBox 11">
             <a:extLst>
               <a:ext uri="{FF2B5EF4-FFF2-40B4-BE49-F238E27FC236}">
-                <a16:creationId xmlns:a16="http://schemas.microsoft.com/office/drawing/2014/main" id="{2F852CCC-81F5-0A72-09EF-7AB722DFDB40}"/>
+                <a16:creationId xmlns:a16="http://schemas.microsoft.com/office/drawing/2014/main" id="{01D3AFFC-993B-CE79-9805-CB2D3EEBA473}"/>
               </a:ext>
             </a:extLst>
           </p:cNvPr>
@@ -22621,7 +22621,7 @@
     </p:spTree>
     <p:extLst>
       <p:ext uri="{BB962C8B-B14F-4D97-AF65-F5344CB8AC3E}">
-        <p14:creationId xmlns:p14="http://schemas.microsoft.com/office/powerpoint/2010/main" val="2560800422"/>
+        <p14:creationId xmlns:p14="http://schemas.microsoft.com/office/powerpoint/2010/main" val="833117373"/>
       </p:ext>
     </p:extLst>
   </p:cSld>
@@ -22661,7 +22661,7 @@
           <p:cNvPr id="2" name="TextBox 1">
             <a:extLst>
               <a:ext uri="{FF2B5EF4-FFF2-40B4-BE49-F238E27FC236}">
-                <a16:creationId xmlns:a16="http://schemas.microsoft.com/office/drawing/2014/main" id="{485C3922-0D9D-0A82-1E82-3B2F7B4CA25F}"/>
+                <a16:creationId xmlns:a16="http://schemas.microsoft.com/office/drawing/2014/main" id="{EAABC3A6-A802-927A-7CD5-0766B483F935}"/>
               </a:ext>
             </a:extLst>
           </p:cNvPr>
@@ -22701,7 +22701,7 @@
           <p:cNvPr id="3" name="TextBox 2">
             <a:extLst>
               <a:ext uri="{FF2B5EF4-FFF2-40B4-BE49-F238E27FC236}">
-                <a16:creationId xmlns:a16="http://schemas.microsoft.com/office/drawing/2014/main" id="{6DBD4F43-8230-7471-2BC1-1F4A5A94F57C}"/>
+                <a16:creationId xmlns:a16="http://schemas.microsoft.com/office/drawing/2014/main" id="{46C16798-04FD-3CD0-ADED-22579B8C0539}"/>
               </a:ext>
             </a:extLst>
           </p:cNvPr>
@@ -22747,7 +22747,7 @@
           <p:cNvPr id="4" name="Rectangle: Rounded Corners 3">
             <a:extLst>
               <a:ext uri="{FF2B5EF4-FFF2-40B4-BE49-F238E27FC236}">
-                <a16:creationId xmlns:a16="http://schemas.microsoft.com/office/drawing/2014/main" id="{4435C669-2F93-A376-7204-496F0C92F42A}"/>
+                <a16:creationId xmlns:a16="http://schemas.microsoft.com/office/drawing/2014/main" id="{9C25FB80-CD31-6DAF-68FA-8BAFC56A488A}"/>
               </a:ext>
             </a:extLst>
           </p:cNvPr>
@@ -22817,7 +22817,7 @@
           <p:cNvPr id="5" name="Oval 4">
             <a:extLst>
               <a:ext uri="{FF2B5EF4-FFF2-40B4-BE49-F238E27FC236}">
-                <a16:creationId xmlns:a16="http://schemas.microsoft.com/office/drawing/2014/main" id="{8008BD27-A7CD-E912-BF3A-70AAC0921838}"/>
+                <a16:creationId xmlns:a16="http://schemas.microsoft.com/office/drawing/2014/main" id="{86352FE3-C258-0531-FA02-779D5DEFF1F0}"/>
               </a:ext>
             </a:extLst>
           </p:cNvPr>
@@ -22893,7 +22893,7 @@
           <p:cNvPr id="6" name="TextBox 5">
             <a:extLst>
               <a:ext uri="{FF2B5EF4-FFF2-40B4-BE49-F238E27FC236}">
-                <a16:creationId xmlns:a16="http://schemas.microsoft.com/office/drawing/2014/main" id="{9056316C-12AE-2951-09FC-8308DE322268}"/>
+                <a16:creationId xmlns:a16="http://schemas.microsoft.com/office/drawing/2014/main" id="{F3818433-5537-098F-D148-E3BCA0A27A94}"/>
               </a:ext>
             </a:extLst>
           </p:cNvPr>
@@ -22933,7 +22933,7 @@
           <p:cNvPr id="7" name="TextBox 6">
             <a:extLst>
               <a:ext uri="{FF2B5EF4-FFF2-40B4-BE49-F238E27FC236}">
-                <a16:creationId xmlns:a16="http://schemas.microsoft.com/office/drawing/2014/main" id="{D50F275A-D249-D320-A68E-0E99166F6B99}"/>
+                <a16:creationId xmlns:a16="http://schemas.microsoft.com/office/drawing/2014/main" id="{F473492F-2693-48FA-0B81-38BCD327A2A7}"/>
               </a:ext>
             </a:extLst>
           </p:cNvPr>
@@ -22979,7 +22979,7 @@
           <p:cNvPr id="8" name="Rectangle: Rounded Corners 7">
             <a:extLst>
               <a:ext uri="{FF2B5EF4-FFF2-40B4-BE49-F238E27FC236}">
-                <a16:creationId xmlns:a16="http://schemas.microsoft.com/office/drawing/2014/main" id="{007E8F06-FBBA-C251-4B4D-727BF4533A90}"/>
+                <a16:creationId xmlns:a16="http://schemas.microsoft.com/office/drawing/2014/main" id="{D6D15618-DD42-F152-24A5-456C6EA8C98D}"/>
               </a:ext>
             </a:extLst>
           </p:cNvPr>
@@ -23049,7 +23049,7 @@
           <p:cNvPr id="9" name="Oval 8">
             <a:extLst>
               <a:ext uri="{FF2B5EF4-FFF2-40B4-BE49-F238E27FC236}">
-                <a16:creationId xmlns:a16="http://schemas.microsoft.com/office/drawing/2014/main" id="{7CBD7799-7800-0BD2-F428-B0A6F96B83FE}"/>
+                <a16:creationId xmlns:a16="http://schemas.microsoft.com/office/drawing/2014/main" id="{902821E1-F03F-7E40-1ADC-1773A1DEB851}"/>
               </a:ext>
             </a:extLst>
           </p:cNvPr>
@@ -23125,7 +23125,7 @@
           <p:cNvPr id="10" name="TextBox 9">
             <a:extLst>
               <a:ext uri="{FF2B5EF4-FFF2-40B4-BE49-F238E27FC236}">
-                <a16:creationId xmlns:a16="http://schemas.microsoft.com/office/drawing/2014/main" id="{4BC01BE2-7A11-EF81-4B1C-6BAD966A4C1E}"/>
+                <a16:creationId xmlns:a16="http://schemas.microsoft.com/office/drawing/2014/main" id="{3A7CFCEC-57E9-8BA1-91CA-7E18B937C66D}"/>
               </a:ext>
             </a:extLst>
           </p:cNvPr>
@@ -23165,7 +23165,7 @@
           <p:cNvPr id="11" name="TextBox 10">
             <a:extLst>
               <a:ext uri="{FF2B5EF4-FFF2-40B4-BE49-F238E27FC236}">
-                <a16:creationId xmlns:a16="http://schemas.microsoft.com/office/drawing/2014/main" id="{27D34C7B-EF04-C86A-B7B9-BA8BFE60523E}"/>
+                <a16:creationId xmlns:a16="http://schemas.microsoft.com/office/drawing/2014/main" id="{BF2E6C81-456D-A9A6-115C-27D283A126AC}"/>
               </a:ext>
             </a:extLst>
           </p:cNvPr>
@@ -23211,7 +23211,7 @@
           <p:cNvPr id="12" name="Rectangle: Rounded Corners 11">
             <a:extLst>
               <a:ext uri="{FF2B5EF4-FFF2-40B4-BE49-F238E27FC236}">
-                <a16:creationId xmlns:a16="http://schemas.microsoft.com/office/drawing/2014/main" id="{9F620F6C-3A6B-16A4-C418-BA83A3F7C932}"/>
+                <a16:creationId xmlns:a16="http://schemas.microsoft.com/office/drawing/2014/main" id="{057BFEE0-03BC-B9AF-11B9-60F71E972A1C}"/>
               </a:ext>
             </a:extLst>
           </p:cNvPr>
@@ -23281,7 +23281,7 @@
           <p:cNvPr id="13" name="Oval 12">
             <a:extLst>
               <a:ext uri="{FF2B5EF4-FFF2-40B4-BE49-F238E27FC236}">
-                <a16:creationId xmlns:a16="http://schemas.microsoft.com/office/drawing/2014/main" id="{D09469D4-D28D-E687-1C9A-49C666C20DA7}"/>
+                <a16:creationId xmlns:a16="http://schemas.microsoft.com/office/drawing/2014/main" id="{E8A5203B-FB5B-7973-F91C-B78FA77B33A8}"/>
               </a:ext>
             </a:extLst>
           </p:cNvPr>
@@ -23357,7 +23357,7 @@
           <p:cNvPr id="14" name="TextBox 13">
             <a:extLst>
               <a:ext uri="{FF2B5EF4-FFF2-40B4-BE49-F238E27FC236}">
-                <a16:creationId xmlns:a16="http://schemas.microsoft.com/office/drawing/2014/main" id="{86509497-EBBE-3A11-0311-152433D62742}"/>
+                <a16:creationId xmlns:a16="http://schemas.microsoft.com/office/drawing/2014/main" id="{FE50680F-98F6-A437-381B-8694D9F55796}"/>
               </a:ext>
             </a:extLst>
           </p:cNvPr>
@@ -23397,7 +23397,7 @@
           <p:cNvPr id="15" name="TextBox 14">
             <a:extLst>
               <a:ext uri="{FF2B5EF4-FFF2-40B4-BE49-F238E27FC236}">
-                <a16:creationId xmlns:a16="http://schemas.microsoft.com/office/drawing/2014/main" id="{E2FBFE5A-E145-3B53-A3AD-CE6C5B968B93}"/>
+                <a16:creationId xmlns:a16="http://schemas.microsoft.com/office/drawing/2014/main" id="{6D03B79A-4A74-0E8A-CD3E-608C1DD33D11}"/>
               </a:ext>
             </a:extLst>
           </p:cNvPr>
@@ -23443,7 +23443,7 @@
           <p:cNvPr id="16" name="Rectangle: Rounded Corners 15">
             <a:extLst>
               <a:ext uri="{FF2B5EF4-FFF2-40B4-BE49-F238E27FC236}">
-                <a16:creationId xmlns:a16="http://schemas.microsoft.com/office/drawing/2014/main" id="{076D7052-29B2-F371-EF15-E780946876A3}"/>
+                <a16:creationId xmlns:a16="http://schemas.microsoft.com/office/drawing/2014/main" id="{DC07D6C5-D3D5-E015-D204-DFF404A449D9}"/>
               </a:ext>
             </a:extLst>
           </p:cNvPr>
@@ -23513,7 +23513,7 @@
           <p:cNvPr id="17" name="Oval 16">
             <a:extLst>
               <a:ext uri="{FF2B5EF4-FFF2-40B4-BE49-F238E27FC236}">
-                <a16:creationId xmlns:a16="http://schemas.microsoft.com/office/drawing/2014/main" id="{42D517A3-288D-BBFD-7F1D-B428F05885C0}"/>
+                <a16:creationId xmlns:a16="http://schemas.microsoft.com/office/drawing/2014/main" id="{F50ADFA7-E100-476D-C0D0-E653AF66D109}"/>
               </a:ext>
             </a:extLst>
           </p:cNvPr>
@@ -23589,7 +23589,7 @@
           <p:cNvPr id="18" name="TextBox 17">
             <a:extLst>
               <a:ext uri="{FF2B5EF4-FFF2-40B4-BE49-F238E27FC236}">
-                <a16:creationId xmlns:a16="http://schemas.microsoft.com/office/drawing/2014/main" id="{9BC2F314-816E-43F2-B965-CFC68DC85578}"/>
+                <a16:creationId xmlns:a16="http://schemas.microsoft.com/office/drawing/2014/main" id="{37D56BAF-1C02-4AE4-67BC-6C54EB414FB3}"/>
               </a:ext>
             </a:extLst>
           </p:cNvPr>
@@ -23629,7 +23629,7 @@
           <p:cNvPr id="19" name="TextBox 18">
             <a:extLst>
               <a:ext uri="{FF2B5EF4-FFF2-40B4-BE49-F238E27FC236}">
-                <a16:creationId xmlns:a16="http://schemas.microsoft.com/office/drawing/2014/main" id="{63BF3C76-2AB9-7D68-C05A-1072FC58B990}"/>
+                <a16:creationId xmlns:a16="http://schemas.microsoft.com/office/drawing/2014/main" id="{C4A3F749-4FBA-8650-F1A5-1528CCA17976}"/>
               </a:ext>
             </a:extLst>
           </p:cNvPr>
@@ -23675,7 +23675,7 @@
           <p:cNvPr id="20" name="Rectangle: Rounded Corners 19">
             <a:extLst>
               <a:ext uri="{FF2B5EF4-FFF2-40B4-BE49-F238E27FC236}">
-                <a16:creationId xmlns:a16="http://schemas.microsoft.com/office/drawing/2014/main" id="{6E4FCF78-339A-5B46-6ED4-93120C0F8071}"/>
+                <a16:creationId xmlns:a16="http://schemas.microsoft.com/office/drawing/2014/main" id="{7A117264-C9D2-5231-8C44-77E37568089E}"/>
               </a:ext>
             </a:extLst>
           </p:cNvPr>
@@ -23745,7 +23745,7 @@
           <p:cNvPr id="21" name="Oval 20">
             <a:extLst>
               <a:ext uri="{FF2B5EF4-FFF2-40B4-BE49-F238E27FC236}">
-                <a16:creationId xmlns:a16="http://schemas.microsoft.com/office/drawing/2014/main" id="{056022BA-E2B0-A2CB-CF55-F456E37451C6}"/>
+                <a16:creationId xmlns:a16="http://schemas.microsoft.com/office/drawing/2014/main" id="{EF120CDB-899E-5B68-D82B-AC168B1C4EA4}"/>
               </a:ext>
             </a:extLst>
           </p:cNvPr>
@@ -23821,7 +23821,7 @@
           <p:cNvPr id="22" name="TextBox 21">
             <a:extLst>
               <a:ext uri="{FF2B5EF4-FFF2-40B4-BE49-F238E27FC236}">
-                <a16:creationId xmlns:a16="http://schemas.microsoft.com/office/drawing/2014/main" id="{91F64835-D0FC-543B-059A-73ED82255C55}"/>
+                <a16:creationId xmlns:a16="http://schemas.microsoft.com/office/drawing/2014/main" id="{A54A97F2-7065-451C-81A7-05AE3AF5AD0E}"/>
               </a:ext>
             </a:extLst>
           </p:cNvPr>
@@ -23861,7 +23861,7 @@
           <p:cNvPr id="23" name="TextBox 22">
             <a:extLst>
               <a:ext uri="{FF2B5EF4-FFF2-40B4-BE49-F238E27FC236}">
-                <a16:creationId xmlns:a16="http://schemas.microsoft.com/office/drawing/2014/main" id="{EFD7CD57-4C5F-03AC-51AB-4043B7ADF3AE}"/>
+                <a16:creationId xmlns:a16="http://schemas.microsoft.com/office/drawing/2014/main" id="{E808B43A-B112-E431-3B29-7702D0881A6F}"/>
               </a:ext>
             </a:extLst>
           </p:cNvPr>
@@ -23907,7 +23907,7 @@
           <p:cNvPr id="24" name="TextBox 23">
             <a:extLst>
               <a:ext uri="{FF2B5EF4-FFF2-40B4-BE49-F238E27FC236}">
-                <a16:creationId xmlns:a16="http://schemas.microsoft.com/office/drawing/2014/main" id="{6D0D46D5-5918-18A1-7A01-9FADA954BDF7}"/>
+                <a16:creationId xmlns:a16="http://schemas.microsoft.com/office/drawing/2014/main" id="{4B37ACB5-E6AB-2DEF-4507-8CFA981AD537}"/>
               </a:ext>
             </a:extLst>
           </p:cNvPr>
@@ -23953,7 +23953,7 @@
           <p:cNvPr id="25" name="TextBox 24">
             <a:extLst>
               <a:ext uri="{FF2B5EF4-FFF2-40B4-BE49-F238E27FC236}">
-                <a16:creationId xmlns:a16="http://schemas.microsoft.com/office/drawing/2014/main" id="{C44F411D-0F97-1A59-8E44-55E81FB520E8}"/>
+                <a16:creationId xmlns:a16="http://schemas.microsoft.com/office/drawing/2014/main" id="{34AFE66E-7AEB-F983-1A26-C25B009AA120}"/>
               </a:ext>
             </a:extLst>
           </p:cNvPr>
@@ -23999,7 +23999,7 @@
           <p:cNvPr id="26" name="TextBox 25">
             <a:extLst>
               <a:ext uri="{FF2B5EF4-FFF2-40B4-BE49-F238E27FC236}">
-                <a16:creationId xmlns:a16="http://schemas.microsoft.com/office/drawing/2014/main" id="{233A77A9-4378-CD99-CDE6-B98ED99F4333}"/>
+                <a16:creationId xmlns:a16="http://schemas.microsoft.com/office/drawing/2014/main" id="{7E71FE7E-3115-571E-CD5E-3E26203494BA}"/>
               </a:ext>
             </a:extLst>
           </p:cNvPr>
@@ -24038,7 +24038,7 @@
     </p:spTree>
     <p:extLst>
       <p:ext uri="{BB962C8B-B14F-4D97-AF65-F5344CB8AC3E}">
-        <p14:creationId xmlns:p14="http://schemas.microsoft.com/office/powerpoint/2010/main" val="3915897796"/>
+        <p14:creationId xmlns:p14="http://schemas.microsoft.com/office/powerpoint/2010/main" val="1125899669"/>
       </p:ext>
     </p:extLst>
   </p:cSld>
@@ -24078,7 +24078,7 @@
           <p:cNvPr id="2" name="TextBox 1">
             <a:extLst>
               <a:ext uri="{FF2B5EF4-FFF2-40B4-BE49-F238E27FC236}">
-                <a16:creationId xmlns:a16="http://schemas.microsoft.com/office/drawing/2014/main" id="{A2FFF6A6-CC7E-F0CF-E6D4-E4D59EA7AEED}"/>
+                <a16:creationId xmlns:a16="http://schemas.microsoft.com/office/drawing/2014/main" id="{E3AAFE1B-FA70-A3A4-07CF-E46AB7033F67}"/>
               </a:ext>
             </a:extLst>
           </p:cNvPr>
@@ -24124,7 +24124,7 @@
           <p:cNvPr id="3" name="TextBox 2">
             <a:extLst>
               <a:ext uri="{FF2B5EF4-FFF2-40B4-BE49-F238E27FC236}">
-                <a16:creationId xmlns:a16="http://schemas.microsoft.com/office/drawing/2014/main" id="{9407AE9C-2267-001F-19B6-9161A4F6F08E}"/>
+                <a16:creationId xmlns:a16="http://schemas.microsoft.com/office/drawing/2014/main" id="{51B68335-5567-9B11-B3B3-90AF8B3A7EF1}"/>
               </a:ext>
             </a:extLst>
           </p:cNvPr>
@@ -24170,7 +24170,7 @@
           <p:cNvPr id="4" name="TextBox 3">
             <a:extLst>
               <a:ext uri="{FF2B5EF4-FFF2-40B4-BE49-F238E27FC236}">
-                <a16:creationId xmlns:a16="http://schemas.microsoft.com/office/drawing/2014/main" id="{1E303D1E-5C4D-7D9A-4E1A-10BD2D80B8AB}"/>
+                <a16:creationId xmlns:a16="http://schemas.microsoft.com/office/drawing/2014/main" id="{49A55B05-2467-A4C7-4BCA-FDE41EB21618}"/>
               </a:ext>
             </a:extLst>
           </p:cNvPr>
@@ -24211,7 +24211,7 @@
           <p:cNvPr id="5" name="TextBox 4">
             <a:extLst>
               <a:ext uri="{FF2B5EF4-FFF2-40B4-BE49-F238E27FC236}">
-                <a16:creationId xmlns:a16="http://schemas.microsoft.com/office/drawing/2014/main" id="{E70A348F-B6BE-26BF-CCAD-BAF30520176C}"/>
+                <a16:creationId xmlns:a16="http://schemas.microsoft.com/office/drawing/2014/main" id="{9A4D6D84-E7D6-09E8-76FD-39A2849F87B0}"/>
               </a:ext>
             </a:extLst>
           </p:cNvPr>
@@ -24258,7 +24258,7 @@
           <p:cNvPr id="6" name="Rectangle: Rounded Corners 5">
             <a:extLst>
               <a:ext uri="{FF2B5EF4-FFF2-40B4-BE49-F238E27FC236}">
-                <a16:creationId xmlns:a16="http://schemas.microsoft.com/office/drawing/2014/main" id="{24DA9D67-E22F-C0EE-F588-B8457D734D87}"/>
+                <a16:creationId xmlns:a16="http://schemas.microsoft.com/office/drawing/2014/main" id="{3FC64FAC-3FED-907D-8939-2236C74589D5}"/>
               </a:ext>
             </a:extLst>
           </p:cNvPr>
@@ -24336,7 +24336,7 @@
           <p:cNvPr id="7" name="Rectangle: Rounded Corners 6">
             <a:extLst>
               <a:ext uri="{FF2B5EF4-FFF2-40B4-BE49-F238E27FC236}">
-                <a16:creationId xmlns:a16="http://schemas.microsoft.com/office/drawing/2014/main" id="{ADCE7E09-03C0-8909-C07C-1796650C0E85}"/>
+                <a16:creationId xmlns:a16="http://schemas.microsoft.com/office/drawing/2014/main" id="{3D864E5A-8AE8-5343-62DA-3CB0E69C7F56}"/>
               </a:ext>
             </a:extLst>
           </p:cNvPr>
@@ -24414,7 +24414,7 @@
           <p:cNvPr id="8" name="Rectangle: Rounded Corners 7">
             <a:extLst>
               <a:ext uri="{FF2B5EF4-FFF2-40B4-BE49-F238E27FC236}">
-                <a16:creationId xmlns:a16="http://schemas.microsoft.com/office/drawing/2014/main" id="{DEAA066E-C13C-B8F8-9B5F-E6D563479C9F}"/>
+                <a16:creationId xmlns:a16="http://schemas.microsoft.com/office/drawing/2014/main" id="{705111C2-C541-03D3-9B45-6DDA7146A438}"/>
               </a:ext>
             </a:extLst>
           </p:cNvPr>
@@ -24492,7 +24492,7 @@
           <p:cNvPr id="9" name="Rectangle: Rounded Corners 8">
             <a:extLst>
               <a:ext uri="{FF2B5EF4-FFF2-40B4-BE49-F238E27FC236}">
-                <a16:creationId xmlns:a16="http://schemas.microsoft.com/office/drawing/2014/main" id="{9873171B-0688-7C5D-19EF-47ED550AD840}"/>
+                <a16:creationId xmlns:a16="http://schemas.microsoft.com/office/drawing/2014/main" id="{4BCCCEA6-FAEC-8F98-6BE0-D77B1A112577}"/>
               </a:ext>
             </a:extLst>
           </p:cNvPr>
@@ -24570,7 +24570,7 @@
           <p:cNvPr id="10" name="Rectangle: Rounded Corners 9">
             <a:extLst>
               <a:ext uri="{FF2B5EF4-FFF2-40B4-BE49-F238E27FC236}">
-                <a16:creationId xmlns:a16="http://schemas.microsoft.com/office/drawing/2014/main" id="{C113DC01-2389-DBAE-E357-DB51814A6DCF}"/>
+                <a16:creationId xmlns:a16="http://schemas.microsoft.com/office/drawing/2014/main" id="{D4581DF9-CD8E-56AD-F6E7-F4C398E58539}"/>
               </a:ext>
             </a:extLst>
           </p:cNvPr>
@@ -24648,7 +24648,7 @@
           <p:cNvPr id="11" name="Rectangle: Rounded Corners 10">
             <a:extLst>
               <a:ext uri="{FF2B5EF4-FFF2-40B4-BE49-F238E27FC236}">
-                <a16:creationId xmlns:a16="http://schemas.microsoft.com/office/drawing/2014/main" id="{940C173F-535F-D05D-DAAA-D5BAFCE82CC1}"/>
+                <a16:creationId xmlns:a16="http://schemas.microsoft.com/office/drawing/2014/main" id="{E1D7AEC1-5DBD-A990-B79B-3626A86B9829}"/>
               </a:ext>
             </a:extLst>
           </p:cNvPr>
@@ -24726,7 +24726,7 @@
           <p:cNvPr id="12" name="TextBox 11">
             <a:extLst>
               <a:ext uri="{FF2B5EF4-FFF2-40B4-BE49-F238E27FC236}">
-                <a16:creationId xmlns:a16="http://schemas.microsoft.com/office/drawing/2014/main" id="{A647BC25-6326-2684-E115-2B4AFE20D3E0}"/>
+                <a16:creationId xmlns:a16="http://schemas.microsoft.com/office/drawing/2014/main" id="{9A75A2EF-C38E-D3A1-A72D-90C4673A9CAF}"/>
               </a:ext>
             </a:extLst>
           </p:cNvPr>
@@ -24767,7 +24767,7 @@
           <p:cNvPr id="13" name="TextBox 12">
             <a:extLst>
               <a:ext uri="{FF2B5EF4-FFF2-40B4-BE49-F238E27FC236}">
-                <a16:creationId xmlns:a16="http://schemas.microsoft.com/office/drawing/2014/main" id="{DC18FA0A-E121-1E57-4AAD-0E802F9601B5}"/>
+                <a16:creationId xmlns:a16="http://schemas.microsoft.com/office/drawing/2014/main" id="{23C36419-923E-B3E2-D858-CB8ADD740806}"/>
               </a:ext>
             </a:extLst>
           </p:cNvPr>
@@ -24814,7 +24814,7 @@
           <p:cNvPr id="14" name="Rectangle: Rounded Corners 13">
             <a:extLst>
               <a:ext uri="{FF2B5EF4-FFF2-40B4-BE49-F238E27FC236}">
-                <a16:creationId xmlns:a16="http://schemas.microsoft.com/office/drawing/2014/main" id="{83A55E56-B38D-DB7C-BC6E-EACA81CF3782}"/>
+                <a16:creationId xmlns:a16="http://schemas.microsoft.com/office/drawing/2014/main" id="{29DFFAE4-A804-AECB-CBF1-2797DFC73FD4}"/>
               </a:ext>
             </a:extLst>
           </p:cNvPr>
@@ -24892,7 +24892,7 @@
           <p:cNvPr id="15" name="Rectangle: Rounded Corners 14">
             <a:extLst>
               <a:ext uri="{FF2B5EF4-FFF2-40B4-BE49-F238E27FC236}">
-                <a16:creationId xmlns:a16="http://schemas.microsoft.com/office/drawing/2014/main" id="{100CE619-CEEB-85A7-163B-232D473E22DD}"/>
+                <a16:creationId xmlns:a16="http://schemas.microsoft.com/office/drawing/2014/main" id="{20F957BC-3A37-8850-A62F-E59FEC22DF14}"/>
               </a:ext>
             </a:extLst>
           </p:cNvPr>
@@ -24970,7 +24970,7 @@
           <p:cNvPr id="16" name="Rectangle: Rounded Corners 15">
             <a:extLst>
               <a:ext uri="{FF2B5EF4-FFF2-40B4-BE49-F238E27FC236}">
-                <a16:creationId xmlns:a16="http://schemas.microsoft.com/office/drawing/2014/main" id="{A019FBF9-0289-D99F-2CE7-CB33385FAB0B}"/>
+                <a16:creationId xmlns:a16="http://schemas.microsoft.com/office/drawing/2014/main" id="{84F3E463-E5FC-CDA5-0A43-EAAE349268F7}"/>
               </a:ext>
             </a:extLst>
           </p:cNvPr>
@@ -25048,7 +25048,7 @@
           <p:cNvPr id="17" name="Rectangle: Rounded Corners 16">
             <a:extLst>
               <a:ext uri="{FF2B5EF4-FFF2-40B4-BE49-F238E27FC236}">
-                <a16:creationId xmlns:a16="http://schemas.microsoft.com/office/drawing/2014/main" id="{3571315B-7448-ED1E-15DC-CA7D709E4847}"/>
+                <a16:creationId xmlns:a16="http://schemas.microsoft.com/office/drawing/2014/main" id="{CF21B9A0-F3DC-88DA-FE37-2AF8FB08551E}"/>
               </a:ext>
             </a:extLst>
           </p:cNvPr>
@@ -25126,7 +25126,7 @@
           <p:cNvPr id="18" name="Rectangle: Rounded Corners 17">
             <a:extLst>
               <a:ext uri="{FF2B5EF4-FFF2-40B4-BE49-F238E27FC236}">
-                <a16:creationId xmlns:a16="http://schemas.microsoft.com/office/drawing/2014/main" id="{1F3B3887-3D31-2BFA-CAB9-2AA467AAE128}"/>
+                <a16:creationId xmlns:a16="http://schemas.microsoft.com/office/drawing/2014/main" id="{992AA18D-E735-085F-5828-9BF362B75365}"/>
               </a:ext>
             </a:extLst>
           </p:cNvPr>
@@ -25204,7 +25204,7 @@
           <p:cNvPr id="19" name="Rectangle: Rounded Corners 18">
             <a:extLst>
               <a:ext uri="{FF2B5EF4-FFF2-40B4-BE49-F238E27FC236}">
-                <a16:creationId xmlns:a16="http://schemas.microsoft.com/office/drawing/2014/main" id="{2F85A5B2-683B-3179-F32D-39B92099D805}"/>
+                <a16:creationId xmlns:a16="http://schemas.microsoft.com/office/drawing/2014/main" id="{1C7615DE-51EF-B5D8-CBB0-04F1249D2A8B}"/>
               </a:ext>
             </a:extLst>
           </p:cNvPr>
@@ -25282,7 +25282,7 @@
           <p:cNvPr id="20" name="TextBox 19">
             <a:extLst>
               <a:ext uri="{FF2B5EF4-FFF2-40B4-BE49-F238E27FC236}">
-                <a16:creationId xmlns:a16="http://schemas.microsoft.com/office/drawing/2014/main" id="{8E024171-91ED-8290-D41A-65B4749D3E4A}"/>
+                <a16:creationId xmlns:a16="http://schemas.microsoft.com/office/drawing/2014/main" id="{7BA83BFD-ACD4-B016-118B-B6158C311601}"/>
               </a:ext>
             </a:extLst>
           </p:cNvPr>
@@ -25323,7 +25323,7 @@
           <p:cNvPr id="21" name="TextBox 20">
             <a:extLst>
               <a:ext uri="{FF2B5EF4-FFF2-40B4-BE49-F238E27FC236}">
-                <a16:creationId xmlns:a16="http://schemas.microsoft.com/office/drawing/2014/main" id="{DA051651-916F-7A03-F49A-7B9CAAC536B7}"/>
+                <a16:creationId xmlns:a16="http://schemas.microsoft.com/office/drawing/2014/main" id="{3ACEB8B6-52CE-6B61-F2C9-E42ACBBE4E2A}"/>
               </a:ext>
             </a:extLst>
           </p:cNvPr>
@@ -25370,7 +25370,7 @@
           <p:cNvPr id="22" name="Rectangle: Rounded Corners 21">
             <a:extLst>
               <a:ext uri="{FF2B5EF4-FFF2-40B4-BE49-F238E27FC236}">
-                <a16:creationId xmlns:a16="http://schemas.microsoft.com/office/drawing/2014/main" id="{51A98E3A-F754-5757-8667-C27933C89654}"/>
+                <a16:creationId xmlns:a16="http://schemas.microsoft.com/office/drawing/2014/main" id="{F4CC5593-B275-1FA1-9193-31627B12BEF1}"/>
               </a:ext>
             </a:extLst>
           </p:cNvPr>
@@ -25448,7 +25448,7 @@
           <p:cNvPr id="23" name="Rectangle: Rounded Corners 22">
             <a:extLst>
               <a:ext uri="{FF2B5EF4-FFF2-40B4-BE49-F238E27FC236}">
-                <a16:creationId xmlns:a16="http://schemas.microsoft.com/office/drawing/2014/main" id="{99E8CFB1-E053-B790-43B4-669075D9A148}"/>
+                <a16:creationId xmlns:a16="http://schemas.microsoft.com/office/drawing/2014/main" id="{5ACD09A5-2CC0-87FA-3D39-B666CDFD5700}"/>
               </a:ext>
             </a:extLst>
           </p:cNvPr>
@@ -25526,7 +25526,7 @@
           <p:cNvPr id="24" name="Rectangle: Rounded Corners 23">
             <a:extLst>
               <a:ext uri="{FF2B5EF4-FFF2-40B4-BE49-F238E27FC236}">
-                <a16:creationId xmlns:a16="http://schemas.microsoft.com/office/drawing/2014/main" id="{EA0D3F40-F3BE-36D1-1666-08E3BF1EEEE4}"/>
+                <a16:creationId xmlns:a16="http://schemas.microsoft.com/office/drawing/2014/main" id="{D15CF2D0-5EFC-9969-2A89-FF4559708FDF}"/>
               </a:ext>
             </a:extLst>
           </p:cNvPr>
@@ -25604,7 +25604,7 @@
           <p:cNvPr id="25" name="Rectangle: Rounded Corners 24">
             <a:extLst>
               <a:ext uri="{FF2B5EF4-FFF2-40B4-BE49-F238E27FC236}">
-                <a16:creationId xmlns:a16="http://schemas.microsoft.com/office/drawing/2014/main" id="{F68DCEBD-07C7-5298-A003-E9A17FE00CDC}"/>
+                <a16:creationId xmlns:a16="http://schemas.microsoft.com/office/drawing/2014/main" id="{799B3A6D-EE1A-B310-E256-48E576C38125}"/>
               </a:ext>
             </a:extLst>
           </p:cNvPr>
@@ -25682,7 +25682,7 @@
           <p:cNvPr id="26" name="Rectangle: Rounded Corners 25">
             <a:extLst>
               <a:ext uri="{FF2B5EF4-FFF2-40B4-BE49-F238E27FC236}">
-                <a16:creationId xmlns:a16="http://schemas.microsoft.com/office/drawing/2014/main" id="{E811743D-087E-B153-2BEF-8948775425F6}"/>
+                <a16:creationId xmlns:a16="http://schemas.microsoft.com/office/drawing/2014/main" id="{B7A60249-F131-60FD-7984-94DDD36CB21E}"/>
               </a:ext>
             </a:extLst>
           </p:cNvPr>
@@ -25760,7 +25760,7 @@
           <p:cNvPr id="27" name="Rectangle: Rounded Corners 26">
             <a:extLst>
               <a:ext uri="{FF2B5EF4-FFF2-40B4-BE49-F238E27FC236}">
-                <a16:creationId xmlns:a16="http://schemas.microsoft.com/office/drawing/2014/main" id="{FD2D0AAD-6D00-8B66-F6DD-6EFE727D6D11}"/>
+                <a16:creationId xmlns:a16="http://schemas.microsoft.com/office/drawing/2014/main" id="{F8112038-1A07-E826-5A86-4B5578927043}"/>
               </a:ext>
             </a:extLst>
           </p:cNvPr>
@@ -25838,7 +25838,7 @@
           <p:cNvPr id="28" name="TextBox 27">
             <a:extLst>
               <a:ext uri="{FF2B5EF4-FFF2-40B4-BE49-F238E27FC236}">
-                <a16:creationId xmlns:a16="http://schemas.microsoft.com/office/drawing/2014/main" id="{2EDFC1A5-0EAE-B17B-0F4C-5C1ED888E240}"/>
+                <a16:creationId xmlns:a16="http://schemas.microsoft.com/office/drawing/2014/main" id="{24FA2CAC-C344-0FB3-F282-97BDAA9463BB}"/>
               </a:ext>
             </a:extLst>
           </p:cNvPr>
@@ -25879,7 +25879,7 @@
           <p:cNvPr id="29" name="TextBox 28">
             <a:extLst>
               <a:ext uri="{FF2B5EF4-FFF2-40B4-BE49-F238E27FC236}">
-                <a16:creationId xmlns:a16="http://schemas.microsoft.com/office/drawing/2014/main" id="{C609EBAC-7FCF-91EA-BD20-6554800F7A8C}"/>
+                <a16:creationId xmlns:a16="http://schemas.microsoft.com/office/drawing/2014/main" id="{C34AC986-1166-6EE0-4023-923D115A0CDE}"/>
               </a:ext>
             </a:extLst>
           </p:cNvPr>
@@ -25920,7 +25920,7 @@
           <p:cNvPr id="30" name="Rectangle: Rounded Corners 29">
             <a:extLst>
               <a:ext uri="{FF2B5EF4-FFF2-40B4-BE49-F238E27FC236}">
-                <a16:creationId xmlns:a16="http://schemas.microsoft.com/office/drawing/2014/main" id="{F3D19BF8-96D2-484E-C48D-36CD6CE3A021}"/>
+                <a16:creationId xmlns:a16="http://schemas.microsoft.com/office/drawing/2014/main" id="{1A75B322-BFCB-4F97-F4BA-FD8B54029B18}"/>
               </a:ext>
             </a:extLst>
           </p:cNvPr>
@@ -25998,7 +25998,7 @@
           <p:cNvPr id="31" name="Rectangle: Rounded Corners 30">
             <a:extLst>
               <a:ext uri="{FF2B5EF4-FFF2-40B4-BE49-F238E27FC236}">
-                <a16:creationId xmlns:a16="http://schemas.microsoft.com/office/drawing/2014/main" id="{C1F1814E-FE8D-81BF-599C-000E400B5184}"/>
+                <a16:creationId xmlns:a16="http://schemas.microsoft.com/office/drawing/2014/main" id="{8D09D7D4-6028-148A-01F1-40B641BC9101}"/>
               </a:ext>
             </a:extLst>
           </p:cNvPr>
@@ -26076,7 +26076,7 @@
           <p:cNvPr id="32" name="Rectangle: Rounded Corners 31">
             <a:extLst>
               <a:ext uri="{FF2B5EF4-FFF2-40B4-BE49-F238E27FC236}">
-                <a16:creationId xmlns:a16="http://schemas.microsoft.com/office/drawing/2014/main" id="{C4F79C9C-5439-6ED9-379C-02D50CB7D3F5}"/>
+                <a16:creationId xmlns:a16="http://schemas.microsoft.com/office/drawing/2014/main" id="{59B7A08D-C87D-0465-B205-7AA227802CFF}"/>
               </a:ext>
             </a:extLst>
           </p:cNvPr>
@@ -26154,7 +26154,7 @@
           <p:cNvPr id="33" name="Rectangle: Rounded Corners 32">
             <a:extLst>
               <a:ext uri="{FF2B5EF4-FFF2-40B4-BE49-F238E27FC236}">
-                <a16:creationId xmlns:a16="http://schemas.microsoft.com/office/drawing/2014/main" id="{0144D09F-423D-6392-B715-B1CE44D6067D}"/>
+                <a16:creationId xmlns:a16="http://schemas.microsoft.com/office/drawing/2014/main" id="{0FE26CED-1A19-C167-36BE-9C45DBB5EEA6}"/>
               </a:ext>
             </a:extLst>
           </p:cNvPr>
@@ -26232,7 +26232,7 @@
           <p:cNvPr id="34" name="Rectangle: Rounded Corners 33">
             <a:extLst>
               <a:ext uri="{FF2B5EF4-FFF2-40B4-BE49-F238E27FC236}">
-                <a16:creationId xmlns:a16="http://schemas.microsoft.com/office/drawing/2014/main" id="{7B3FB0DC-2868-C24C-1CC3-A3F793398379}"/>
+                <a16:creationId xmlns:a16="http://schemas.microsoft.com/office/drawing/2014/main" id="{B85A7627-C44F-E01B-0175-2FAD75C1C70D}"/>
               </a:ext>
             </a:extLst>
           </p:cNvPr>
@@ -26310,7 +26310,7 @@
           <p:cNvPr id="35" name="Rectangle: Rounded Corners 34">
             <a:extLst>
               <a:ext uri="{FF2B5EF4-FFF2-40B4-BE49-F238E27FC236}">
-                <a16:creationId xmlns:a16="http://schemas.microsoft.com/office/drawing/2014/main" id="{9CD95E1C-9F34-6C16-5333-9A6347E1BBE6}"/>
+                <a16:creationId xmlns:a16="http://schemas.microsoft.com/office/drawing/2014/main" id="{579C18A8-B062-5341-736B-F7AC9571695B}"/>
               </a:ext>
             </a:extLst>
           </p:cNvPr>
@@ -26388,7 +26388,7 @@
           <p:cNvPr id="36" name="Rectangle 35">
             <a:extLst>
               <a:ext uri="{FF2B5EF4-FFF2-40B4-BE49-F238E27FC236}">
-                <a16:creationId xmlns:a16="http://schemas.microsoft.com/office/drawing/2014/main" id="{671CE9EE-E9A5-6178-07F4-EB03EBCFB0BD}"/>
+                <a16:creationId xmlns:a16="http://schemas.microsoft.com/office/drawing/2014/main" id="{16657802-C070-F991-F450-251C358D8CA9}"/>
               </a:ext>
             </a:extLst>
           </p:cNvPr>
@@ -26456,7 +26456,7 @@
           <p:cNvPr id="37" name="TextBox 36">
             <a:extLst>
               <a:ext uri="{FF2B5EF4-FFF2-40B4-BE49-F238E27FC236}">
-                <a16:creationId xmlns:a16="http://schemas.microsoft.com/office/drawing/2014/main" id="{C35ADE09-0F6A-865E-FA82-E59AD16D11BE}"/>
+                <a16:creationId xmlns:a16="http://schemas.microsoft.com/office/drawing/2014/main" id="{C7E4EB0C-CE22-44E7-409B-FD1DFBB0BE99}"/>
               </a:ext>
             </a:extLst>
           </p:cNvPr>
@@ -26496,7 +26496,7 @@
           <p:cNvPr id="38" name="Rectangle 37">
             <a:extLst>
               <a:ext uri="{FF2B5EF4-FFF2-40B4-BE49-F238E27FC236}">
-                <a16:creationId xmlns:a16="http://schemas.microsoft.com/office/drawing/2014/main" id="{23F95402-48E1-5084-F0A7-BB3E08E59AC5}"/>
+                <a16:creationId xmlns:a16="http://schemas.microsoft.com/office/drawing/2014/main" id="{3DA16BF5-23B5-B560-47A0-23469B7E55FD}"/>
               </a:ext>
             </a:extLst>
           </p:cNvPr>
@@ -26564,7 +26564,7 @@
           <p:cNvPr id="39" name="TextBox 38">
             <a:extLst>
               <a:ext uri="{FF2B5EF4-FFF2-40B4-BE49-F238E27FC236}">
-                <a16:creationId xmlns:a16="http://schemas.microsoft.com/office/drawing/2014/main" id="{CEC4A04A-CD6B-8F0B-A637-CC59B97CAF1C}"/>
+                <a16:creationId xmlns:a16="http://schemas.microsoft.com/office/drawing/2014/main" id="{91CA2FB3-02BE-375F-23D4-A85DC5684900}"/>
               </a:ext>
             </a:extLst>
           </p:cNvPr>
@@ -26604,7 +26604,7 @@
           <p:cNvPr id="40" name="TextBox 39">
             <a:extLst>
               <a:ext uri="{FF2B5EF4-FFF2-40B4-BE49-F238E27FC236}">
-                <a16:creationId xmlns:a16="http://schemas.microsoft.com/office/drawing/2014/main" id="{9CB9A9C4-7E40-C813-B613-CE141215C391}"/>
+                <a16:creationId xmlns:a16="http://schemas.microsoft.com/office/drawing/2014/main" id="{7DE73380-B606-6DBD-7105-3FBCD75E08C3}"/>
               </a:ext>
             </a:extLst>
           </p:cNvPr>
@@ -26650,7 +26650,7 @@
           <p:cNvPr id="41" name="TextBox 40">
             <a:extLst>
               <a:ext uri="{FF2B5EF4-FFF2-40B4-BE49-F238E27FC236}">
-                <a16:creationId xmlns:a16="http://schemas.microsoft.com/office/drawing/2014/main" id="{798D389D-7641-A335-F17B-7A0D77506C75}"/>
+                <a16:creationId xmlns:a16="http://schemas.microsoft.com/office/drawing/2014/main" id="{02D803D5-E035-7D99-C6F1-FA9550AB56E9}"/>
               </a:ext>
             </a:extLst>
           </p:cNvPr>
@@ -26696,7 +26696,7 @@
           <p:cNvPr id="42" name="TextBox 41">
             <a:extLst>
               <a:ext uri="{FF2B5EF4-FFF2-40B4-BE49-F238E27FC236}">
-                <a16:creationId xmlns:a16="http://schemas.microsoft.com/office/drawing/2014/main" id="{DE810E9E-E855-2826-7DD0-E70FDCAA9E4E}"/>
+                <a16:creationId xmlns:a16="http://schemas.microsoft.com/office/drawing/2014/main" id="{3AA30E02-7466-0A31-2A7E-FC990A129BC5}"/>
               </a:ext>
             </a:extLst>
           </p:cNvPr>
@@ -26735,7 +26735,7 @@
     </p:spTree>
     <p:extLst>
       <p:ext uri="{BB962C8B-B14F-4D97-AF65-F5344CB8AC3E}">
-        <p14:creationId xmlns:p14="http://schemas.microsoft.com/office/powerpoint/2010/main" val="2302139794"/>
+        <p14:creationId xmlns:p14="http://schemas.microsoft.com/office/powerpoint/2010/main" val="124820219"/>
       </p:ext>
     </p:extLst>
   </p:cSld>
@@ -26775,7 +26775,7 @@
           <p:cNvPr id="2" name="TextBox 1">
             <a:extLst>
               <a:ext uri="{FF2B5EF4-FFF2-40B4-BE49-F238E27FC236}">
-                <a16:creationId xmlns:a16="http://schemas.microsoft.com/office/drawing/2014/main" id="{9F4D2FDE-B64F-38DB-748D-479A686C02A1}"/>
+                <a16:creationId xmlns:a16="http://schemas.microsoft.com/office/drawing/2014/main" id="{7AFFF759-3651-80AB-55ED-CD2B5FF28645}"/>
               </a:ext>
             </a:extLst>
           </p:cNvPr>
@@ -26821,7 +26821,7 @@
           <p:cNvPr id="3" name="TextBox 2">
             <a:extLst>
               <a:ext uri="{FF2B5EF4-FFF2-40B4-BE49-F238E27FC236}">
-                <a16:creationId xmlns:a16="http://schemas.microsoft.com/office/drawing/2014/main" id="{7FDC7D43-B7AD-B2E8-379E-CB801DCB02ED}"/>
+                <a16:creationId xmlns:a16="http://schemas.microsoft.com/office/drawing/2014/main" id="{69131A13-FEDF-BF0A-2FE3-9E89534A5211}"/>
               </a:ext>
             </a:extLst>
           </p:cNvPr>
@@ -26867,7 +26867,7 @@
           <p:cNvPr id="4" name="Rectangle: Rounded Corners 3">
             <a:extLst>
               <a:ext uri="{FF2B5EF4-FFF2-40B4-BE49-F238E27FC236}">
-                <a16:creationId xmlns:a16="http://schemas.microsoft.com/office/drawing/2014/main" id="{B3BF82D0-F1F6-D7E5-6E62-96A319C54A25}"/>
+                <a16:creationId xmlns:a16="http://schemas.microsoft.com/office/drawing/2014/main" id="{F8059881-790D-B37C-E3AC-7C14BE1EDF02}"/>
               </a:ext>
             </a:extLst>
           </p:cNvPr>
@@ -26937,7 +26937,7 @@
           <p:cNvPr id="5" name="Oval 4">
             <a:extLst>
               <a:ext uri="{FF2B5EF4-FFF2-40B4-BE49-F238E27FC236}">
-                <a16:creationId xmlns:a16="http://schemas.microsoft.com/office/drawing/2014/main" id="{4AFAE431-D445-035F-0A71-472941DB750E}"/>
+                <a16:creationId xmlns:a16="http://schemas.microsoft.com/office/drawing/2014/main" id="{2130E0EC-CFA0-BEA1-648D-304D8969FC21}"/>
               </a:ext>
             </a:extLst>
           </p:cNvPr>
@@ -27013,7 +27013,7 @@
           <p:cNvPr id="6" name="TextBox 5">
             <a:extLst>
               <a:ext uri="{FF2B5EF4-FFF2-40B4-BE49-F238E27FC236}">
-                <a16:creationId xmlns:a16="http://schemas.microsoft.com/office/drawing/2014/main" id="{01801514-EF2E-6FC0-F584-CD0C1E8F84F6}"/>
+                <a16:creationId xmlns:a16="http://schemas.microsoft.com/office/drawing/2014/main" id="{E8DF571D-4E6E-1AC3-F627-7DC627579F86}"/>
               </a:ext>
             </a:extLst>
           </p:cNvPr>
@@ -27053,7 +27053,7 @@
           <p:cNvPr id="7" name="TextBox 6">
             <a:extLst>
               <a:ext uri="{FF2B5EF4-FFF2-40B4-BE49-F238E27FC236}">
-                <a16:creationId xmlns:a16="http://schemas.microsoft.com/office/drawing/2014/main" id="{5CFCC782-7692-28EA-8DD7-ADDD4C9AF228}"/>
+                <a16:creationId xmlns:a16="http://schemas.microsoft.com/office/drawing/2014/main" id="{C369AC71-6A27-B8BB-8BC5-59A8DF0C325F}"/>
               </a:ext>
             </a:extLst>
           </p:cNvPr>
@@ -27099,7 +27099,7 @@
           <p:cNvPr id="8" name="TextBox 7">
             <a:extLst>
               <a:ext uri="{FF2B5EF4-FFF2-40B4-BE49-F238E27FC236}">
-                <a16:creationId xmlns:a16="http://schemas.microsoft.com/office/drawing/2014/main" id="{21188258-3849-FC40-1D77-60D9F9A4E096}"/>
+                <a16:creationId xmlns:a16="http://schemas.microsoft.com/office/drawing/2014/main" id="{0C6D1508-08C7-5461-4106-67C61DC977CE}"/>
               </a:ext>
             </a:extLst>
           </p:cNvPr>
@@ -27139,7 +27139,7 @@
           <p:cNvPr id="9" name="Rectangle: Rounded Corners 8">
             <a:extLst>
               <a:ext uri="{FF2B5EF4-FFF2-40B4-BE49-F238E27FC236}">
-                <a16:creationId xmlns:a16="http://schemas.microsoft.com/office/drawing/2014/main" id="{AFCEC8BF-7BF4-1B6C-6692-166C2D046477}"/>
+                <a16:creationId xmlns:a16="http://schemas.microsoft.com/office/drawing/2014/main" id="{A21CBA62-A947-5806-EE2F-54C3F405EA14}"/>
               </a:ext>
             </a:extLst>
           </p:cNvPr>
@@ -27209,7 +27209,7 @@
           <p:cNvPr id="10" name="Oval 9">
             <a:extLst>
               <a:ext uri="{FF2B5EF4-FFF2-40B4-BE49-F238E27FC236}">
-                <a16:creationId xmlns:a16="http://schemas.microsoft.com/office/drawing/2014/main" id="{FABFAC74-D460-6ECE-77AE-3C04CA64DADB}"/>
+                <a16:creationId xmlns:a16="http://schemas.microsoft.com/office/drawing/2014/main" id="{4024DC06-301B-BCFF-D0CC-5283EE5691DE}"/>
               </a:ext>
             </a:extLst>
           </p:cNvPr>
@@ -27285,7 +27285,7 @@
           <p:cNvPr id="11" name="TextBox 10">
             <a:extLst>
               <a:ext uri="{FF2B5EF4-FFF2-40B4-BE49-F238E27FC236}">
-                <a16:creationId xmlns:a16="http://schemas.microsoft.com/office/drawing/2014/main" id="{60919143-2075-03D5-83BF-F2FEF29649C6}"/>
+                <a16:creationId xmlns:a16="http://schemas.microsoft.com/office/drawing/2014/main" id="{CBC3CF25-F007-51ED-B28F-001645152873}"/>
               </a:ext>
             </a:extLst>
           </p:cNvPr>
@@ -27325,7 +27325,7 @@
           <p:cNvPr id="12" name="TextBox 11">
             <a:extLst>
               <a:ext uri="{FF2B5EF4-FFF2-40B4-BE49-F238E27FC236}">
-                <a16:creationId xmlns:a16="http://schemas.microsoft.com/office/drawing/2014/main" id="{D32BF934-0060-A772-6B89-0016B35CC846}"/>
+                <a16:creationId xmlns:a16="http://schemas.microsoft.com/office/drawing/2014/main" id="{15D18AB5-9EFD-4809-54AC-AB0AECD1DAFA}"/>
               </a:ext>
             </a:extLst>
           </p:cNvPr>
@@ -27371,7 +27371,7 @@
           <p:cNvPr id="13" name="TextBox 12">
             <a:extLst>
               <a:ext uri="{FF2B5EF4-FFF2-40B4-BE49-F238E27FC236}">
-                <a16:creationId xmlns:a16="http://schemas.microsoft.com/office/drawing/2014/main" id="{56F58C14-9DE5-2CFC-7E91-E229D66D906A}"/>
+                <a16:creationId xmlns:a16="http://schemas.microsoft.com/office/drawing/2014/main" id="{0426B2DB-129A-273F-E829-9EC15A803335}"/>
               </a:ext>
             </a:extLst>
           </p:cNvPr>
@@ -27417,7 +27417,7 @@
           <p:cNvPr id="14" name="Rectangle: Rounded Corners 13">
             <a:extLst>
               <a:ext uri="{FF2B5EF4-FFF2-40B4-BE49-F238E27FC236}">
-                <a16:creationId xmlns:a16="http://schemas.microsoft.com/office/drawing/2014/main" id="{870E4127-CE0C-FA29-78AF-5DCEBB232F8C}"/>
+                <a16:creationId xmlns:a16="http://schemas.microsoft.com/office/drawing/2014/main" id="{0E959861-0DD4-4051-DD42-E53CB211FE91}"/>
               </a:ext>
             </a:extLst>
           </p:cNvPr>
@@ -27487,7 +27487,7 @@
           <p:cNvPr id="15" name="Oval 14">
             <a:extLst>
               <a:ext uri="{FF2B5EF4-FFF2-40B4-BE49-F238E27FC236}">
-                <a16:creationId xmlns:a16="http://schemas.microsoft.com/office/drawing/2014/main" id="{FA9AF43C-EE12-16E1-8D8B-F233CF0056B9}"/>
+                <a16:creationId xmlns:a16="http://schemas.microsoft.com/office/drawing/2014/main" id="{808BBD66-D279-5E54-025B-7F7C6FACEE97}"/>
               </a:ext>
             </a:extLst>
           </p:cNvPr>
@@ -27563,7 +27563,7 @@
           <p:cNvPr id="16" name="TextBox 15">
             <a:extLst>
               <a:ext uri="{FF2B5EF4-FFF2-40B4-BE49-F238E27FC236}">
-                <a16:creationId xmlns:a16="http://schemas.microsoft.com/office/drawing/2014/main" id="{A23C383D-9DB3-674E-3717-0EE5CE8E7FA0}"/>
+                <a16:creationId xmlns:a16="http://schemas.microsoft.com/office/drawing/2014/main" id="{66771611-1A04-76B3-2F88-6E9BD61D49DA}"/>
               </a:ext>
             </a:extLst>
           </p:cNvPr>
@@ -27603,7 +27603,7 @@
           <p:cNvPr id="17" name="TextBox 16">
             <a:extLst>
               <a:ext uri="{FF2B5EF4-FFF2-40B4-BE49-F238E27FC236}">
-                <a16:creationId xmlns:a16="http://schemas.microsoft.com/office/drawing/2014/main" id="{997F59BA-D571-82B7-8C76-A3D326F943D4}"/>
+                <a16:creationId xmlns:a16="http://schemas.microsoft.com/office/drawing/2014/main" id="{700059BB-567A-06BA-F7CA-DBDC04BE9239}"/>
               </a:ext>
             </a:extLst>
           </p:cNvPr>
@@ -27649,7 +27649,7 @@
           <p:cNvPr id="18" name="TextBox 17">
             <a:extLst>
               <a:ext uri="{FF2B5EF4-FFF2-40B4-BE49-F238E27FC236}">
-                <a16:creationId xmlns:a16="http://schemas.microsoft.com/office/drawing/2014/main" id="{04B536FE-25E4-F1C4-8F5B-77C741DF6D34}"/>
+                <a16:creationId xmlns:a16="http://schemas.microsoft.com/office/drawing/2014/main" id="{F2258D7F-3226-7452-353E-46D507233B74}"/>
               </a:ext>
             </a:extLst>
           </p:cNvPr>
@@ -27695,7 +27695,7 @@
           <p:cNvPr id="19" name="Rectangle: Rounded Corners 18">
             <a:extLst>
               <a:ext uri="{FF2B5EF4-FFF2-40B4-BE49-F238E27FC236}">
-                <a16:creationId xmlns:a16="http://schemas.microsoft.com/office/drawing/2014/main" id="{CDC79D71-F5BC-C5AA-0D88-A1FBC2870E0E}"/>
+                <a16:creationId xmlns:a16="http://schemas.microsoft.com/office/drawing/2014/main" id="{6161142B-9F20-C1BC-EE4F-242E915AB7E5}"/>
               </a:ext>
             </a:extLst>
           </p:cNvPr>
@@ -27765,7 +27765,7 @@
           <p:cNvPr id="20" name="Oval 19">
             <a:extLst>
               <a:ext uri="{FF2B5EF4-FFF2-40B4-BE49-F238E27FC236}">
-                <a16:creationId xmlns:a16="http://schemas.microsoft.com/office/drawing/2014/main" id="{421F1BC2-1CC8-3799-6764-98A8E2DCBC57}"/>
+                <a16:creationId xmlns:a16="http://schemas.microsoft.com/office/drawing/2014/main" id="{223CB925-2E37-F9DB-8680-50913FC9E5C6}"/>
               </a:ext>
             </a:extLst>
           </p:cNvPr>
@@ -27841,7 +27841,7 @@
           <p:cNvPr id="21" name="TextBox 20">
             <a:extLst>
               <a:ext uri="{FF2B5EF4-FFF2-40B4-BE49-F238E27FC236}">
-                <a16:creationId xmlns:a16="http://schemas.microsoft.com/office/drawing/2014/main" id="{2257F752-9DE0-5A6D-DF79-EF9A28279BC3}"/>
+                <a16:creationId xmlns:a16="http://schemas.microsoft.com/office/drawing/2014/main" id="{369B0BB5-A09A-D094-6937-D2217C7DB0CE}"/>
               </a:ext>
             </a:extLst>
           </p:cNvPr>
@@ -27881,7 +27881,7 @@
           <p:cNvPr id="22" name="TextBox 21">
             <a:extLst>
               <a:ext uri="{FF2B5EF4-FFF2-40B4-BE49-F238E27FC236}">
-                <a16:creationId xmlns:a16="http://schemas.microsoft.com/office/drawing/2014/main" id="{47811A0F-B716-BEBF-DFFA-FBD20E67C668}"/>
+                <a16:creationId xmlns:a16="http://schemas.microsoft.com/office/drawing/2014/main" id="{ACBFB983-E06E-1E17-74D4-AAC7DC59E387}"/>
               </a:ext>
             </a:extLst>
           </p:cNvPr>
@@ -27927,7 +27927,7 @@
           <p:cNvPr id="23" name="TextBox 22">
             <a:extLst>
               <a:ext uri="{FF2B5EF4-FFF2-40B4-BE49-F238E27FC236}">
-                <a16:creationId xmlns:a16="http://schemas.microsoft.com/office/drawing/2014/main" id="{4DD6D0FA-3A88-EBD7-5EAC-F9EA1853E88F}"/>
+                <a16:creationId xmlns:a16="http://schemas.microsoft.com/office/drawing/2014/main" id="{9CA7C7B6-12C5-868D-ABCF-2BC3CB3385FF}"/>
               </a:ext>
             </a:extLst>
           </p:cNvPr>
@@ -27967,7 +27967,7 @@
           <p:cNvPr id="24" name="TextBox 23">
             <a:extLst>
               <a:ext uri="{FF2B5EF4-FFF2-40B4-BE49-F238E27FC236}">
-                <a16:creationId xmlns:a16="http://schemas.microsoft.com/office/drawing/2014/main" id="{A1049484-D6F7-1402-6160-3787BBFB76AA}"/>
+                <a16:creationId xmlns:a16="http://schemas.microsoft.com/office/drawing/2014/main" id="{CD7CADB2-D81B-B352-4BB2-068127B72BD3}"/>
               </a:ext>
             </a:extLst>
           </p:cNvPr>
@@ -28013,7 +28013,7 @@
           <p:cNvPr id="25" name="TextBox 24">
             <a:extLst>
               <a:ext uri="{FF2B5EF4-FFF2-40B4-BE49-F238E27FC236}">
-                <a16:creationId xmlns:a16="http://schemas.microsoft.com/office/drawing/2014/main" id="{EE605459-6D62-EC69-7AE6-72689802B640}"/>
+                <a16:creationId xmlns:a16="http://schemas.microsoft.com/office/drawing/2014/main" id="{8E15E187-6A73-7A84-56FC-8B616E4C8C41}"/>
               </a:ext>
             </a:extLst>
           </p:cNvPr>
@@ -28052,7 +28052,7 @@
     </p:spTree>
     <p:extLst>
       <p:ext uri="{BB962C8B-B14F-4D97-AF65-F5344CB8AC3E}">
-        <p14:creationId xmlns:p14="http://schemas.microsoft.com/office/powerpoint/2010/main" val="2835646095"/>
+        <p14:creationId xmlns:p14="http://schemas.microsoft.com/office/powerpoint/2010/main" val="3209109424"/>
       </p:ext>
     </p:extLst>
   </p:cSld>
@@ -28092,7 +28092,7 @@
           <p:cNvPr id="2" name="TextBox 1">
             <a:extLst>
               <a:ext uri="{FF2B5EF4-FFF2-40B4-BE49-F238E27FC236}">
-                <a16:creationId xmlns:a16="http://schemas.microsoft.com/office/drawing/2014/main" id="{EB310994-6412-1F3F-F168-51B507683CD8}"/>
+                <a16:creationId xmlns:a16="http://schemas.microsoft.com/office/drawing/2014/main" id="{8859F74A-A494-25C2-FE1A-A2D45FD9843C}"/>
               </a:ext>
             </a:extLst>
           </p:cNvPr>
@@ -28138,7 +28138,7 @@
           <p:cNvPr id="3" name="Rectangle: Rounded Corners 2">
             <a:extLst>
               <a:ext uri="{FF2B5EF4-FFF2-40B4-BE49-F238E27FC236}">
-                <a16:creationId xmlns:a16="http://schemas.microsoft.com/office/drawing/2014/main" id="{4308CB3C-B807-C0DD-3D53-41FAB78E24DA}"/>
+                <a16:creationId xmlns:a16="http://schemas.microsoft.com/office/drawing/2014/main" id="{EB8BA4D3-3AFF-2BD9-DDC7-F445C66CF22E}"/>
               </a:ext>
             </a:extLst>
           </p:cNvPr>
@@ -28208,7 +28208,7 @@
           <p:cNvPr id="4" name="TextBox 3">
             <a:extLst>
               <a:ext uri="{FF2B5EF4-FFF2-40B4-BE49-F238E27FC236}">
-                <a16:creationId xmlns:a16="http://schemas.microsoft.com/office/drawing/2014/main" id="{3C75D599-5808-186D-2FE9-F68C361C356E}"/>
+                <a16:creationId xmlns:a16="http://schemas.microsoft.com/office/drawing/2014/main" id="{0AA49232-D10B-75CB-2E50-1A09EDC2CD26}"/>
               </a:ext>
             </a:extLst>
           </p:cNvPr>
@@ -28254,7 +28254,7 @@
           <p:cNvPr id="5" name="TextBox 4">
             <a:extLst>
               <a:ext uri="{FF2B5EF4-FFF2-40B4-BE49-F238E27FC236}">
-                <a16:creationId xmlns:a16="http://schemas.microsoft.com/office/drawing/2014/main" id="{8DA7A994-DF17-4CD4-1501-E8119A9A69EC}"/>
+                <a16:creationId xmlns:a16="http://schemas.microsoft.com/office/drawing/2014/main" id="{4540B787-F5BF-3EC3-3F3A-BCD1F4ED6199}"/>
               </a:ext>
             </a:extLst>
           </p:cNvPr>
@@ -28343,7 +28343,7 @@
           <p:cNvPr id="6" name="Rectangle: Rounded Corners 5">
             <a:extLst>
               <a:ext uri="{FF2B5EF4-FFF2-40B4-BE49-F238E27FC236}">
-                <a16:creationId xmlns:a16="http://schemas.microsoft.com/office/drawing/2014/main" id="{E963F857-F262-D5F5-8D74-AB3B2B24599D}"/>
+                <a16:creationId xmlns:a16="http://schemas.microsoft.com/office/drawing/2014/main" id="{4D67E146-5A81-22E9-9E52-278ACA1A75FD}"/>
               </a:ext>
             </a:extLst>
           </p:cNvPr>
@@ -28413,7 +28413,7 @@
           <p:cNvPr id="7" name="TextBox 6">
             <a:extLst>
               <a:ext uri="{FF2B5EF4-FFF2-40B4-BE49-F238E27FC236}">
-                <a16:creationId xmlns:a16="http://schemas.microsoft.com/office/drawing/2014/main" id="{08E8C197-6319-156A-DF30-508916BBE248}"/>
+                <a16:creationId xmlns:a16="http://schemas.microsoft.com/office/drawing/2014/main" id="{23B0AD6A-17DD-D583-23F9-AC4289BC8CE1}"/>
               </a:ext>
             </a:extLst>
           </p:cNvPr>
@@ -28459,7 +28459,7 @@
           <p:cNvPr id="8" name="TextBox 7">
             <a:extLst>
               <a:ext uri="{FF2B5EF4-FFF2-40B4-BE49-F238E27FC236}">
-                <a16:creationId xmlns:a16="http://schemas.microsoft.com/office/drawing/2014/main" id="{ED2E2C80-3C70-357E-38E1-EAC8E29741D0}"/>
+                <a16:creationId xmlns:a16="http://schemas.microsoft.com/office/drawing/2014/main" id="{B8257ED0-522C-4ABE-F239-65627BDDDB80}"/>
               </a:ext>
             </a:extLst>
           </p:cNvPr>
@@ -28566,7 +28566,7 @@
           <p:cNvPr id="9" name="TextBox 8">
             <a:extLst>
               <a:ext uri="{FF2B5EF4-FFF2-40B4-BE49-F238E27FC236}">
-                <a16:creationId xmlns:a16="http://schemas.microsoft.com/office/drawing/2014/main" id="{B713933D-6B76-2DDF-BB92-94E3E8231616}"/>
+                <a16:creationId xmlns:a16="http://schemas.microsoft.com/office/drawing/2014/main" id="{20D3ADC0-B601-D67D-28EA-85BACF28FA69}"/>
               </a:ext>
             </a:extLst>
           </p:cNvPr>
@@ -28613,7 +28613,7 @@
           <p:cNvPr id="10" name="TextBox 9">
             <a:extLst>
               <a:ext uri="{FF2B5EF4-FFF2-40B4-BE49-F238E27FC236}">
-                <a16:creationId xmlns:a16="http://schemas.microsoft.com/office/drawing/2014/main" id="{61EB2FAB-3279-9FAE-2C56-FD4BB6B0AD34}"/>
+                <a16:creationId xmlns:a16="http://schemas.microsoft.com/office/drawing/2014/main" id="{2756C4E1-E68A-0FAF-DA9D-84C10418F732}"/>
               </a:ext>
             </a:extLst>
           </p:cNvPr>
@@ -28659,7 +28659,7 @@
           <p:cNvPr id="11" name="TextBox 10">
             <a:extLst>
               <a:ext uri="{FF2B5EF4-FFF2-40B4-BE49-F238E27FC236}">
-                <a16:creationId xmlns:a16="http://schemas.microsoft.com/office/drawing/2014/main" id="{E9643531-8558-D217-EC7E-3662DD974CE4}"/>
+                <a16:creationId xmlns:a16="http://schemas.microsoft.com/office/drawing/2014/main" id="{74C19C19-187E-F35F-F2B2-6F845A1346E1}"/>
               </a:ext>
             </a:extLst>
           </p:cNvPr>
@@ -28698,7 +28698,7 @@
     </p:spTree>
     <p:extLst>
       <p:ext uri="{BB962C8B-B14F-4D97-AF65-F5344CB8AC3E}">
-        <p14:creationId xmlns:p14="http://schemas.microsoft.com/office/powerpoint/2010/main" val="528941666"/>
+        <p14:creationId xmlns:p14="http://schemas.microsoft.com/office/powerpoint/2010/main" val="2027815619"/>
       </p:ext>
     </p:extLst>
   </p:cSld>
@@ -28738,7 +28738,7 @@
           <p:cNvPr id="2" name="TextBox 1">
             <a:extLst>
               <a:ext uri="{FF2B5EF4-FFF2-40B4-BE49-F238E27FC236}">
-                <a16:creationId xmlns:a16="http://schemas.microsoft.com/office/drawing/2014/main" id="{D1655C90-6B7A-A920-A545-EB7CCE831E0F}"/>
+                <a16:creationId xmlns:a16="http://schemas.microsoft.com/office/drawing/2014/main" id="{2EA4116D-ACEC-7BD4-C164-8BCD6A5C520B}"/>
               </a:ext>
             </a:extLst>
           </p:cNvPr>
@@ -28784,7 +28784,7 @@
           <p:cNvPr id="3" name="TextBox 2">
             <a:extLst>
               <a:ext uri="{FF2B5EF4-FFF2-40B4-BE49-F238E27FC236}">
-                <a16:creationId xmlns:a16="http://schemas.microsoft.com/office/drawing/2014/main" id="{1DB6FCE4-E976-1633-C971-139FE6DD619B}"/>
+                <a16:creationId xmlns:a16="http://schemas.microsoft.com/office/drawing/2014/main" id="{11E263CD-7FA2-CCF1-B0E1-332030117C3C}"/>
               </a:ext>
             </a:extLst>
           </p:cNvPr>
@@ -28830,7 +28830,7 @@
           <p:cNvPr id="4" name="Rectangle: Rounded Corners 3">
             <a:extLst>
               <a:ext uri="{FF2B5EF4-FFF2-40B4-BE49-F238E27FC236}">
-                <a16:creationId xmlns:a16="http://schemas.microsoft.com/office/drawing/2014/main" id="{3A4BA442-6B31-180D-4968-E095C0F4E38F}"/>
+                <a16:creationId xmlns:a16="http://schemas.microsoft.com/office/drawing/2014/main" id="{2B124835-E192-C3BB-6540-70BC47254C05}"/>
               </a:ext>
             </a:extLst>
           </p:cNvPr>
@@ -28900,7 +28900,7 @@
           <p:cNvPr id="5" name="TextBox 4">
             <a:extLst>
               <a:ext uri="{FF2B5EF4-FFF2-40B4-BE49-F238E27FC236}">
-                <a16:creationId xmlns:a16="http://schemas.microsoft.com/office/drawing/2014/main" id="{28A82DFB-7A6B-27A6-ECDD-9D3BCD472A52}"/>
+                <a16:creationId xmlns:a16="http://schemas.microsoft.com/office/drawing/2014/main" id="{F7CEF1B7-0BA8-A61F-3F0F-06C8A658D440}"/>
               </a:ext>
             </a:extLst>
           </p:cNvPr>
@@ -28940,7 +28940,7 @@
           <p:cNvPr id="6" name="TextBox 5">
             <a:extLst>
               <a:ext uri="{FF2B5EF4-FFF2-40B4-BE49-F238E27FC236}">
-                <a16:creationId xmlns:a16="http://schemas.microsoft.com/office/drawing/2014/main" id="{07F88360-6971-96AF-63B2-351F7C7E949B}"/>
+                <a16:creationId xmlns:a16="http://schemas.microsoft.com/office/drawing/2014/main" id="{B11612F2-3325-8786-C450-9875F3A402C8}"/>
               </a:ext>
             </a:extLst>
           </p:cNvPr>
@@ -28980,7 +28980,7 @@
           <p:cNvPr id="7" name="TextBox 6">
             <a:extLst>
               <a:ext uri="{FF2B5EF4-FFF2-40B4-BE49-F238E27FC236}">
-                <a16:creationId xmlns:a16="http://schemas.microsoft.com/office/drawing/2014/main" id="{DB12401F-AB07-3209-FA77-37F2BC59AD38}"/>
+                <a16:creationId xmlns:a16="http://schemas.microsoft.com/office/drawing/2014/main" id="{500B988F-C030-F7AC-57CF-7613CC85D6F9}"/>
               </a:ext>
             </a:extLst>
           </p:cNvPr>
@@ -29026,7 +29026,7 @@
           <p:cNvPr id="8" name="Rectangle: Rounded Corners 7">
             <a:extLst>
               <a:ext uri="{FF2B5EF4-FFF2-40B4-BE49-F238E27FC236}">
-                <a16:creationId xmlns:a16="http://schemas.microsoft.com/office/drawing/2014/main" id="{1D771036-ED38-CD6D-9086-386D6FC9A433}"/>
+                <a16:creationId xmlns:a16="http://schemas.microsoft.com/office/drawing/2014/main" id="{89231039-8C64-D8AE-BDE2-A9718126CAE7}"/>
               </a:ext>
             </a:extLst>
           </p:cNvPr>
@@ -29104,7 +29104,7 @@
           <p:cNvPr id="9" name="Rectangle: Rounded Corners 8">
             <a:extLst>
               <a:ext uri="{FF2B5EF4-FFF2-40B4-BE49-F238E27FC236}">
-                <a16:creationId xmlns:a16="http://schemas.microsoft.com/office/drawing/2014/main" id="{A592F579-207E-9D77-6A79-6B08D576E43A}"/>
+                <a16:creationId xmlns:a16="http://schemas.microsoft.com/office/drawing/2014/main" id="{50B14E21-58F3-8270-7804-DBF5F9395CC5}"/>
               </a:ext>
             </a:extLst>
           </p:cNvPr>
@@ -29174,7 +29174,7 @@
           <p:cNvPr id="10" name="TextBox 9">
             <a:extLst>
               <a:ext uri="{FF2B5EF4-FFF2-40B4-BE49-F238E27FC236}">
-                <a16:creationId xmlns:a16="http://schemas.microsoft.com/office/drawing/2014/main" id="{FBFDD59C-77C0-BD21-EDD0-00BE2A572097}"/>
+                <a16:creationId xmlns:a16="http://schemas.microsoft.com/office/drawing/2014/main" id="{190B99BC-ED37-13EF-64DD-7DEA51F81ABA}"/>
               </a:ext>
             </a:extLst>
           </p:cNvPr>
@@ -29214,7 +29214,7 @@
           <p:cNvPr id="11" name="TextBox 10">
             <a:extLst>
               <a:ext uri="{FF2B5EF4-FFF2-40B4-BE49-F238E27FC236}">
-                <a16:creationId xmlns:a16="http://schemas.microsoft.com/office/drawing/2014/main" id="{3C5C1E41-7623-4F89-1452-F656C856A7C2}"/>
+                <a16:creationId xmlns:a16="http://schemas.microsoft.com/office/drawing/2014/main" id="{83BC40A5-6A5C-6AF9-1479-3C3EAE2888A1}"/>
               </a:ext>
             </a:extLst>
           </p:cNvPr>
@@ -29254,7 +29254,7 @@
           <p:cNvPr id="12" name="TextBox 11">
             <a:extLst>
               <a:ext uri="{FF2B5EF4-FFF2-40B4-BE49-F238E27FC236}">
-                <a16:creationId xmlns:a16="http://schemas.microsoft.com/office/drawing/2014/main" id="{32A46E90-9B63-8201-CEAB-0698A6151844}"/>
+                <a16:creationId xmlns:a16="http://schemas.microsoft.com/office/drawing/2014/main" id="{FA644E09-D9D6-A7BD-02E4-CBA8D4FE6B5A}"/>
               </a:ext>
             </a:extLst>
           </p:cNvPr>
@@ -29300,7 +29300,7 @@
           <p:cNvPr id="13" name="Rectangle: Rounded Corners 12">
             <a:extLst>
               <a:ext uri="{FF2B5EF4-FFF2-40B4-BE49-F238E27FC236}">
-                <a16:creationId xmlns:a16="http://schemas.microsoft.com/office/drawing/2014/main" id="{878EFFEC-6296-7540-061E-299F7665A23E}"/>
+                <a16:creationId xmlns:a16="http://schemas.microsoft.com/office/drawing/2014/main" id="{84C0B408-F64C-5347-12D4-B1E97B155EF6}"/>
               </a:ext>
             </a:extLst>
           </p:cNvPr>
@@ -29378,7 +29378,7 @@
           <p:cNvPr id="14" name="Rectangle: Rounded Corners 13">
             <a:extLst>
               <a:ext uri="{FF2B5EF4-FFF2-40B4-BE49-F238E27FC236}">
-                <a16:creationId xmlns:a16="http://schemas.microsoft.com/office/drawing/2014/main" id="{6B72D6F2-497D-8CDE-F6D6-4A141C3E4909}"/>
+                <a16:creationId xmlns:a16="http://schemas.microsoft.com/office/drawing/2014/main" id="{2EC50A7D-617D-DF25-CBA1-512FC27F20F2}"/>
               </a:ext>
             </a:extLst>
           </p:cNvPr>
@@ -29448,7 +29448,7 @@
           <p:cNvPr id="15" name="TextBox 14">
             <a:extLst>
               <a:ext uri="{FF2B5EF4-FFF2-40B4-BE49-F238E27FC236}">
-                <a16:creationId xmlns:a16="http://schemas.microsoft.com/office/drawing/2014/main" id="{F54EA73C-8A8C-DDF3-FFD6-C2B32AB085E2}"/>
+                <a16:creationId xmlns:a16="http://schemas.microsoft.com/office/drawing/2014/main" id="{6359974F-50E5-12EE-508F-CAFFF3DA4823}"/>
               </a:ext>
             </a:extLst>
           </p:cNvPr>
@@ -29488,7 +29488,7 @@
           <p:cNvPr id="16" name="TextBox 15">
             <a:extLst>
               <a:ext uri="{FF2B5EF4-FFF2-40B4-BE49-F238E27FC236}">
-                <a16:creationId xmlns:a16="http://schemas.microsoft.com/office/drawing/2014/main" id="{AF4909B6-2E8E-3AA9-BBED-69FEC7B636EA}"/>
+                <a16:creationId xmlns:a16="http://schemas.microsoft.com/office/drawing/2014/main" id="{4B01AE85-678B-B2D2-0FCA-D2B137A672AE}"/>
               </a:ext>
             </a:extLst>
           </p:cNvPr>
@@ -29528,7 +29528,7 @@
           <p:cNvPr id="17" name="TextBox 16">
             <a:extLst>
               <a:ext uri="{FF2B5EF4-FFF2-40B4-BE49-F238E27FC236}">
-                <a16:creationId xmlns:a16="http://schemas.microsoft.com/office/drawing/2014/main" id="{A9E5620F-5B09-A38D-A33B-F5E4A466420B}"/>
+                <a16:creationId xmlns:a16="http://schemas.microsoft.com/office/drawing/2014/main" id="{0823BE70-0C08-B7FA-CF2A-1E1EC6FBBF53}"/>
               </a:ext>
             </a:extLst>
           </p:cNvPr>
@@ -29574,7 +29574,7 @@
           <p:cNvPr id="18" name="Rectangle: Rounded Corners 17">
             <a:extLst>
               <a:ext uri="{FF2B5EF4-FFF2-40B4-BE49-F238E27FC236}">
-                <a16:creationId xmlns:a16="http://schemas.microsoft.com/office/drawing/2014/main" id="{1188B039-96A6-91F5-709F-0827612B1D2D}"/>
+                <a16:creationId xmlns:a16="http://schemas.microsoft.com/office/drawing/2014/main" id="{195C8DA5-0D13-7EB7-2361-6544890B5EDC}"/>
               </a:ext>
             </a:extLst>
           </p:cNvPr>
@@ -29652,7 +29652,7 @@
           <p:cNvPr id="19" name="Rectangle: Rounded Corners 18">
             <a:extLst>
               <a:ext uri="{FF2B5EF4-FFF2-40B4-BE49-F238E27FC236}">
-                <a16:creationId xmlns:a16="http://schemas.microsoft.com/office/drawing/2014/main" id="{DC7C6960-1EC8-C13A-5ABA-7E281713ED1E}"/>
+                <a16:creationId xmlns:a16="http://schemas.microsoft.com/office/drawing/2014/main" id="{D3DC0599-F982-4931-A510-66065D731BEC}"/>
               </a:ext>
             </a:extLst>
           </p:cNvPr>
@@ -29722,7 +29722,7 @@
           <p:cNvPr id="20" name="TextBox 19">
             <a:extLst>
               <a:ext uri="{FF2B5EF4-FFF2-40B4-BE49-F238E27FC236}">
-                <a16:creationId xmlns:a16="http://schemas.microsoft.com/office/drawing/2014/main" id="{6BB039BA-5523-A85D-F178-78B3D62BA771}"/>
+                <a16:creationId xmlns:a16="http://schemas.microsoft.com/office/drawing/2014/main" id="{6DDA288B-0D8B-9399-21E2-BF860B5833EC}"/>
               </a:ext>
             </a:extLst>
           </p:cNvPr>
@@ -29762,7 +29762,7 @@
           <p:cNvPr id="21" name="TextBox 20">
             <a:extLst>
               <a:ext uri="{FF2B5EF4-FFF2-40B4-BE49-F238E27FC236}">
-                <a16:creationId xmlns:a16="http://schemas.microsoft.com/office/drawing/2014/main" id="{87F37FF5-EACA-FFEB-4E3F-6F6D1014E02F}"/>
+                <a16:creationId xmlns:a16="http://schemas.microsoft.com/office/drawing/2014/main" id="{4CFC4B88-04F2-9592-4764-BCB2F7B553C9}"/>
               </a:ext>
             </a:extLst>
           </p:cNvPr>
@@ -29802,7 +29802,7 @@
           <p:cNvPr id="22" name="TextBox 21">
             <a:extLst>
               <a:ext uri="{FF2B5EF4-FFF2-40B4-BE49-F238E27FC236}">
-                <a16:creationId xmlns:a16="http://schemas.microsoft.com/office/drawing/2014/main" id="{DFB46542-D1CD-0894-7AB6-B0B7F26D4218}"/>
+                <a16:creationId xmlns:a16="http://schemas.microsoft.com/office/drawing/2014/main" id="{FCB1B5A2-F23E-FF31-348A-2C9343EBF751}"/>
               </a:ext>
             </a:extLst>
           </p:cNvPr>
@@ -29848,7 +29848,7 @@
           <p:cNvPr id="23" name="Rectangle: Rounded Corners 22">
             <a:extLst>
               <a:ext uri="{FF2B5EF4-FFF2-40B4-BE49-F238E27FC236}">
-                <a16:creationId xmlns:a16="http://schemas.microsoft.com/office/drawing/2014/main" id="{F177C153-4AD0-1CC8-92D7-0C60DDF78CB2}"/>
+                <a16:creationId xmlns:a16="http://schemas.microsoft.com/office/drawing/2014/main" id="{78520821-51C2-8419-6F81-A665FBE5920F}"/>
               </a:ext>
             </a:extLst>
           </p:cNvPr>
@@ -29926,7 +29926,7 @@
           <p:cNvPr id="24" name="TextBox 23">
             <a:extLst>
               <a:ext uri="{FF2B5EF4-FFF2-40B4-BE49-F238E27FC236}">
-                <a16:creationId xmlns:a16="http://schemas.microsoft.com/office/drawing/2014/main" id="{112B0978-B515-61C9-19F4-4E90F022791B}"/>
+                <a16:creationId xmlns:a16="http://schemas.microsoft.com/office/drawing/2014/main" id="{6FEEFEFD-0F6B-857E-03FC-91E33E3BC83E}"/>
               </a:ext>
             </a:extLst>
           </p:cNvPr>
@@ -29972,7 +29972,7 @@
           <p:cNvPr id="25" name="TextBox 24">
             <a:extLst>
               <a:ext uri="{FF2B5EF4-FFF2-40B4-BE49-F238E27FC236}">
-                <a16:creationId xmlns:a16="http://schemas.microsoft.com/office/drawing/2014/main" id="{4C2233DE-9C9E-DCE1-D2B9-1380334B32F6}"/>
+                <a16:creationId xmlns:a16="http://schemas.microsoft.com/office/drawing/2014/main" id="{D2502DE5-7180-5A9C-CA39-DA5D04A2E2CD}"/>
               </a:ext>
             </a:extLst>
           </p:cNvPr>
@@ -30011,7 +30011,7 @@
     </p:spTree>
     <p:extLst>
       <p:ext uri="{BB962C8B-B14F-4D97-AF65-F5344CB8AC3E}">
-        <p14:creationId xmlns:p14="http://schemas.microsoft.com/office/powerpoint/2010/main" val="3063690926"/>
+        <p14:creationId xmlns:p14="http://schemas.microsoft.com/office/powerpoint/2010/main" val="851117876"/>
       </p:ext>
     </p:extLst>
   </p:cSld>
@@ -30051,7 +30051,7 @@
           <p:cNvPr id="2" name="TextBox 1">
             <a:extLst>
               <a:ext uri="{FF2B5EF4-FFF2-40B4-BE49-F238E27FC236}">
-                <a16:creationId xmlns:a16="http://schemas.microsoft.com/office/drawing/2014/main" id="{1A5144FD-5315-CEF7-58AA-0EE95311631A}"/>
+                <a16:creationId xmlns:a16="http://schemas.microsoft.com/office/drawing/2014/main" id="{6B767EDE-6301-9F3D-6C07-7387C2C6F9F3}"/>
               </a:ext>
             </a:extLst>
           </p:cNvPr>
@@ -30097,7 +30097,7 @@
           <p:cNvPr id="3" name="TextBox 2">
             <a:extLst>
               <a:ext uri="{FF2B5EF4-FFF2-40B4-BE49-F238E27FC236}">
-                <a16:creationId xmlns:a16="http://schemas.microsoft.com/office/drawing/2014/main" id="{BBADD200-FC60-3E6E-6EDD-F692DDA9BA7C}"/>
+                <a16:creationId xmlns:a16="http://schemas.microsoft.com/office/drawing/2014/main" id="{1CE1D488-0A83-1888-4A29-5E532888F17F}"/>
               </a:ext>
             </a:extLst>
           </p:cNvPr>
@@ -30143,7 +30143,7 @@
           <p:cNvPr id="4" name="Rectangle: Rounded Corners 3">
             <a:extLst>
               <a:ext uri="{FF2B5EF4-FFF2-40B4-BE49-F238E27FC236}">
-                <a16:creationId xmlns:a16="http://schemas.microsoft.com/office/drawing/2014/main" id="{37035F30-A1B3-4475-52E5-9BA73964346A}"/>
+                <a16:creationId xmlns:a16="http://schemas.microsoft.com/office/drawing/2014/main" id="{33DB5893-1D91-A418-D114-F5B43803C142}"/>
               </a:ext>
             </a:extLst>
           </p:cNvPr>
@@ -30233,7 +30233,7 @@
           <p:cNvPr id="5" name="Rectangle: Rounded Corners 4">
             <a:extLst>
               <a:ext uri="{FF2B5EF4-FFF2-40B4-BE49-F238E27FC236}">
-                <a16:creationId xmlns:a16="http://schemas.microsoft.com/office/drawing/2014/main" id="{0A586D07-AC06-F793-363D-61B1DC70EB42}"/>
+                <a16:creationId xmlns:a16="http://schemas.microsoft.com/office/drawing/2014/main" id="{1A96572F-4C50-02B2-611C-A212CBD9E77A}"/>
               </a:ext>
             </a:extLst>
           </p:cNvPr>
@@ -30303,7 +30303,7 @@
           <p:cNvPr id="6" name="Oval 5">
             <a:extLst>
               <a:ext uri="{FF2B5EF4-FFF2-40B4-BE49-F238E27FC236}">
-                <a16:creationId xmlns:a16="http://schemas.microsoft.com/office/drawing/2014/main" id="{65631832-FAEE-1467-2561-90E7D5294442}"/>
+                <a16:creationId xmlns:a16="http://schemas.microsoft.com/office/drawing/2014/main" id="{AA658F63-6A75-C9E6-EC9F-0DA9C30F7E22}"/>
               </a:ext>
             </a:extLst>
           </p:cNvPr>
@@ -30379,7 +30379,7 @@
           <p:cNvPr id="7" name="TextBox 6">
             <a:extLst>
               <a:ext uri="{FF2B5EF4-FFF2-40B4-BE49-F238E27FC236}">
-                <a16:creationId xmlns:a16="http://schemas.microsoft.com/office/drawing/2014/main" id="{7D952D3C-DDDE-A68B-F570-8D210E2175CD}"/>
+                <a16:creationId xmlns:a16="http://schemas.microsoft.com/office/drawing/2014/main" id="{2446BF2B-9C12-EE8C-FF17-822798D82106}"/>
               </a:ext>
             </a:extLst>
           </p:cNvPr>
@@ -30419,7 +30419,7 @@
           <p:cNvPr id="8" name="TextBox 7">
             <a:extLst>
               <a:ext uri="{FF2B5EF4-FFF2-40B4-BE49-F238E27FC236}">
-                <a16:creationId xmlns:a16="http://schemas.microsoft.com/office/drawing/2014/main" id="{B271BCA8-B692-CA38-D413-1A56CC090728}"/>
+                <a16:creationId xmlns:a16="http://schemas.microsoft.com/office/drawing/2014/main" id="{9A2CFF53-E9E0-80D1-55D4-7A120A9C91D6}"/>
               </a:ext>
             </a:extLst>
           </p:cNvPr>
@@ -30459,7 +30459,7 @@
           <p:cNvPr id="9" name="TextBox 8">
             <a:extLst>
               <a:ext uri="{FF2B5EF4-FFF2-40B4-BE49-F238E27FC236}">
-                <a16:creationId xmlns:a16="http://schemas.microsoft.com/office/drawing/2014/main" id="{B3CFD455-F4E0-5A34-7A8B-25F1C4B199E7}"/>
+                <a16:creationId xmlns:a16="http://schemas.microsoft.com/office/drawing/2014/main" id="{BABC76EB-1C4C-29EB-7605-9005FA64211F}"/>
               </a:ext>
             </a:extLst>
           </p:cNvPr>
@@ -30505,7 +30505,7 @@
           <p:cNvPr id="10" name="Straight Connector 9">
             <a:extLst>
               <a:ext uri="{FF2B5EF4-FFF2-40B4-BE49-F238E27FC236}">
-                <a16:creationId xmlns:a16="http://schemas.microsoft.com/office/drawing/2014/main" id="{483CEA93-E61E-016E-5226-FE01547A2AD9}"/>
+                <a16:creationId xmlns:a16="http://schemas.microsoft.com/office/drawing/2014/main" id="{D7BC0FBD-B708-A5FF-ED40-7AEA44918E12}"/>
               </a:ext>
             </a:extLst>
           </p:cNvPr>
@@ -30547,7 +30547,7 @@
           <p:cNvPr id="11" name="Rectangle: Rounded Corners 10">
             <a:extLst>
               <a:ext uri="{FF2B5EF4-FFF2-40B4-BE49-F238E27FC236}">
-                <a16:creationId xmlns:a16="http://schemas.microsoft.com/office/drawing/2014/main" id="{449962AC-4D22-099B-3D1D-294564B342D2}"/>
+                <a16:creationId xmlns:a16="http://schemas.microsoft.com/office/drawing/2014/main" id="{798B54B6-0A43-3FF0-2F90-98FD24532E79}"/>
               </a:ext>
             </a:extLst>
           </p:cNvPr>
@@ -30617,7 +30617,7 @@
           <p:cNvPr id="12" name="Oval 11">
             <a:extLst>
               <a:ext uri="{FF2B5EF4-FFF2-40B4-BE49-F238E27FC236}">
-                <a16:creationId xmlns:a16="http://schemas.microsoft.com/office/drawing/2014/main" id="{C55DB558-5FA8-539D-85D2-D8A2E504B6A9}"/>
+                <a16:creationId xmlns:a16="http://schemas.microsoft.com/office/drawing/2014/main" id="{121B0861-7EB2-A1D1-7AFD-B594FA0DBE74}"/>
               </a:ext>
             </a:extLst>
           </p:cNvPr>
@@ -30693,7 +30693,7 @@
           <p:cNvPr id="13" name="TextBox 12">
             <a:extLst>
               <a:ext uri="{FF2B5EF4-FFF2-40B4-BE49-F238E27FC236}">
-                <a16:creationId xmlns:a16="http://schemas.microsoft.com/office/drawing/2014/main" id="{69450F4F-434A-613B-D390-8CFD5BF7143A}"/>
+                <a16:creationId xmlns:a16="http://schemas.microsoft.com/office/drawing/2014/main" id="{BE48F36A-7496-3600-CBCA-EEE5D9E34BE8}"/>
               </a:ext>
             </a:extLst>
           </p:cNvPr>
@@ -30733,7 +30733,7 @@
           <p:cNvPr id="14" name="TextBox 13">
             <a:extLst>
               <a:ext uri="{FF2B5EF4-FFF2-40B4-BE49-F238E27FC236}">
-                <a16:creationId xmlns:a16="http://schemas.microsoft.com/office/drawing/2014/main" id="{DED7427C-B031-009B-072E-8852F30C69B7}"/>
+                <a16:creationId xmlns:a16="http://schemas.microsoft.com/office/drawing/2014/main" id="{899435D2-06DC-E394-F3ED-18DCFBEAE377}"/>
               </a:ext>
             </a:extLst>
           </p:cNvPr>
@@ -30773,7 +30773,7 @@
           <p:cNvPr id="15" name="TextBox 14">
             <a:extLst>
               <a:ext uri="{FF2B5EF4-FFF2-40B4-BE49-F238E27FC236}">
-                <a16:creationId xmlns:a16="http://schemas.microsoft.com/office/drawing/2014/main" id="{72F3D4BF-00AD-9313-E501-9C985BFAA02C}"/>
+                <a16:creationId xmlns:a16="http://schemas.microsoft.com/office/drawing/2014/main" id="{0CDB5FFA-39F4-8EDB-C8A9-AE7A514A1041}"/>
               </a:ext>
             </a:extLst>
           </p:cNvPr>
@@ -30813,7 +30813,7 @@
           <p:cNvPr id="16" name="Straight Connector 15">
             <a:extLst>
               <a:ext uri="{FF2B5EF4-FFF2-40B4-BE49-F238E27FC236}">
-                <a16:creationId xmlns:a16="http://schemas.microsoft.com/office/drawing/2014/main" id="{1A782952-1755-C0A6-6981-4C45EE698BD0}"/>
+                <a16:creationId xmlns:a16="http://schemas.microsoft.com/office/drawing/2014/main" id="{124321F4-48A7-CCE9-F8D8-D4920C293FB3}"/>
               </a:ext>
             </a:extLst>
           </p:cNvPr>
@@ -30855,7 +30855,7 @@
           <p:cNvPr id="17" name="Rectangle: Rounded Corners 16">
             <a:extLst>
               <a:ext uri="{FF2B5EF4-FFF2-40B4-BE49-F238E27FC236}">
-                <a16:creationId xmlns:a16="http://schemas.microsoft.com/office/drawing/2014/main" id="{0EE05704-79B7-E437-B735-67545A519646}"/>
+                <a16:creationId xmlns:a16="http://schemas.microsoft.com/office/drawing/2014/main" id="{15239595-4C87-D72A-6E3E-CB7FC17298D5}"/>
               </a:ext>
             </a:extLst>
           </p:cNvPr>
@@ -30925,7 +30925,7 @@
           <p:cNvPr id="18" name="Oval 17">
             <a:extLst>
               <a:ext uri="{FF2B5EF4-FFF2-40B4-BE49-F238E27FC236}">
-                <a16:creationId xmlns:a16="http://schemas.microsoft.com/office/drawing/2014/main" id="{6115830E-0626-97AC-8CE1-52AFE5C519DE}"/>
+                <a16:creationId xmlns:a16="http://schemas.microsoft.com/office/drawing/2014/main" id="{73D042E8-08C0-3383-6096-55D9BDB83DA1}"/>
               </a:ext>
             </a:extLst>
           </p:cNvPr>
@@ -31001,7 +31001,7 @@
           <p:cNvPr id="19" name="TextBox 18">
             <a:extLst>
               <a:ext uri="{FF2B5EF4-FFF2-40B4-BE49-F238E27FC236}">
-                <a16:creationId xmlns:a16="http://schemas.microsoft.com/office/drawing/2014/main" id="{BFEE8D45-A588-C130-DF10-ADF1D69C84A9}"/>
+                <a16:creationId xmlns:a16="http://schemas.microsoft.com/office/drawing/2014/main" id="{326BFE49-0D92-6561-D535-B6331C87995D}"/>
               </a:ext>
             </a:extLst>
           </p:cNvPr>
@@ -31041,7 +31041,7 @@
           <p:cNvPr id="20" name="TextBox 19">
             <a:extLst>
               <a:ext uri="{FF2B5EF4-FFF2-40B4-BE49-F238E27FC236}">
-                <a16:creationId xmlns:a16="http://schemas.microsoft.com/office/drawing/2014/main" id="{556F7B0E-B95F-D1D0-35D7-BD39FAF1B613}"/>
+                <a16:creationId xmlns:a16="http://schemas.microsoft.com/office/drawing/2014/main" id="{548E49B6-E65E-F8B3-460B-E24238AE7B8D}"/>
               </a:ext>
             </a:extLst>
           </p:cNvPr>
@@ -31081,7 +31081,7 @@
           <p:cNvPr id="21" name="TextBox 20">
             <a:extLst>
               <a:ext uri="{FF2B5EF4-FFF2-40B4-BE49-F238E27FC236}">
-                <a16:creationId xmlns:a16="http://schemas.microsoft.com/office/drawing/2014/main" id="{C8D89F07-8E19-0D93-5A81-C53BBF6A8454}"/>
+                <a16:creationId xmlns:a16="http://schemas.microsoft.com/office/drawing/2014/main" id="{8C301751-FDAB-6078-526E-ECE0B44A58EA}"/>
               </a:ext>
             </a:extLst>
           </p:cNvPr>
@@ -31127,7 +31127,7 @@
           <p:cNvPr id="22" name="Straight Connector 21">
             <a:extLst>
               <a:ext uri="{FF2B5EF4-FFF2-40B4-BE49-F238E27FC236}">
-                <a16:creationId xmlns:a16="http://schemas.microsoft.com/office/drawing/2014/main" id="{CC1C05CD-4D34-579D-9751-C85054D86C6A}"/>
+                <a16:creationId xmlns:a16="http://schemas.microsoft.com/office/drawing/2014/main" id="{1C21515D-6F03-2920-9EA4-9B7CE2AF396C}"/>
               </a:ext>
             </a:extLst>
           </p:cNvPr>
@@ -31169,7 +31169,7 @@
           <p:cNvPr id="23" name="Rectangle: Rounded Corners 22">
             <a:extLst>
               <a:ext uri="{FF2B5EF4-FFF2-40B4-BE49-F238E27FC236}">
-                <a16:creationId xmlns:a16="http://schemas.microsoft.com/office/drawing/2014/main" id="{280A7293-2E7F-08F9-51B0-EEDD2C32F050}"/>
+                <a16:creationId xmlns:a16="http://schemas.microsoft.com/office/drawing/2014/main" id="{054F027F-ED5E-F169-8B5B-7071F434328B}"/>
               </a:ext>
             </a:extLst>
           </p:cNvPr>
@@ -31225,7 +31225,7 @@
           <p:cNvPr id="24" name="Oval 23">
             <a:extLst>
               <a:ext uri="{FF2B5EF4-FFF2-40B4-BE49-F238E27FC236}">
-                <a16:creationId xmlns:a16="http://schemas.microsoft.com/office/drawing/2014/main" id="{18609F46-8E6C-7FF2-4648-509D89748B94}"/>
+                <a16:creationId xmlns:a16="http://schemas.microsoft.com/office/drawing/2014/main" id="{EED9CE74-9964-83BC-D433-9DD52174C627}"/>
               </a:ext>
             </a:extLst>
           </p:cNvPr>
@@ -31301,7 +31301,7 @@
           <p:cNvPr id="25" name="TextBox 24">
             <a:extLst>
               <a:ext uri="{FF2B5EF4-FFF2-40B4-BE49-F238E27FC236}">
-                <a16:creationId xmlns:a16="http://schemas.microsoft.com/office/drawing/2014/main" id="{250D1694-F925-D340-A962-7AE6191C8250}"/>
+                <a16:creationId xmlns:a16="http://schemas.microsoft.com/office/drawing/2014/main" id="{1743884B-E6D2-4D03-39D7-DF5790F0846F}"/>
               </a:ext>
             </a:extLst>
           </p:cNvPr>
@@ -31341,7 +31341,7 @@
           <p:cNvPr id="26" name="TextBox 25">
             <a:extLst>
               <a:ext uri="{FF2B5EF4-FFF2-40B4-BE49-F238E27FC236}">
-                <a16:creationId xmlns:a16="http://schemas.microsoft.com/office/drawing/2014/main" id="{63A6EFAE-3B1A-1848-F059-7972ECF3E345}"/>
+                <a16:creationId xmlns:a16="http://schemas.microsoft.com/office/drawing/2014/main" id="{92DF47CD-F49E-030D-81D7-14E8616695BA}"/>
               </a:ext>
             </a:extLst>
           </p:cNvPr>
@@ -31381,7 +31381,7 @@
           <p:cNvPr id="27" name="TextBox 26">
             <a:extLst>
               <a:ext uri="{FF2B5EF4-FFF2-40B4-BE49-F238E27FC236}">
-                <a16:creationId xmlns:a16="http://schemas.microsoft.com/office/drawing/2014/main" id="{AC925783-2FA2-D3B3-784B-3598B1487785}"/>
+                <a16:creationId xmlns:a16="http://schemas.microsoft.com/office/drawing/2014/main" id="{A7272013-B217-7983-46D4-B12D1B2F9478}"/>
               </a:ext>
             </a:extLst>
           </p:cNvPr>
@@ -31421,7 +31421,7 @@
           <p:cNvPr id="28" name="Straight Connector 27">
             <a:extLst>
               <a:ext uri="{FF2B5EF4-FFF2-40B4-BE49-F238E27FC236}">
-                <a16:creationId xmlns:a16="http://schemas.microsoft.com/office/drawing/2014/main" id="{9E332B10-B1FE-9514-616A-D17B1456CFEC}"/>
+                <a16:creationId xmlns:a16="http://schemas.microsoft.com/office/drawing/2014/main" id="{7509B578-1FC6-3292-5AF8-A447CD30DBD4}"/>
               </a:ext>
             </a:extLst>
           </p:cNvPr>
@@ -31463,7 +31463,7 @@
           <p:cNvPr id="29" name="Rectangle: Rounded Corners 28">
             <a:extLst>
               <a:ext uri="{FF2B5EF4-FFF2-40B4-BE49-F238E27FC236}">
-                <a16:creationId xmlns:a16="http://schemas.microsoft.com/office/drawing/2014/main" id="{857C4392-B65A-C61E-1BA3-4254F9555F1C}"/>
+                <a16:creationId xmlns:a16="http://schemas.microsoft.com/office/drawing/2014/main" id="{2516CF6B-12F2-8B5A-9FBD-E5AEDB332341}"/>
               </a:ext>
             </a:extLst>
           </p:cNvPr>
@@ -31553,7 +31553,7 @@
           <p:cNvPr id="30" name="Straight Connector 29">
             <a:extLst>
               <a:ext uri="{FF2B5EF4-FFF2-40B4-BE49-F238E27FC236}">
-                <a16:creationId xmlns:a16="http://schemas.microsoft.com/office/drawing/2014/main" id="{5ECB494A-3B13-03CF-97FE-C5554D478178}"/>
+                <a16:creationId xmlns:a16="http://schemas.microsoft.com/office/drawing/2014/main" id="{D81569F8-C63E-AE6F-AB72-D59F629139D0}"/>
               </a:ext>
             </a:extLst>
           </p:cNvPr>
@@ -31595,7 +31595,7 @@
           <p:cNvPr id="31" name="TextBox 30">
             <a:extLst>
               <a:ext uri="{FF2B5EF4-FFF2-40B4-BE49-F238E27FC236}">
-                <a16:creationId xmlns:a16="http://schemas.microsoft.com/office/drawing/2014/main" id="{07464A45-C3FE-D539-FEEB-FA90B9A732DF}"/>
+                <a16:creationId xmlns:a16="http://schemas.microsoft.com/office/drawing/2014/main" id="{26B017ED-ED38-4095-9C7D-EB8FDDC87F0E}"/>
               </a:ext>
             </a:extLst>
           </p:cNvPr>
@@ -31641,7 +31641,7 @@
           <p:cNvPr id="32" name="TextBox 31">
             <a:extLst>
               <a:ext uri="{FF2B5EF4-FFF2-40B4-BE49-F238E27FC236}">
-                <a16:creationId xmlns:a16="http://schemas.microsoft.com/office/drawing/2014/main" id="{BEE3E256-0BFE-81F9-905D-8DD415712D28}"/>
+                <a16:creationId xmlns:a16="http://schemas.microsoft.com/office/drawing/2014/main" id="{46304B6F-1E76-128B-144F-A31DE4DD06F8}"/>
               </a:ext>
             </a:extLst>
           </p:cNvPr>
@@ -31687,7 +31687,7 @@
           <p:cNvPr id="33" name="TextBox 32">
             <a:extLst>
               <a:ext uri="{FF2B5EF4-FFF2-40B4-BE49-F238E27FC236}">
-                <a16:creationId xmlns:a16="http://schemas.microsoft.com/office/drawing/2014/main" id="{0A775737-A741-E6D5-1E24-0E9CF5DA297F}"/>
+                <a16:creationId xmlns:a16="http://schemas.microsoft.com/office/drawing/2014/main" id="{0D064ECA-8EB2-D1A1-68FE-0583169EC4E2}"/>
               </a:ext>
             </a:extLst>
           </p:cNvPr>
@@ -31726,7 +31726,7 @@
     </p:spTree>
     <p:extLst>
       <p:ext uri="{BB962C8B-B14F-4D97-AF65-F5344CB8AC3E}">
-        <p14:creationId xmlns:p14="http://schemas.microsoft.com/office/powerpoint/2010/main" val="1197344607"/>
+        <p14:creationId xmlns:p14="http://schemas.microsoft.com/office/powerpoint/2010/main" val="2281806026"/>
       </p:ext>
     </p:extLst>
   </p:cSld>
@@ -31766,7 +31766,7 @@
           <p:cNvPr id="2" name="TextBox 1">
             <a:extLst>
               <a:ext uri="{FF2B5EF4-FFF2-40B4-BE49-F238E27FC236}">
-                <a16:creationId xmlns:a16="http://schemas.microsoft.com/office/drawing/2014/main" id="{A080309A-0CEC-AD9E-A0FA-31AB42A1E962}"/>
+                <a16:creationId xmlns:a16="http://schemas.microsoft.com/office/drawing/2014/main" id="{D9ECCC65-6374-1D70-4101-33930C517E63}"/>
               </a:ext>
             </a:extLst>
           </p:cNvPr>
@@ -31812,7 +31812,7 @@
           <p:cNvPr id="3" name="TextBox 2">
             <a:extLst>
               <a:ext uri="{FF2B5EF4-FFF2-40B4-BE49-F238E27FC236}">
-                <a16:creationId xmlns:a16="http://schemas.microsoft.com/office/drawing/2014/main" id="{2A9074C5-A8BC-CE50-AA27-A17A73D4D146}"/>
+                <a16:creationId xmlns:a16="http://schemas.microsoft.com/office/drawing/2014/main" id="{2117652D-E3CB-BB81-433D-545A0BF89A4B}"/>
               </a:ext>
             </a:extLst>
           </p:cNvPr>
@@ -31858,7 +31858,7 @@
           <p:cNvPr id="4" name="Rectangle: Rounded Corners 3">
             <a:extLst>
               <a:ext uri="{FF2B5EF4-FFF2-40B4-BE49-F238E27FC236}">
-                <a16:creationId xmlns:a16="http://schemas.microsoft.com/office/drawing/2014/main" id="{4B046137-0739-0476-8EE8-495ACA5FAF62}"/>
+                <a16:creationId xmlns:a16="http://schemas.microsoft.com/office/drawing/2014/main" id="{5DE7DFC0-A6AC-C327-B37A-F0F0C0DD79AB}"/>
               </a:ext>
             </a:extLst>
           </p:cNvPr>
@@ -31928,7 +31928,7 @@
           <p:cNvPr id="5" name="TextBox 4">
             <a:extLst>
               <a:ext uri="{FF2B5EF4-FFF2-40B4-BE49-F238E27FC236}">
-                <a16:creationId xmlns:a16="http://schemas.microsoft.com/office/drawing/2014/main" id="{0FE03D01-9E16-238F-F7D9-9739C12711E3}"/>
+                <a16:creationId xmlns:a16="http://schemas.microsoft.com/office/drawing/2014/main" id="{99D2AE31-D791-5897-5740-52359BB4F648}"/>
               </a:ext>
             </a:extLst>
           </p:cNvPr>
@@ -31968,7 +31968,7 @@
           <p:cNvPr id="6" name="TextBox 5">
             <a:extLst>
               <a:ext uri="{FF2B5EF4-FFF2-40B4-BE49-F238E27FC236}">
-                <a16:creationId xmlns:a16="http://schemas.microsoft.com/office/drawing/2014/main" id="{4869256E-A154-BC23-E523-796F76B4AED3}"/>
+                <a16:creationId xmlns:a16="http://schemas.microsoft.com/office/drawing/2014/main" id="{65A5170B-61BA-A60B-0E76-4CEA78D1D3A3}"/>
               </a:ext>
             </a:extLst>
           </p:cNvPr>
@@ -32051,7 +32051,7 @@
           <p:cNvPr id="7" name="Rectangle: Rounded Corners 6">
             <a:extLst>
               <a:ext uri="{FF2B5EF4-FFF2-40B4-BE49-F238E27FC236}">
-                <a16:creationId xmlns:a16="http://schemas.microsoft.com/office/drawing/2014/main" id="{76E5AF72-6A73-7122-AB32-95DB1FA346D6}"/>
+                <a16:creationId xmlns:a16="http://schemas.microsoft.com/office/drawing/2014/main" id="{06BCA2F5-15EE-FDA0-7671-FF725FF95092}"/>
               </a:ext>
             </a:extLst>
           </p:cNvPr>
@@ -32121,7 +32121,7 @@
           <p:cNvPr id="8" name="TextBox 7">
             <a:extLst>
               <a:ext uri="{FF2B5EF4-FFF2-40B4-BE49-F238E27FC236}">
-                <a16:creationId xmlns:a16="http://schemas.microsoft.com/office/drawing/2014/main" id="{15353C8D-8A5E-7584-FAEC-BA5620D8DC84}"/>
+                <a16:creationId xmlns:a16="http://schemas.microsoft.com/office/drawing/2014/main" id="{6BF31479-73F6-9335-D5FD-CDC3F7BA71CA}"/>
               </a:ext>
             </a:extLst>
           </p:cNvPr>
@@ -32161,7 +32161,7 @@
           <p:cNvPr id="9" name="TextBox 8">
             <a:extLst>
               <a:ext uri="{FF2B5EF4-FFF2-40B4-BE49-F238E27FC236}">
-                <a16:creationId xmlns:a16="http://schemas.microsoft.com/office/drawing/2014/main" id="{0A285467-E0CA-6A68-4F5C-B975766DBABF}"/>
+                <a16:creationId xmlns:a16="http://schemas.microsoft.com/office/drawing/2014/main" id="{0A1D4348-8494-7311-72A9-777BDEDBBEC8}"/>
               </a:ext>
             </a:extLst>
           </p:cNvPr>
@@ -32250,7 +32250,7 @@
           <p:cNvPr id="10" name="Rectangle: Rounded Corners 9">
             <a:extLst>
               <a:ext uri="{FF2B5EF4-FFF2-40B4-BE49-F238E27FC236}">
-                <a16:creationId xmlns:a16="http://schemas.microsoft.com/office/drawing/2014/main" id="{FC58BC01-DA26-3836-50DE-A89D7720AFE7}"/>
+                <a16:creationId xmlns:a16="http://schemas.microsoft.com/office/drawing/2014/main" id="{1D4575D3-5CF3-A988-B548-43BC401B08F4}"/>
               </a:ext>
             </a:extLst>
           </p:cNvPr>
@@ -32320,7 +32320,7 @@
           <p:cNvPr id="11" name="TextBox 10">
             <a:extLst>
               <a:ext uri="{FF2B5EF4-FFF2-40B4-BE49-F238E27FC236}">
-                <a16:creationId xmlns:a16="http://schemas.microsoft.com/office/drawing/2014/main" id="{2BE8ADB9-2C43-ADC7-CE75-8B94E3C8D723}"/>
+                <a16:creationId xmlns:a16="http://schemas.microsoft.com/office/drawing/2014/main" id="{A760477C-B4DE-034F-1DA2-8A53832BC10A}"/>
               </a:ext>
             </a:extLst>
           </p:cNvPr>
@@ -32360,7 +32360,7 @@
           <p:cNvPr id="12" name="TextBox 11">
             <a:extLst>
               <a:ext uri="{FF2B5EF4-FFF2-40B4-BE49-F238E27FC236}">
-                <a16:creationId xmlns:a16="http://schemas.microsoft.com/office/drawing/2014/main" id="{E6D96019-F85F-E88F-E8B5-D0587C3ACCC8}"/>
+                <a16:creationId xmlns:a16="http://schemas.microsoft.com/office/drawing/2014/main" id="{52461618-C7BA-08AC-9FAB-2EB6D3F99F12}"/>
               </a:ext>
             </a:extLst>
           </p:cNvPr>
@@ -32431,7 +32431,7 @@
           <p:cNvPr id="13" name="Rectangle: Rounded Corners 12">
             <a:extLst>
               <a:ext uri="{FF2B5EF4-FFF2-40B4-BE49-F238E27FC236}">
-                <a16:creationId xmlns:a16="http://schemas.microsoft.com/office/drawing/2014/main" id="{E4E30553-26D3-D50B-269B-F0DBF8654358}"/>
+                <a16:creationId xmlns:a16="http://schemas.microsoft.com/office/drawing/2014/main" id="{55888F11-35D3-54CB-0053-023E2EEE73CF}"/>
               </a:ext>
             </a:extLst>
           </p:cNvPr>
@@ -32514,7 +32514,7 @@
           <p:cNvPr id="14" name="TextBox 13">
             <a:extLst>
               <a:ext uri="{FF2B5EF4-FFF2-40B4-BE49-F238E27FC236}">
-                <a16:creationId xmlns:a16="http://schemas.microsoft.com/office/drawing/2014/main" id="{366675C3-1F74-9277-E421-AFBEBCBB854E}"/>
+                <a16:creationId xmlns:a16="http://schemas.microsoft.com/office/drawing/2014/main" id="{157CA100-77AA-1386-AEFB-4D4F4DAD90AC}"/>
               </a:ext>
             </a:extLst>
           </p:cNvPr>
@@ -32560,7 +32560,7 @@
           <p:cNvPr id="15" name="TextBox 14">
             <a:extLst>
               <a:ext uri="{FF2B5EF4-FFF2-40B4-BE49-F238E27FC236}">
-                <a16:creationId xmlns:a16="http://schemas.microsoft.com/office/drawing/2014/main" id="{BF244DFA-00D4-9352-2BE4-7231A00BA15B}"/>
+                <a16:creationId xmlns:a16="http://schemas.microsoft.com/office/drawing/2014/main" id="{06988CF9-381A-407B-B677-3C83F52527DD}"/>
               </a:ext>
             </a:extLst>
           </p:cNvPr>
@@ -32606,7 +32606,7 @@
           <p:cNvPr id="16" name="TextBox 15">
             <a:extLst>
               <a:ext uri="{FF2B5EF4-FFF2-40B4-BE49-F238E27FC236}">
-                <a16:creationId xmlns:a16="http://schemas.microsoft.com/office/drawing/2014/main" id="{1B12F8B3-15AE-AB42-0A07-D9DD10261C8D}"/>
+                <a16:creationId xmlns:a16="http://schemas.microsoft.com/office/drawing/2014/main" id="{21C97E74-1D0F-086F-1783-80C482038597}"/>
               </a:ext>
             </a:extLst>
           </p:cNvPr>
@@ -32645,7 +32645,7 @@
     </p:spTree>
     <p:extLst>
       <p:ext uri="{BB962C8B-B14F-4D97-AF65-F5344CB8AC3E}">
-        <p14:creationId xmlns:p14="http://schemas.microsoft.com/office/powerpoint/2010/main" val="2697362677"/>
+        <p14:creationId xmlns:p14="http://schemas.microsoft.com/office/powerpoint/2010/main" val="2612591851"/>
       </p:ext>
     </p:extLst>
   </p:cSld>
